--- a/presentation/Automated_Bug_Reporting_Presentation.pptx
+++ b/presentation/Automated_Bug_Reporting_Presentation.pptx
@@ -23,9 +23,10 @@
     <p:sldId id="271" r:id="rId17"/>
     <p:sldId id="272" r:id="rId18"/>
     <p:sldId id="273" r:id="rId19"/>
+    <p:sldId id="274" r:id="rId20"/>
   </p:sldIdLst>
   <p:notesMasterIdLst>
-    <p:notesMasterId r:id="rId20"/>
+    <p:notesMasterId r:id="rId21"/>
   </p:notesMasterIdLst>
   <p:sldSz cx="12192000" cy="6858000"/>
   <p:notesSz cx="6858000" cy="12192000"/>
@@ -124,7 +125,7 @@
   <p:extLst>
     <p:ext uri="{521415D9-36F7-43E2-AB2F-B90AF26B5E84}">
       <p14:sectionLst xmlns:p14="http://schemas.microsoft.com/office/powerpoint/2010/main">
-        <p14:section name="Introduction" id="{dd87324b-1b32-4cef-2c54-af70c02c5c7c}">
+        <p14:section name="Introduction" id="{02117910-e974-ab8c-4abb-e538f8126e6e}">
           <p14:sldIdLst>
             <p14:sldId id="256"/>
             <p14:sldId id="257"/>
@@ -132,14 +133,14 @@
             <p14:sldId id="259"/>
           </p14:sldIdLst>
         </p14:section>
-        <p14:section name="System Design" id="{b40e1627-22d7-75d4-b465-ac63a5f49285}">
+        <p14:section name="System Design" id="{e82f9ac8-bf0d-df5c-baa9-6f60f20af153}">
           <p14:sldIdLst>
             <p14:sldId id="260"/>
             <p14:sldId id="261"/>
             <p14:sldId id="262"/>
           </p14:sldIdLst>
         </p14:section>
-        <p14:section name="Implementation" id="{04b82b32-d956-e19f-e814-c2f616e7cd1a}">
+        <p14:section name="Implementation" id="{fd7de277-4c3e-34bd-0851-9166e0a4b147}">
           <p14:sldIdLst>
             <p14:sldId id="263"/>
             <p14:sldId id="264"/>
@@ -149,17 +150,18 @@
             <p14:sldId id="268"/>
             <p14:sldId id="269"/>
             <p14:sldId id="270"/>
-          </p14:sldIdLst>
-        </p14:section>
-        <p14:section name="Results" id="{17931ba3-01c2-8ca0-4f1a-7b2acac72429}">
-          <p14:sldIdLst>
             <p14:sldId id="271"/>
           </p14:sldIdLst>
         </p14:section>
-        <p14:section name="Conclusion" id="{5d13e761-8a94-9edf-1610-eb6024acd669}">
+        <p14:section name="Results" id="{dc982aa5-cf9e-cb24-6be6-3fea45960e0c}">
           <p14:sldIdLst>
             <p14:sldId id="272"/>
+          </p14:sldIdLst>
+        </p14:section>
+        <p14:section name="Conclusion" id="{72e89483-3e42-a4ea-a3e0-c4bb4387faa9}">
+          <p14:sldIdLst>
             <p14:sldId id="273"/>
+            <p14:sldId id="274"/>
           </p14:sldIdLst>
         </p14:section>
       </p14:sectionLst>
@@ -1018,23 +1020,26 @@
           </c:dLbls>
           <c:cat>
             <c:multiLvlStrRef>
-              <c:f>Sheet1!$A$2:$A$6</c:f>
+              <c:f>Sheet1!$A$2:$A$7</c:f>
               <c:multiLvlStrCache>
-                <c:ptCount val="5"/>
+                <c:ptCount val="6"/>
                 <c:lvl>
                   <c:pt idx="0">
                     <c:v>Profile</c:v>
                   </c:pt>
                   <c:pt idx="1">
+                    <c:v>Links</c:v>
+                  </c:pt>
+                  <c:pt idx="2">
                     <c:v>Search</c:v>
                   </c:pt>
-                  <c:pt idx="2">
+                  <c:pt idx="3">
                     <c:v>Cart</c:v>
                   </c:pt>
-                  <c:pt idx="3">
+                  <c:pt idx="4">
                     <c:v>Login</c:v>
                   </c:pt>
-                  <c:pt idx="4">
+                  <c:pt idx="5">
                     <c:v>Checkout</c:v>
                   </c:pt>
                 </c:lvl>
@@ -1043,23 +1048,26 @@
           </c:cat>
           <c:val>
             <c:numRef>
-              <c:f>Sheet1!$B$2:$B$6</c:f>
+              <c:f>Sheet1!$B$2:$B$7</c:f>
               <c:numCache>
                 <c:formatCode>General</c:formatCode>
-                <c:ptCount val="5"/>
+                <c:ptCount val="6"/>
                 <c:pt idx="0">
                   <c:v>4</c:v>
                 </c:pt>
                 <c:pt idx="1">
-                  <c:v>2</c:v>
+                  <c:v>3</c:v>
                 </c:pt>
                 <c:pt idx="2">
                   <c:v>2</c:v>
                 </c:pt>
                 <c:pt idx="3">
+                  <c:v>2</c:v>
+                </c:pt>
+                <c:pt idx="4">
                   <c:v>1</c:v>
                 </c:pt>
-                <c:pt idx="4">
+                <c:pt idx="5">
                   <c:v>1</c:v>
                 </c:pt>
               </c:numCache>
@@ -1357,10 +1365,10 @@
                 <c:formatCode>General</c:formatCode>
                 <c:ptCount val="3"/>
                 <c:pt idx="0">
-                  <c:v>3</c:v>
+                  <c:v>4</c:v>
                 </c:pt>
                 <c:pt idx="1">
-                  <c:v>4</c:v>
+                  <c:v>6</c:v>
                 </c:pt>
                 <c:pt idx="2">
                   <c:v>3</c:v>
@@ -1444,7 +1452,7 @@
         <c:axId val="2094734552"/>
         <c:scaling>
           <c:orientation val="minMax"/>
-          <c:max val="5"/>
+          <c:max val="7"/>
           <c:min val="0"/>
         </c:scaling>
         <c:delete val="0"/>
@@ -1699,7 +1707,7 @@
                   <c:v>0</c:v>
                 </c:pt>
                 <c:pt idx="13">
-                  <c:v>3</c:v>
+                  <c:v>4</c:v>
                 </c:pt>
               </c:numCache>
             </c:numRef>
@@ -1848,7 +1856,7 @@
                   <c:v>0</c:v>
                 </c:pt>
                 <c:pt idx="13">
-                  <c:v>4</c:v>
+                  <c:v>6</c:v>
                 </c:pt>
               </c:numCache>
             </c:numRef>
@@ -2078,7 +2086,7 @@
         <c:axId val="2094734552"/>
         <c:scaling>
           <c:orientation val="minMax"/>
-          <c:max val="10"/>
+          <c:max val="15"/>
           <c:min val="0"/>
         </c:scaling>
         <c:delete val="0"/>
@@ -2195,7 +2203,7 @@
                 </a:solidFill>
                 <a:latin typeface="+mn-lt"/>
               </a:rPr>
-              <a:t>Passed vs failed tests per run (16 tests)</a:t>
+              <a:t>Passed vs failed tests per run (17 tests)</a:t>
             </a:r>
           </a:p>
         </c:rich>
@@ -2258,9 +2266,9 @@
           </c:dLbls>
           <c:cat>
             <c:multiLvlStrRef>
-              <c:f>Sheet1!$A$2:$A$7</c:f>
+              <c:f>Sheet1!$A$2:$A$11</c:f>
               <c:multiLvlStrCache>
-                <c:ptCount val="6"/>
+                <c:ptCount val="10"/>
                 <c:lvl>
                   <c:pt idx="0">
                     <c:v>Run 1</c:v>
@@ -2280,21 +2288,33 @@
                   <c:pt idx="5">
                     <c:v>Run 6</c:v>
                   </c:pt>
+                  <c:pt idx="6">
+                    <c:v>Run 7</c:v>
+                  </c:pt>
+                  <c:pt idx="7">
+                    <c:v>Run 8</c:v>
+                  </c:pt>
+                  <c:pt idx="8">
+                    <c:v>Run 9</c:v>
+                  </c:pt>
+                  <c:pt idx="9">
+                    <c:v>Run 10</c:v>
+                  </c:pt>
                 </c:lvl>
               </c:multiLvlStrCache>
             </c:multiLvlStrRef>
           </c:cat>
           <c:val>
             <c:numRef>
-              <c:f>Sheet1!$B$2:$B$7</c:f>
+              <c:f>Sheet1!$B$2:$B$11</c:f>
               <c:numCache>
                 <c:formatCode>General</c:formatCode>
-                <c:ptCount val="6"/>
+                <c:ptCount val="10"/>
                 <c:pt idx="0">
                   <c:v>8</c:v>
                 </c:pt>
                 <c:pt idx="1">
-                  <c:v>6</c:v>
+                  <c:v>7</c:v>
                 </c:pt>
                 <c:pt idx="2">
                   <c:v>8</c:v>
@@ -2303,10 +2323,22 @@
                   <c:v>7</c:v>
                 </c:pt>
                 <c:pt idx="4">
+                  <c:v>7</c:v>
+                </c:pt>
+                <c:pt idx="5">
+                  <c:v>7</c:v>
+                </c:pt>
+                <c:pt idx="6">
+                  <c:v>7</c:v>
+                </c:pt>
+                <c:pt idx="7">
                   <c:v>8</c:v>
                 </c:pt>
-                <c:pt idx="5">
+                <c:pt idx="8">
                   <c:v>8</c:v>
+                </c:pt>
+                <c:pt idx="9">
+                  <c:v>7</c:v>
                 </c:pt>
               </c:numCache>
             </c:numRef>
@@ -2360,9 +2392,9 @@
           </c:dLbls>
           <c:cat>
             <c:multiLvlStrRef>
-              <c:f>Sheet1!$A$2:$A$7</c:f>
+              <c:f>Sheet1!$A$2:$A$11</c:f>
               <c:multiLvlStrCache>
-                <c:ptCount val="6"/>
+                <c:ptCount val="10"/>
                 <c:lvl>
                   <c:pt idx="0">
                     <c:v>Run 1</c:v>
@@ -2382,33 +2414,57 @@
                   <c:pt idx="5">
                     <c:v>Run 6</c:v>
                   </c:pt>
+                  <c:pt idx="6">
+                    <c:v>Run 7</c:v>
+                  </c:pt>
+                  <c:pt idx="7">
+                    <c:v>Run 8</c:v>
+                  </c:pt>
+                  <c:pt idx="8">
+                    <c:v>Run 9</c:v>
+                  </c:pt>
+                  <c:pt idx="9">
+                    <c:v>Run 10</c:v>
+                  </c:pt>
                 </c:lvl>
               </c:multiLvlStrCache>
             </c:multiLvlStrRef>
           </c:cat>
           <c:val>
             <c:numRef>
-              <c:f>Sheet1!$C$2:$C$7</c:f>
+              <c:f>Sheet1!$C$2:$C$11</c:f>
               <c:numCache>
                 <c:formatCode>General</c:formatCode>
-                <c:ptCount val="6"/>
+                <c:ptCount val="10"/>
                 <c:pt idx="0">
-                  <c:v>8</c:v>
+                  <c:v>9</c:v>
                 </c:pt>
                 <c:pt idx="1">
                   <c:v>10</c:v>
                 </c:pt>
                 <c:pt idx="2">
-                  <c:v>8</c:v>
+                  <c:v>9</c:v>
                 </c:pt>
                 <c:pt idx="3">
+                  <c:v>10</c:v>
+                </c:pt>
+                <c:pt idx="4">
+                  <c:v>10</c:v>
+                </c:pt>
+                <c:pt idx="5">
+                  <c:v>10</c:v>
+                </c:pt>
+                <c:pt idx="6">
+                  <c:v>10</c:v>
+                </c:pt>
+                <c:pt idx="7">
                   <c:v>9</c:v>
                 </c:pt>
-                <c:pt idx="4">
-                  <c:v>8</c:v>
+                <c:pt idx="8">
+                  <c:v>9</c:v>
                 </c:pt>
-                <c:pt idx="5">
-                  <c:v>8</c:v>
+                <c:pt idx="9">
+                  <c:v>10</c:v>
                 </c:pt>
               </c:numCache>
             </c:numRef>
@@ -2439,7 +2495,7 @@
           <c:showBubbleSize val="0"/>
           <c:showLeaderLines val="0"/>
         </c:dLbls>
-        <c:gapWidth val="50"/>
+        <c:gapWidth val="40"/>
         <c:overlap val="100"/>
         <c:axId val="2094734554"/>
         <c:axId val="2094734552"/>
@@ -2490,7 +2546,7 @@
         <c:axId val="2094734552"/>
         <c:scaling>
           <c:orientation val="minMax"/>
-          <c:max val="16"/>
+          <c:max val="17"/>
           <c:min val="0"/>
         </c:scaling>
         <c:delete val="0"/>
@@ -2535,7 +2591,7 @@
         <c:crossAx val="2094734554"/>
         <c:crosses val="autoZero"/>
         <c:crossBetween val="between"/>
-        <c:majorUnit val="4"/>
+        <c:majorUnit val="5"/>
       </c:valAx>
       <c:spPr>
         <a:noFill/>
@@ -3064,7 +3120,7 @@
           <a:p>
             <a:r>
               <a:rPr lang="en-US" dirty="0"/>
-              <a:t>The model was evaluated two ways: a stratified 80/20 split gives 86.1% accuracy and 5-fold cross-validation gives 87.2%. Critical has 100% precision, so when the model says Critical it is always right. Most mistakes push Minor or Critical messages into Major, the middle class. On the ten real failures from the demo app, all ten severities were correct.</a:t>
+              <a:t>The model was evaluated two ways: a stratified 80/20 split gives 86.1% accuracy and 5-fold cross-validation gives 87.2%. Critical has 100% precision, so when the model says Critical it is always right. Most mistakes push Minor or Critical messages into Major, the middle class. On the thirteen real failures from the demo app, including the three broken links, all thirteen severities were correct.</a:t>
             </a:r>
             <a:endParaRPr lang="en-US" dirty="0"/>
           </a:p>
@@ -3328,7 +3384,7 @@
           <a:p>
             <a:r>
               <a:rPr lang="en-US" dirty="0"/>
-              <a:t>The overview page has three charts. Bugs per module shows that Profile has the most defects. Severity distribution shows the ML predictions. The 14-day trend shows new bugs per day; in this run all ten bugs were found on the first day of testing, so the trend has one bar. On a real project the chart fills up as tests run every day.</a:t>
+              <a:t>The overview page has three charts. Bugs per module shows that Profile has the most defects, followed by the three broken links. Severity distribution shows the ML predictions. The 14-day trend shows new bugs per day; in this project all thirteen bugs were found on the first day of testing, so the trend has one bar. On a real project the chart fills up as tests run every day.</a:t>
             </a:r>
             <a:endParaRPr lang="en-US" dirty="0"/>
           </a:p>
@@ -3592,7 +3648,7 @@
           <a:p>
             <a:r>
               <a:rPr lang="en-US" dirty="0"/>
-              <a:t>Running the complete pipeline: 6 runs and 96 test executions. Ten unique bugs were logged with zero manual reports, all ten severities were correct, both flaky tests were found, and three Critical alerts were generated. The chart shows passed and failed tests per run; the number of failures changes only because of the two flaky tests.</a:t>
+              <a:t>As an additional feature, the system also checks every link on a website. It crawls every page of the site in a real browser, so links created by JavaScript are found too, collects all links, and requests each one. Any link that returns an error status or does not answer becomes a separate bug, with the pages where it appears, and the ML model assigns its severity. In ShopEase it crawled 11 pages and found exactly the three broken links: the Help Center returns HTTP 500 and was classified Critical, and two missing pages return 404 and were classified Major. The same test works on any website by setting one variable.</a:t>
             </a:r>
             <a:endParaRPr lang="en-US" dirty="0"/>
           </a:p>
@@ -3680,7 +3736,7 @@
           <a:p>
             <a:r>
               <a:rPr lang="en-US" dirty="0"/>
-              <a:t>In conclusion, all eight objectives were implemented and verified end to end. Bug reporting needs no manual effort, severity is predicted consistently, and flaky tests are separated from real defects. In future, the model can be trained on a larger real dataset and compared with other algorithms, and the system can create tickets in Jira, notify Slack and run in CI on every commit.</a:t>
+              <a:t>Running the complete pipeline: 10 runs and 170 test executions. Thirteen unique bugs were logged with zero manual reports, including the three broken links, all thirteen severities were correct, both flaky tests were found, and four Critical alerts were generated. The chart shows passed and failed tests per run; the number of failures changes only because of the two flaky tests.</a:t>
             </a:r>
             <a:endParaRPr lang="en-US" dirty="0"/>
           </a:p>
@@ -3768,7 +3824,7 @@
           <a:p>
             <a:r>
               <a:rPr lang="en-US" dirty="0"/>
-              <a:t>Thank you. I am happy to answer questions, and I can show a live demo: the pipeline runs the tests, and the dashboard shows the results.</a:t>
+              <a:t>In conclusion, all eight objectives were implemented and verified end to end. Bug reporting needs no manual effort, severity is predicted consistently, and flaky tests are separated from real defects. In future, the model can be trained on a larger real dataset and compared with other algorithms, and the system can create tickets in Jira, notify Slack and run in CI on every commit.</a:t>
             </a:r>
             <a:endParaRPr lang="en-US" dirty="0"/>
           </a:p>
@@ -3792,6 +3848,94 @@
             <a:fld id="{F7021451-1387-4CA6-816F-3879F97B5CBC}" type="slidenum">
               <a:rPr lang="en-US"/>
               <a:t>18</a:t>
+            </a:fld>
+            <a:endParaRPr lang="en-US"/>
+          </a:p>
+        </p:txBody>
+      </p:sp>
+    </p:spTree>
+    <p:extLst>
+      <p:ext uri="{BB962C8B-B14F-4D97-AF65-F5344CB8AC3E}">
+        <p14:creationId xmlns:p14="http://schemas.microsoft.com/office/powerpoint/2010/main" val="1024086991"/>
+      </p:ext>
+    </p:extLst>
+  </p:cSld>
+  <p:clrMapOvr>
+    <a:masterClrMapping/>
+  </p:clrMapOvr>
+</p:notes>
+</file>
+
+<file path=ppt/notesSlides/notesSlide19.xml><?xml version="1.0" encoding="utf-8"?>
+<p:notes xmlns:a="http://schemas.openxmlformats.org/drawingml/2006/main" xmlns:r="http://schemas.openxmlformats.org/officeDocument/2006/relationships" xmlns:p="http://schemas.openxmlformats.org/presentationml/2006/main">
+  <p:cSld>
+    <p:spTree>
+      <p:nvGrpSpPr>
+        <p:cNvPr id="1" name=""/>
+        <p:cNvGrpSpPr/>
+        <p:nvPr/>
+      </p:nvGrpSpPr>
+      <p:grpSpPr>
+        <a:xfrm>
+          <a:off x="0" y="0"/>
+          <a:ext cx="0" cy="0"/>
+          <a:chOff x="0" y="0"/>
+          <a:chExt cx="0" cy="0"/>
+        </a:xfrm>
+      </p:grpSpPr>
+      <p:sp>
+        <p:nvSpPr>
+          <p:cNvPr id="2" name="Slide Image Placeholder 1"/>
+          <p:cNvSpPr>
+            <a:spLocks noGrp="1" noRot="1" noChangeAspect="1"/>
+          </p:cNvSpPr>
+          <p:nvPr>
+            <p:ph type="sldImg"/>
+          </p:nvPr>
+        </p:nvSpPr>
+        <p:spPr/>
+      </p:sp>
+      <p:sp>
+        <p:nvSpPr>
+          <p:cNvPr id="3" name="Notes Placeholder 2"/>
+          <p:cNvSpPr>
+            <a:spLocks noGrp="1"/>
+          </p:cNvSpPr>
+          <p:nvPr>
+            <p:ph type="body" idx="1"/>
+          </p:nvPr>
+        </p:nvSpPr>
+        <p:spPr/>
+        <p:txBody>
+          <a:bodyPr/>
+          <a:lstStyle/>
+          <a:p>
+            <a:r>
+              <a:rPr lang="en-US" dirty="0"/>
+              <a:t>Thank you. I am happy to answer questions, and I can show a live demo: the pipeline runs the tests, and the dashboard shows the results.</a:t>
+            </a:r>
+            <a:endParaRPr lang="en-US" dirty="0"/>
+          </a:p>
+        </p:txBody>
+      </p:sp>
+      <p:sp>
+        <p:nvSpPr>
+          <p:cNvPr id="4" name="Slide Number Placeholder 3"/>
+          <p:cNvSpPr>
+            <a:spLocks noGrp="1"/>
+          </p:cNvSpPr>
+          <p:nvPr>
+            <p:ph type="sldNum" sz="quarter" idx="10"/>
+          </p:nvPr>
+        </p:nvSpPr>
+        <p:spPr/>
+        <p:txBody>
+          <a:bodyPr/>
+          <a:lstStyle/>
+          <a:p>
+            <a:fld id="{F7021451-1387-4CA6-816F-3879F97B5CBC}" type="slidenum">
+              <a:rPr lang="en-US"/>
+              <a:t>19</a:t>
             </a:fld>
             <a:endParaRPr lang="en-US"/>
           </a:p>
@@ -4296,7 +4440,7 @@
           <a:p>
             <a:r>
               <a:rPr lang="en-US" dirty="0"/>
-              <a:t>To have realistic failures, I built a demo shop called ShopEase with five modules. I seeded defects of different severities: a SQL error on login and a payment crash are Critical, wrong calculations are Major, typos and colours are Minor. Two APIs have random delays to create flaky tests.</a:t>
+              <a:t>To have realistic failures, I built a demo shop called ShopEase with five modules. I seeded defects of different severities: a SQL error on login and a payment crash are Critical, wrong calculations are Major, typos and colours are Minor. Two APIs have random delays to create flaky tests, and three links in the site are broken: one returns HTTP 500 and two lead to pages that do not exist.</a:t>
             </a:r>
             <a:endParaRPr lang="en-US" dirty="0"/>
           </a:p>
@@ -5670,7 +5814,7 @@
                 <a:ea typeface="Arial" pitchFamily="34" charset="-122"/>
                 <a:cs typeface="Arial" pitchFamily="34" charset="-120"/>
               </a:rPr>
-              <a:t>10 / 10</a:t>
+              <a:t>13 / 13</a:t>
             </a:r>
             <a:endParaRPr lang="en-US" sz="4000" dirty="0"/>
           </a:p>
@@ -9523,7 +9667,7 @@
                 <a:ea typeface="Courier New" pitchFamily="34" charset="-122"/>
                 <a:cs typeface="Courier New" pitchFamily="34" charset="-120"/>
               </a:rPr>
-              <a:t>Example history  P F P F P P</a:t>
+              <a:t>Example:  P F P F F F P P P P</a:t>
             </a:r>
             <a:endParaRPr lang="en-US" sz="1600" dirty="0"/>
           </a:p>
@@ -9563,7 +9707,7 @@
                   <a:schemeClr val="tx1"/>
                 </a:solidFill>
               </a:rPr>
-              <a:t>Failure rate = fails / runs = 2/6 = 33%</a:t>
+              <a:t>Failure rate = fails / runs = 4/10 = 40%</a:t>
             </a:r>
             <a:endParaRPr lang="en-US" sz="1500" dirty="0"/>
           </a:p>
@@ -9581,7 +9725,7 @@
                   <a:schemeClr val="tx1"/>
                 </a:solidFill>
               </a:rPr>
-              <a:t>Flip rate = result changes / (runs − 1) = 4/5 = 80%</a:t>
+              <a:t>Flip rate = changes / (runs − 1) = 4/9 = 44%</a:t>
             </a:r>
             <a:endParaRPr lang="en-US" sz="1500" dirty="0"/>
           </a:p>
@@ -9635,7 +9779,7 @@
                   <a:schemeClr val="tx2"/>
                 </a:solidFill>
               </a:rPr>
-              <a:t>Detected in 6 runs of the demo suite</a:t>
+              <a:t>Detected in 10 runs of the demo suite</a:t>
             </a:r>
             <a:endParaRPr lang="en-US" sz="1800" dirty="0"/>
           </a:p>
@@ -9664,10 +9808,10 @@
             <a:tbl>
               <a:tblPr/>
               <a:tblGrid>
-                <a:gridCol w="2587752"/>
-                <a:gridCol w="868680"/>
-                <a:gridCol w="868680"/>
-                <a:gridCol w="1463040"/>
+                <a:gridCol w="2377440"/>
+                <a:gridCol w="822960"/>
+                <a:gridCol w="822960"/>
+                <a:gridCol w="1764792"/>
               </a:tblGrid>
               <a:tr h="411480">
                 <a:tc>
@@ -9865,7 +10009,7 @@
                           <a:ea typeface="Calibri" pitchFamily="34" charset="-122"/>
                           <a:cs typeface="Calibri" pitchFamily="34" charset="-120"/>
                         </a:rPr>
-                        <a:t>Cart: adding a product updates the cart badge</a:t>
+                        <a:t>Profile: saving the profile shows a success message</a:t>
                       </a:r>
                       <a:endParaRPr lang="en-US" sz="1400" dirty="0">
                         <a:latin typeface="Calibri" charset="0"/>
@@ -9887,6 +10031,9 @@
                     <a:lnB w="0" cap="flat" cmpd="sng" algn="ctr">
                       <a:noFill/>
                     </a:lnB>
+                    <a:solidFill>
+                      <a:srgbClr val="FFFFFF"/>
+                    </a:solidFill>
                   </a:tcPr>
                 </a:tc>
                 <a:tc>
@@ -9906,7 +10053,7 @@
                           <a:ea typeface="Calibri" pitchFamily="34" charset="-122"/>
                           <a:cs typeface="Calibri" pitchFamily="34" charset="-120"/>
                         </a:rPr>
-                        <a:t>33%</a:t>
+                        <a:t>40%</a:t>
                       </a:r>
                       <a:endParaRPr lang="en-US" sz="1400" dirty="0">
                         <a:latin typeface="Calibri" charset="0"/>
@@ -9928,6 +10075,9 @@
                     <a:lnB w="0" cap="flat" cmpd="sng" algn="ctr">
                       <a:noFill/>
                     </a:lnB>
+                    <a:solidFill>
+                      <a:srgbClr val="FFFFFF"/>
+                    </a:solidFill>
                   </a:tcPr>
                 </a:tc>
                 <a:tc>
@@ -9947,7 +10097,7 @@
                           <a:ea typeface="Calibri" pitchFamily="34" charset="-122"/>
                           <a:cs typeface="Calibri" pitchFamily="34" charset="-120"/>
                         </a:rPr>
-                        <a:t>80%</a:t>
+                        <a:t>44%</a:t>
                       </a:r>
                       <a:endParaRPr lang="en-US" sz="1400" dirty="0">
                         <a:latin typeface="Calibri" charset="0"/>
@@ -9969,6 +10119,9 @@
                     <a:lnB w="0" cap="flat" cmpd="sng" algn="ctr">
                       <a:noFill/>
                     </a:lnB>
+                    <a:solidFill>
+                      <a:srgbClr val="FFFFFF"/>
+                    </a:solidFill>
                   </a:tcPr>
                 </a:tc>
                 <a:tc>
@@ -10038,202 +10191,13 @@
                       <a:r>
                         <a:rPr lang="en-US" sz="1400" b="1" dirty="0">
                           <a:solidFill>
-                            <a:srgbClr val="1B8E4E"/>
+                            <a:srgbClr val="D03B3B"/>
                           </a:solidFill>
                           <a:latin typeface="Courier New" pitchFamily="34" charset="0"/>
                           <a:ea typeface="Courier New" pitchFamily="34" charset="-122"/>
                           <a:cs typeface="Courier New" pitchFamily="34" charset="-120"/>
                         </a:rPr>
-                        <a:t>P</a:t>
-                      </a:r>
-                      <a:pPr indent="0" marL="0">
-                        <a:buNone/>
-                      </a:pPr>
-                      <a:r>
-                        <a:rPr lang="en-US" sz="1400" b="1" dirty="0">
-                          <a:solidFill>
-                            <a:srgbClr val="1B8E4E"/>
-                          </a:solidFill>
-                          <a:latin typeface="Courier New" pitchFamily="34" charset="0"/>
-                          <a:ea typeface="Courier New" pitchFamily="34" charset="-122"/>
-                          <a:cs typeface="Courier New" pitchFamily="34" charset="-120"/>
-                        </a:rPr>
-                        <a:t>P</a:t>
-                      </a:r>
-                      <a:endParaRPr lang="en-US" sz="1400" dirty="0">
-                        <a:latin typeface="Calibri" charset="0"/>
-                        <a:ea typeface="Calibri" charset="0"/>
-                        <a:cs typeface="Calibri" charset="0"/>
-                      </a:endParaRPr>
-                    </a:p>
-                  </a:txBody>
-                  <a:tcPr marL="91440" marR="91440" marT="36576" marB="36576" anchor="ctr">
-                    <a:lnL w="0" cap="flat" cmpd="sng" algn="ctr">
-                      <a:noFill/>
-                    </a:lnL>
-                    <a:lnR w="0" cap="flat" cmpd="sng" algn="ctr">
-                      <a:noFill/>
-                    </a:lnR>
-                    <a:lnT w="0" cap="flat" cmpd="sng" algn="ctr">
-                      <a:noFill/>
-                    </a:lnT>
-                    <a:lnB w="0" cap="flat" cmpd="sng" algn="ctr">
-                      <a:noFill/>
-                    </a:lnB>
-                  </a:tcPr>
-                </a:tc>
-              </a:tr>
-              <a:tr h="685800">
-                <a:tc>
-                  <a:txBody>
-                    <a:bodyPr/>
-                    <a:lstStyle/>
-                    <a:p>
-                      <a:pPr indent="0" marL="0">
-                        <a:buNone/>
-                      </a:pPr>
-                      <a:r>
-                        <a:rPr lang="en-US" sz="1400" dirty="0">
-                          <a:solidFill>
-                            <a:srgbClr val="1F2328"/>
-                          </a:solidFill>
-                          <a:latin typeface="Calibri" pitchFamily="34" charset="0"/>
-                          <a:ea typeface="Calibri" pitchFamily="34" charset="-122"/>
-                          <a:cs typeface="Calibri" pitchFamily="34" charset="-120"/>
-                        </a:rPr>
-                        <a:t>Profile: saving the profile shows a success message</a:t>
-                      </a:r>
-                      <a:endParaRPr lang="en-US" sz="1400" dirty="0">
-                        <a:latin typeface="Calibri" charset="0"/>
-                        <a:ea typeface="Calibri" charset="0"/>
-                        <a:cs typeface="Calibri" charset="0"/>
-                      </a:endParaRPr>
-                    </a:p>
-                  </a:txBody>
-                  <a:tcPr marL="91440" marR="91440" marT="36576" marB="36576" anchor="ctr">
-                    <a:lnL w="0" cap="flat" cmpd="sng" algn="ctr">
-                      <a:noFill/>
-                    </a:lnL>
-                    <a:lnR w="0" cap="flat" cmpd="sng" algn="ctr">
-                      <a:noFill/>
-                    </a:lnR>
-                    <a:lnT w="0" cap="flat" cmpd="sng" algn="ctr">
-                      <a:noFill/>
-                    </a:lnT>
-                    <a:lnB w="0" cap="flat" cmpd="sng" algn="ctr">
-                      <a:noFill/>
-                    </a:lnB>
-                    <a:solidFill>
-                      <a:srgbClr val="F1F4F8"/>
-                    </a:solidFill>
-                  </a:tcPr>
-                </a:tc>
-                <a:tc>
-                  <a:txBody>
-                    <a:bodyPr/>
-                    <a:lstStyle/>
-                    <a:p>
-                      <a:pPr algn="ctr" indent="0" marL="0">
-                        <a:buNone/>
-                      </a:pPr>
-                      <a:r>
-                        <a:rPr lang="en-US" sz="1400" dirty="0">
-                          <a:solidFill>
-                            <a:srgbClr val="1F2328"/>
-                          </a:solidFill>
-                          <a:latin typeface="Calibri" pitchFamily="34" charset="0"/>
-                          <a:ea typeface="Calibri" pitchFamily="34" charset="-122"/>
-                          <a:cs typeface="Calibri" pitchFamily="34" charset="-120"/>
-                        </a:rPr>
-                        <a:t>17%</a:t>
-                      </a:r>
-                      <a:endParaRPr lang="en-US" sz="1400" dirty="0">
-                        <a:latin typeface="Calibri" charset="0"/>
-                        <a:ea typeface="Calibri" charset="0"/>
-                        <a:cs typeface="Calibri" charset="0"/>
-                      </a:endParaRPr>
-                    </a:p>
-                  </a:txBody>
-                  <a:tcPr marL="91440" marR="91440" marT="36576" marB="36576" anchor="ctr">
-                    <a:lnL w="0" cap="flat" cmpd="sng" algn="ctr">
-                      <a:noFill/>
-                    </a:lnL>
-                    <a:lnR w="0" cap="flat" cmpd="sng" algn="ctr">
-                      <a:noFill/>
-                    </a:lnR>
-                    <a:lnT w="0" cap="flat" cmpd="sng" algn="ctr">
-                      <a:noFill/>
-                    </a:lnT>
-                    <a:lnB w="0" cap="flat" cmpd="sng" algn="ctr">
-                      <a:noFill/>
-                    </a:lnB>
-                    <a:solidFill>
-                      <a:srgbClr val="F1F4F8"/>
-                    </a:solidFill>
-                  </a:tcPr>
-                </a:tc>
-                <a:tc>
-                  <a:txBody>
-                    <a:bodyPr/>
-                    <a:lstStyle/>
-                    <a:p>
-                      <a:pPr algn="ctr" indent="0" marL="0">
-                        <a:buNone/>
-                      </a:pPr>
-                      <a:r>
-                        <a:rPr lang="en-US" sz="1400" dirty="0">
-                          <a:solidFill>
-                            <a:srgbClr val="1F2328"/>
-                          </a:solidFill>
-                          <a:latin typeface="Calibri" pitchFamily="34" charset="0"/>
-                          <a:ea typeface="Calibri" pitchFamily="34" charset="-122"/>
-                          <a:cs typeface="Calibri" pitchFamily="34" charset="-120"/>
-                        </a:rPr>
-                        <a:t>40%</a:t>
-                      </a:r>
-                      <a:endParaRPr lang="en-US" sz="1400" dirty="0">
-                        <a:latin typeface="Calibri" charset="0"/>
-                        <a:ea typeface="Calibri" charset="0"/>
-                        <a:cs typeface="Calibri" charset="0"/>
-                      </a:endParaRPr>
-                    </a:p>
-                  </a:txBody>
-                  <a:tcPr marL="91440" marR="91440" marT="36576" marB="36576" anchor="ctr">
-                    <a:lnL w="0" cap="flat" cmpd="sng" algn="ctr">
-                      <a:noFill/>
-                    </a:lnL>
-                    <a:lnR w="0" cap="flat" cmpd="sng" algn="ctr">
-                      <a:noFill/>
-                    </a:lnR>
-                    <a:lnT w="0" cap="flat" cmpd="sng" algn="ctr">
-                      <a:noFill/>
-                    </a:lnT>
-                    <a:lnB w="0" cap="flat" cmpd="sng" algn="ctr">
-                      <a:noFill/>
-                    </a:lnB>
-                    <a:solidFill>
-                      <a:srgbClr val="F1F4F8"/>
-                    </a:solidFill>
-                  </a:tcPr>
-                </a:tc>
-                <a:tc>
-                  <a:txBody>
-                    <a:bodyPr/>
-                    <a:lstStyle/>
-                    <a:p>
-                      <a:pPr indent="0" marL="0">
-                        <a:buNone/>
-                      </a:pPr>
-                      <a:r>
-                        <a:rPr lang="en-US" sz="1400" b="1" dirty="0">
-                          <a:solidFill>
-                            <a:srgbClr val="1B8E4E"/>
-                          </a:solidFill>
-                          <a:latin typeface="Courier New" pitchFamily="34" charset="0"/>
-                          <a:ea typeface="Courier New" pitchFamily="34" charset="-122"/>
-                          <a:cs typeface="Courier New" pitchFamily="34" charset="-120"/>
-                        </a:rPr>
-                        <a:t>P</a:t>
+                        <a:t>F</a:t>
                       </a:r>
                       <a:pPr indent="0" marL="0">
                         <a:buNone/>
@@ -10326,6 +10290,310 @@
                       <a:noFill/>
                     </a:lnB>
                     <a:solidFill>
+                      <a:srgbClr val="FFFFFF"/>
+                    </a:solidFill>
+                  </a:tcPr>
+                </a:tc>
+              </a:tr>
+              <a:tr h="685800">
+                <a:tc>
+                  <a:txBody>
+                    <a:bodyPr/>
+                    <a:lstStyle/>
+                    <a:p>
+                      <a:pPr indent="0" marL="0">
+                        <a:buNone/>
+                      </a:pPr>
+                      <a:r>
+                        <a:rPr lang="en-US" sz="1400" dirty="0">
+                          <a:solidFill>
+                            <a:srgbClr val="1F2328"/>
+                          </a:solidFill>
+                          <a:latin typeface="Calibri" pitchFamily="34" charset="0"/>
+                          <a:ea typeface="Calibri" pitchFamily="34" charset="-122"/>
+                          <a:cs typeface="Calibri" pitchFamily="34" charset="-120"/>
+                        </a:rPr>
+                        <a:t>Cart: adding a product updates the cart badge</a:t>
+                      </a:r>
+                      <a:endParaRPr lang="en-US" sz="1400" dirty="0">
+                        <a:latin typeface="Calibri" charset="0"/>
+                        <a:ea typeface="Calibri" charset="0"/>
+                        <a:cs typeface="Calibri" charset="0"/>
+                      </a:endParaRPr>
+                    </a:p>
+                  </a:txBody>
+                  <a:tcPr marL="91440" marR="91440" marT="36576" marB="36576" anchor="ctr">
+                    <a:lnL w="0" cap="flat" cmpd="sng" algn="ctr">
+                      <a:noFill/>
+                    </a:lnL>
+                    <a:lnR w="0" cap="flat" cmpd="sng" algn="ctr">
+                      <a:noFill/>
+                    </a:lnR>
+                    <a:lnT w="0" cap="flat" cmpd="sng" algn="ctr">
+                      <a:noFill/>
+                    </a:lnT>
+                    <a:lnB w="0" cap="flat" cmpd="sng" algn="ctr">
+                      <a:noFill/>
+                    </a:lnB>
+                    <a:solidFill>
+                      <a:srgbClr val="F1F4F8"/>
+                    </a:solidFill>
+                  </a:tcPr>
+                </a:tc>
+                <a:tc>
+                  <a:txBody>
+                    <a:bodyPr/>
+                    <a:lstStyle/>
+                    <a:p>
+                      <a:pPr algn="ctr" indent="0" marL="0">
+                        <a:buNone/>
+                      </a:pPr>
+                      <a:r>
+                        <a:rPr lang="en-US" sz="1400" dirty="0">
+                          <a:solidFill>
+                            <a:srgbClr val="1F2328"/>
+                          </a:solidFill>
+                          <a:latin typeface="Calibri" pitchFamily="34" charset="0"/>
+                          <a:ea typeface="Calibri" pitchFamily="34" charset="-122"/>
+                          <a:cs typeface="Calibri" pitchFamily="34" charset="-120"/>
+                        </a:rPr>
+                        <a:t>20%</a:t>
+                      </a:r>
+                      <a:endParaRPr lang="en-US" sz="1400" dirty="0">
+                        <a:latin typeface="Calibri" charset="0"/>
+                        <a:ea typeface="Calibri" charset="0"/>
+                        <a:cs typeface="Calibri" charset="0"/>
+                      </a:endParaRPr>
+                    </a:p>
+                  </a:txBody>
+                  <a:tcPr marL="91440" marR="91440" marT="36576" marB="36576" anchor="ctr">
+                    <a:lnL w="0" cap="flat" cmpd="sng" algn="ctr">
+                      <a:noFill/>
+                    </a:lnL>
+                    <a:lnR w="0" cap="flat" cmpd="sng" algn="ctr">
+                      <a:noFill/>
+                    </a:lnR>
+                    <a:lnT w="0" cap="flat" cmpd="sng" algn="ctr">
+                      <a:noFill/>
+                    </a:lnT>
+                    <a:lnB w="0" cap="flat" cmpd="sng" algn="ctr">
+                      <a:noFill/>
+                    </a:lnB>
+                    <a:solidFill>
+                      <a:srgbClr val="F1F4F8"/>
+                    </a:solidFill>
+                  </a:tcPr>
+                </a:tc>
+                <a:tc>
+                  <a:txBody>
+                    <a:bodyPr/>
+                    <a:lstStyle/>
+                    <a:p>
+                      <a:pPr algn="ctr" indent="0" marL="0">
+                        <a:buNone/>
+                      </a:pPr>
+                      <a:r>
+                        <a:rPr lang="en-US" sz="1400" dirty="0">
+                          <a:solidFill>
+                            <a:srgbClr val="1F2328"/>
+                          </a:solidFill>
+                          <a:latin typeface="Calibri" pitchFamily="34" charset="0"/>
+                          <a:ea typeface="Calibri" pitchFamily="34" charset="-122"/>
+                          <a:cs typeface="Calibri" pitchFamily="34" charset="-120"/>
+                        </a:rPr>
+                        <a:t>33%</a:t>
+                      </a:r>
+                      <a:endParaRPr lang="en-US" sz="1400" dirty="0">
+                        <a:latin typeface="Calibri" charset="0"/>
+                        <a:ea typeface="Calibri" charset="0"/>
+                        <a:cs typeface="Calibri" charset="0"/>
+                      </a:endParaRPr>
+                    </a:p>
+                  </a:txBody>
+                  <a:tcPr marL="91440" marR="91440" marT="36576" marB="36576" anchor="ctr">
+                    <a:lnL w="0" cap="flat" cmpd="sng" algn="ctr">
+                      <a:noFill/>
+                    </a:lnL>
+                    <a:lnR w="0" cap="flat" cmpd="sng" algn="ctr">
+                      <a:noFill/>
+                    </a:lnR>
+                    <a:lnT w="0" cap="flat" cmpd="sng" algn="ctr">
+                      <a:noFill/>
+                    </a:lnT>
+                    <a:lnB w="0" cap="flat" cmpd="sng" algn="ctr">
+                      <a:noFill/>
+                    </a:lnB>
+                    <a:solidFill>
+                      <a:srgbClr val="F1F4F8"/>
+                    </a:solidFill>
+                  </a:tcPr>
+                </a:tc>
+                <a:tc>
+                  <a:txBody>
+                    <a:bodyPr/>
+                    <a:lstStyle/>
+                    <a:p>
+                      <a:pPr indent="0" marL="0">
+                        <a:buNone/>
+                      </a:pPr>
+                      <a:r>
+                        <a:rPr lang="en-US" sz="1400" b="1" dirty="0">
+                          <a:solidFill>
+                            <a:srgbClr val="1B8E4E"/>
+                          </a:solidFill>
+                          <a:latin typeface="Courier New" pitchFamily="34" charset="0"/>
+                          <a:ea typeface="Courier New" pitchFamily="34" charset="-122"/>
+                          <a:cs typeface="Courier New" pitchFamily="34" charset="-120"/>
+                        </a:rPr>
+                        <a:t>P</a:t>
+                      </a:r>
+                      <a:pPr indent="0" marL="0">
+                        <a:buNone/>
+                      </a:pPr>
+                      <a:r>
+                        <a:rPr lang="en-US" sz="1400" b="1" dirty="0">
+                          <a:solidFill>
+                            <a:srgbClr val="1B8E4E"/>
+                          </a:solidFill>
+                          <a:latin typeface="Courier New" pitchFamily="34" charset="0"/>
+                          <a:ea typeface="Courier New" pitchFamily="34" charset="-122"/>
+                          <a:cs typeface="Courier New" pitchFamily="34" charset="-120"/>
+                        </a:rPr>
+                        <a:t>P</a:t>
+                      </a:r>
+                      <a:pPr indent="0" marL="0">
+                        <a:buNone/>
+                      </a:pPr>
+                      <a:r>
+                        <a:rPr lang="en-US" sz="1400" b="1" dirty="0">
+                          <a:solidFill>
+                            <a:srgbClr val="1B8E4E"/>
+                          </a:solidFill>
+                          <a:latin typeface="Courier New" pitchFamily="34" charset="0"/>
+                          <a:ea typeface="Courier New" pitchFamily="34" charset="-122"/>
+                          <a:cs typeface="Courier New" pitchFamily="34" charset="-120"/>
+                        </a:rPr>
+                        <a:t>P</a:t>
+                      </a:r>
+                      <a:pPr indent="0" marL="0">
+                        <a:buNone/>
+                      </a:pPr>
+                      <a:r>
+                        <a:rPr lang="en-US" sz="1400" b="1" dirty="0">
+                          <a:solidFill>
+                            <a:srgbClr val="1B8E4E"/>
+                          </a:solidFill>
+                          <a:latin typeface="Courier New" pitchFamily="34" charset="0"/>
+                          <a:ea typeface="Courier New" pitchFamily="34" charset="-122"/>
+                          <a:cs typeface="Courier New" pitchFamily="34" charset="-120"/>
+                        </a:rPr>
+                        <a:t>P</a:t>
+                      </a:r>
+                      <a:pPr indent="0" marL="0">
+                        <a:buNone/>
+                      </a:pPr>
+                      <a:r>
+                        <a:rPr lang="en-US" sz="1400" b="1" dirty="0">
+                          <a:solidFill>
+                            <a:srgbClr val="1B8E4E"/>
+                          </a:solidFill>
+                          <a:latin typeface="Courier New" pitchFamily="34" charset="0"/>
+                          <a:ea typeface="Courier New" pitchFamily="34" charset="-122"/>
+                          <a:cs typeface="Courier New" pitchFamily="34" charset="-120"/>
+                        </a:rPr>
+                        <a:t>P</a:t>
+                      </a:r>
+                      <a:pPr indent="0" marL="0">
+                        <a:buNone/>
+                      </a:pPr>
+                      <a:r>
+                        <a:rPr lang="en-US" sz="1400" b="1" dirty="0">
+                          <a:solidFill>
+                            <a:srgbClr val="1B8E4E"/>
+                          </a:solidFill>
+                          <a:latin typeface="Courier New" pitchFamily="34" charset="0"/>
+                          <a:ea typeface="Courier New" pitchFamily="34" charset="-122"/>
+                          <a:cs typeface="Courier New" pitchFamily="34" charset="-120"/>
+                        </a:rPr>
+                        <a:t>P</a:t>
+                      </a:r>
+                      <a:pPr indent="0" marL="0">
+                        <a:buNone/>
+                      </a:pPr>
+                      <a:r>
+                        <a:rPr lang="en-US" sz="1400" b="1" dirty="0">
+                          <a:solidFill>
+                            <a:srgbClr val="D03B3B"/>
+                          </a:solidFill>
+                          <a:latin typeface="Courier New" pitchFamily="34" charset="0"/>
+                          <a:ea typeface="Courier New" pitchFamily="34" charset="-122"/>
+                          <a:cs typeface="Courier New" pitchFamily="34" charset="-120"/>
+                        </a:rPr>
+                        <a:t>F</a:t>
+                      </a:r>
+                      <a:pPr indent="0" marL="0">
+                        <a:buNone/>
+                      </a:pPr>
+                      <a:r>
+                        <a:rPr lang="en-US" sz="1400" b="1" dirty="0">
+                          <a:solidFill>
+                            <a:srgbClr val="1B8E4E"/>
+                          </a:solidFill>
+                          <a:latin typeface="Courier New" pitchFamily="34" charset="0"/>
+                          <a:ea typeface="Courier New" pitchFamily="34" charset="-122"/>
+                          <a:cs typeface="Courier New" pitchFamily="34" charset="-120"/>
+                        </a:rPr>
+                        <a:t>P</a:t>
+                      </a:r>
+                      <a:pPr indent="0" marL="0">
+                        <a:buNone/>
+                      </a:pPr>
+                      <a:r>
+                        <a:rPr lang="en-US" sz="1400" b="1" dirty="0">
+                          <a:solidFill>
+                            <a:srgbClr val="1B8E4E"/>
+                          </a:solidFill>
+                          <a:latin typeface="Courier New" pitchFamily="34" charset="0"/>
+                          <a:ea typeface="Courier New" pitchFamily="34" charset="-122"/>
+                          <a:cs typeface="Courier New" pitchFamily="34" charset="-120"/>
+                        </a:rPr>
+                        <a:t>P</a:t>
+                      </a:r>
+                      <a:pPr indent="0" marL="0">
+                        <a:buNone/>
+                      </a:pPr>
+                      <a:r>
+                        <a:rPr lang="en-US" sz="1400" b="1" dirty="0">
+                          <a:solidFill>
+                            <a:srgbClr val="D03B3B"/>
+                          </a:solidFill>
+                          <a:latin typeface="Courier New" pitchFamily="34" charset="0"/>
+                          <a:ea typeface="Courier New" pitchFamily="34" charset="-122"/>
+                          <a:cs typeface="Courier New" pitchFamily="34" charset="-120"/>
+                        </a:rPr>
+                        <a:t>F</a:t>
+                      </a:r>
+                      <a:endParaRPr lang="en-US" sz="1400" dirty="0">
+                        <a:latin typeface="Calibri" charset="0"/>
+                        <a:ea typeface="Calibri" charset="0"/>
+                        <a:cs typeface="Calibri" charset="0"/>
+                      </a:endParaRPr>
+                    </a:p>
+                  </a:txBody>
+                  <a:tcPr marL="91440" marR="91440" marT="36576" marB="36576" anchor="ctr">
+                    <a:lnL w="0" cap="flat" cmpd="sng" algn="ctr">
+                      <a:noFill/>
+                    </a:lnL>
+                    <a:lnR w="0" cap="flat" cmpd="sng" algn="ctr">
+                      <a:noFill/>
+                    </a:lnR>
+                    <a:lnT w="0" cap="flat" cmpd="sng" algn="ctr">
+                      <a:noFill/>
+                    </a:lnT>
+                    <a:lnB w="0" cap="flat" cmpd="sng" algn="ctr">
+                      <a:noFill/>
+                    </a:lnB>
+                    <a:solidFill>
                       <a:srgbClr val="F1F4F8"/>
                     </a:solidFill>
                   </a:tcPr>
@@ -10365,7 +10633,7 @@
                   <a:schemeClr val="tx2"/>
                 </a:solidFill>
               </a:rPr>
-              <a:t>All 16 tests by verdict</a:t>
+              <a:t>All 17 tests by verdict</a:t>
             </a:r>
             <a:endParaRPr lang="en-US" sz="1800" dirty="0"/>
           </a:p>
@@ -10523,7 +10791,7 @@
                 <a:ea typeface="Arial" pitchFamily="34" charset="-122"/>
                 <a:cs typeface="Arial" pitchFamily="34" charset="-120"/>
               </a:rPr>
-              <a:t>8</a:t>
+              <a:t>9</a:t>
             </a:r>
             <a:endParaRPr lang="en-US" sz="3600" dirty="0"/>
           </a:p>
@@ -11422,7 +11690,7 @@
                   <a:schemeClr val="tx2"/>
                 </a:solidFill>
               </a:rPr>
-              <a:t>Objective 8: end-to-end pipeline results</a:t>
+              <a:t>Additional feature: broken link checker</a:t>
             </a:r>
             <a:endParaRPr lang="en-US" sz="3000" dirty="0"/>
           </a:p>
@@ -11430,18 +11698,18 @@
       </p:sp>
       <p:sp>
         <p:nvSpPr>
-          <p:cNvPr id="3" name="result test executions in 6 runs"/>
+          <p:cNvPr id="3" name="link step Crawl"/>
           <p:cNvSpPr/>
           <p:nvPr/>
         </p:nvSpPr>
         <p:spPr>
           <a:xfrm>
             <a:off x="548640" y="1371600"/>
-            <a:ext cx="2514600" cy="1463040"/>
+            <a:ext cx="3566160" cy="1508760"/>
           </a:xfrm>
           <a:prstGeom prst="roundRect">
             <a:avLst>
-              <a:gd name="adj" fmla="val 7500"/>
+              <a:gd name="adj" fmla="val 7273"/>
             </a:avLst>
           </a:prstGeom>
           <a:solidFill>
@@ -11452,14 +11720,58 @@
       </p:sp>
       <p:sp>
         <p:nvSpPr>
-          <p:cNvPr id="4" name="Text 2"/>
+          <p:cNvPr id="4" name="icon circle"/>
+          <p:cNvSpPr/>
+          <p:nvPr/>
+        </p:nvSpPr>
+        <p:spPr>
+          <a:xfrm>
+            <a:off x="777240" y="1572768"/>
+            <a:ext cx="548640" cy="548640"/>
+          </a:xfrm>
+          <a:prstGeom prst="ellipse">
+            <a:avLst/>
+          </a:prstGeom>
+          <a:solidFill>
+            <a:srgbClr val="10243F"/>
+          </a:solidFill>
+          <a:ln/>
+        </p:spPr>
+      </p:sp>
+      <p:pic>
+        <p:nvPicPr>
+          <p:cNvPr id="5" name="FaSitemap icon" descr="preencoded.png">    </p:cNvPr>
+          <p:cNvPicPr>
+            <a:picLocks noChangeAspect="1"/>
+          </p:cNvPicPr>
+          <p:nvPr/>
+        </p:nvPicPr>
+        <p:blipFill>
+          <a:blip r:embed="rId1"/>
+          <a:stretch>
+            <a:fillRect/>
+          </a:stretch>
+        </p:blipFill>
+        <p:spPr>
+          <a:xfrm>
+            <a:off x="914400" y="1709928"/>
+            <a:ext cx="274320" cy="274320"/>
+          </a:xfrm>
+          <a:prstGeom prst="rect">
+            <a:avLst/>
+          </a:prstGeom>
+        </p:spPr>
+      </p:pic>
+      <p:sp>
+        <p:nvSpPr>
+          <p:cNvPr id="6" name="Text 3"/>
           <p:cNvSpPr txBox="1"/>
           <p:nvPr/>
         </p:nvSpPr>
         <p:spPr>
           <a:xfrm>
-            <a:off x="777240" y="1508760"/>
-            <a:ext cx="2103120" cy="731520"/>
+            <a:off x="1508760" y="1645920"/>
+            <a:ext cx="2468880" cy="365760"/>
           </a:xfrm>
           <a:prstGeom prst="rect">
             <a:avLst/>
@@ -11475,7 +11787,1297 @@
               <a:buNone/>
             </a:pPr>
             <a:r>
-              <a:rPr lang="en-US" sz="3800" b="1" dirty="0">
+              <a:rPr lang="en-US" sz="1800" b="1" dirty="0">
+                <a:solidFill>
+                  <a:schemeClr val="tx2"/>
+                </a:solidFill>
+              </a:rPr>
+              <a:t>1. Crawl</a:t>
+            </a:r>
+            <a:endParaRPr lang="en-US" sz="1800" dirty="0"/>
+          </a:p>
+        </p:txBody>
+      </p:sp>
+      <p:sp>
+        <p:nvSpPr>
+          <p:cNvPr id="7" name="Text 4"/>
+          <p:cNvSpPr txBox="1"/>
+          <p:nvPr/>
+        </p:nvSpPr>
+        <p:spPr>
+          <a:xfrm>
+            <a:off x="777240" y="2212848"/>
+            <a:ext cx="3154680" cy="594360"/>
+          </a:xfrm>
+          <a:prstGeom prst="rect">
+            <a:avLst/>
+          </a:prstGeom>
+          <a:noFill/>
+          <a:ln/>
+        </p:spPr>
+        <p:txBody>
+          <a:bodyPr wrap="square" lIns="0" tIns="0" rIns="0" bIns="0" rtlCol="0" anchor="t"/>
+          <a:lstStyle/>
+          <a:p>
+            <a:pPr indent="0" marL="0">
+              <a:buNone/>
+            </a:pPr>
+            <a:r>
+              <a:rPr lang="en-US" sz="1300" dirty="0">
+                <a:solidFill>
+                  <a:schemeClr val="tx1"/>
+                </a:solidFill>
+              </a:rPr>
+              <a:t>Open every page of the website in a real browser and collect all &lt;a href&gt; links</a:t>
+            </a:r>
+            <a:endParaRPr lang="en-US" sz="1300" dirty="0"/>
+          </a:p>
+        </p:txBody>
+      </p:sp>
+      <p:sp>
+        <p:nvSpPr>
+          <p:cNvPr id="8" name="arrow"/>
+          <p:cNvSpPr/>
+          <p:nvPr/>
+        </p:nvSpPr>
+        <p:spPr>
+          <a:xfrm>
+            <a:off x="4133088" y="2121408"/>
+            <a:ext cx="146304" cy="0"/>
+          </a:xfrm>
+          <a:prstGeom prst="line">
+            <a:avLst/>
+          </a:prstGeom>
+          <a:noFill/>
+          <a:ln w="25400">
+            <a:solidFill>
+              <a:srgbClr val="10243F"/>
+            </a:solidFill>
+            <a:prstDash val="solid"/>
+            <a:tailEnd type="triangle"/>
+          </a:ln>
+        </p:spPr>
+      </p:sp>
+      <p:sp>
+        <p:nvSpPr>
+          <p:cNvPr id="9" name="link step Check"/>
+          <p:cNvSpPr/>
+          <p:nvPr/>
+        </p:nvSpPr>
+        <p:spPr>
+          <a:xfrm>
+            <a:off x="4297680" y="1371600"/>
+            <a:ext cx="3566160" cy="1508760"/>
+          </a:xfrm>
+          <a:prstGeom prst="roundRect">
+            <a:avLst>
+              <a:gd name="adj" fmla="val 7273"/>
+            </a:avLst>
+          </a:prstGeom>
+          <a:solidFill>
+            <a:schemeClr val="bg2"/>
+          </a:solidFill>
+          <a:ln/>
+        </p:spPr>
+      </p:sp>
+      <p:sp>
+        <p:nvSpPr>
+          <p:cNvPr id="10" name="icon circle"/>
+          <p:cNvSpPr/>
+          <p:nvPr/>
+        </p:nvSpPr>
+        <p:spPr>
+          <a:xfrm>
+            <a:off x="4526280" y="1572768"/>
+            <a:ext cx="548640" cy="548640"/>
+          </a:xfrm>
+          <a:prstGeom prst="ellipse">
+            <a:avLst/>
+          </a:prstGeom>
+          <a:solidFill>
+            <a:srgbClr val="10243F"/>
+          </a:solidFill>
+          <a:ln/>
+        </p:spPr>
+      </p:sp>
+      <p:pic>
+        <p:nvPicPr>
+          <p:cNvPr id="11" name="FaLink icon" descr="preencoded.png">    </p:cNvPr>
+          <p:cNvPicPr>
+            <a:picLocks noChangeAspect="1"/>
+          </p:cNvPicPr>
+          <p:nvPr/>
+        </p:nvPicPr>
+        <p:blipFill>
+          <a:blip r:embed="rId2"/>
+          <a:stretch>
+            <a:fillRect/>
+          </a:stretch>
+        </p:blipFill>
+        <p:spPr>
+          <a:xfrm>
+            <a:off x="4663440" y="1709928"/>
+            <a:ext cx="274320" cy="274320"/>
+          </a:xfrm>
+          <a:prstGeom prst="rect">
+            <a:avLst/>
+          </a:prstGeom>
+        </p:spPr>
+      </p:pic>
+      <p:sp>
+        <p:nvSpPr>
+          <p:cNvPr id="12" name="Text 8"/>
+          <p:cNvSpPr txBox="1"/>
+          <p:nvPr/>
+        </p:nvSpPr>
+        <p:spPr>
+          <a:xfrm>
+            <a:off x="5257800" y="1645920"/>
+            <a:ext cx="2468880" cy="365760"/>
+          </a:xfrm>
+          <a:prstGeom prst="rect">
+            <a:avLst/>
+          </a:prstGeom>
+          <a:noFill/>
+          <a:ln/>
+        </p:spPr>
+        <p:txBody>
+          <a:bodyPr wrap="square" lIns="0" tIns="0" rIns="0" bIns="0" rtlCol="0" anchor="t"/>
+          <a:lstStyle/>
+          <a:p>
+            <a:pPr indent="0" marL="0">
+              <a:buNone/>
+            </a:pPr>
+            <a:r>
+              <a:rPr lang="en-US" sz="1800" b="1" dirty="0">
+                <a:solidFill>
+                  <a:schemeClr val="tx2"/>
+                </a:solidFill>
+              </a:rPr>
+              <a:t>2. Check</a:t>
+            </a:r>
+            <a:endParaRPr lang="en-US" sz="1800" dirty="0"/>
+          </a:p>
+        </p:txBody>
+      </p:sp>
+      <p:sp>
+        <p:nvSpPr>
+          <p:cNvPr id="13" name="Text 9"/>
+          <p:cNvSpPr txBox="1"/>
+          <p:nvPr/>
+        </p:nvSpPr>
+        <p:spPr>
+          <a:xfrm>
+            <a:off x="4526280" y="2212848"/>
+            <a:ext cx="3154680" cy="594360"/>
+          </a:xfrm>
+          <a:prstGeom prst="rect">
+            <a:avLst/>
+          </a:prstGeom>
+          <a:noFill/>
+          <a:ln/>
+        </p:spPr>
+        <p:txBody>
+          <a:bodyPr wrap="square" lIns="0" tIns="0" rIns="0" bIns="0" rtlCol="0" anchor="t"/>
+          <a:lstStyle/>
+          <a:p>
+            <a:pPr indent="0" marL="0">
+              <a:buNone/>
+            </a:pPr>
+            <a:r>
+              <a:rPr lang="en-US" sz="1300" dirty="0">
+                <a:solidFill>
+                  <a:schemeClr val="tx1"/>
+                </a:solidFill>
+              </a:rPr>
+              <a:t>Request each unique link (HEAD, then GET) and record its HTTP status</a:t>
+            </a:r>
+            <a:endParaRPr lang="en-US" sz="1300" dirty="0"/>
+          </a:p>
+        </p:txBody>
+      </p:sp>
+      <p:sp>
+        <p:nvSpPr>
+          <p:cNvPr id="14" name="arrow"/>
+          <p:cNvSpPr/>
+          <p:nvPr/>
+        </p:nvSpPr>
+        <p:spPr>
+          <a:xfrm>
+            <a:off x="7882128" y="2121408"/>
+            <a:ext cx="146304" cy="0"/>
+          </a:xfrm>
+          <a:prstGeom prst="line">
+            <a:avLst/>
+          </a:prstGeom>
+          <a:noFill/>
+          <a:ln w="25400">
+            <a:solidFill>
+              <a:srgbClr val="10243F"/>
+            </a:solidFill>
+            <a:prstDash val="solid"/>
+            <a:tailEnd type="triangle"/>
+          </a:ln>
+        </p:spPr>
+      </p:sp>
+      <p:sp>
+        <p:nvSpPr>
+          <p:cNvPr id="15" name="link step Report"/>
+          <p:cNvSpPr/>
+          <p:nvPr/>
+        </p:nvSpPr>
+        <p:spPr>
+          <a:xfrm>
+            <a:off x="8046720" y="1371600"/>
+            <a:ext cx="3566160" cy="1508760"/>
+          </a:xfrm>
+          <a:prstGeom prst="roundRect">
+            <a:avLst>
+              <a:gd name="adj" fmla="val 7273"/>
+            </a:avLst>
+          </a:prstGeom>
+          <a:solidFill>
+            <a:schemeClr val="bg2"/>
+          </a:solidFill>
+          <a:ln/>
+        </p:spPr>
+      </p:sp>
+      <p:sp>
+        <p:nvSpPr>
+          <p:cNvPr id="16" name="icon circle"/>
+          <p:cNvSpPr/>
+          <p:nvPr/>
+        </p:nvSpPr>
+        <p:spPr>
+          <a:xfrm>
+            <a:off x="8275320" y="1572768"/>
+            <a:ext cx="548640" cy="548640"/>
+          </a:xfrm>
+          <a:prstGeom prst="ellipse">
+            <a:avLst/>
+          </a:prstGeom>
+          <a:solidFill>
+            <a:srgbClr val="D03B3B"/>
+          </a:solidFill>
+          <a:ln/>
+        </p:spPr>
+      </p:sp>
+      <p:pic>
+        <p:nvPicPr>
+          <p:cNvPr id="17" name="FaBug icon" descr="preencoded.png">    </p:cNvPr>
+          <p:cNvPicPr>
+            <a:picLocks noChangeAspect="1"/>
+          </p:cNvPicPr>
+          <p:nvPr/>
+        </p:nvPicPr>
+        <p:blipFill>
+          <a:blip r:embed="rId3"/>
+          <a:stretch>
+            <a:fillRect/>
+          </a:stretch>
+        </p:blipFill>
+        <p:spPr>
+          <a:xfrm>
+            <a:off x="8412480" y="1709928"/>
+            <a:ext cx="274320" cy="274320"/>
+          </a:xfrm>
+          <a:prstGeom prst="rect">
+            <a:avLst/>
+          </a:prstGeom>
+        </p:spPr>
+      </p:pic>
+      <p:sp>
+        <p:nvSpPr>
+          <p:cNvPr id="18" name="Text 13"/>
+          <p:cNvSpPr txBox="1"/>
+          <p:nvPr/>
+        </p:nvSpPr>
+        <p:spPr>
+          <a:xfrm>
+            <a:off x="9006840" y="1645920"/>
+            <a:ext cx="2468880" cy="365760"/>
+          </a:xfrm>
+          <a:prstGeom prst="rect">
+            <a:avLst/>
+          </a:prstGeom>
+          <a:noFill/>
+          <a:ln/>
+        </p:spPr>
+        <p:txBody>
+          <a:bodyPr wrap="square" lIns="0" tIns="0" rIns="0" bIns="0" rtlCol="0" anchor="t"/>
+          <a:lstStyle/>
+          <a:p>
+            <a:pPr indent="0" marL="0">
+              <a:buNone/>
+            </a:pPr>
+            <a:r>
+              <a:rPr lang="en-US" sz="1800" b="1" dirty="0">
+                <a:solidFill>
+                  <a:schemeClr val="tx2"/>
+                </a:solidFill>
+              </a:rPr>
+              <a:t>3. Report</a:t>
+            </a:r>
+            <a:endParaRPr lang="en-US" sz="1800" dirty="0"/>
+          </a:p>
+        </p:txBody>
+      </p:sp>
+      <p:sp>
+        <p:nvSpPr>
+          <p:cNvPr id="19" name="Text 14"/>
+          <p:cNvSpPr txBox="1"/>
+          <p:nvPr/>
+        </p:nvSpPr>
+        <p:spPr>
+          <a:xfrm>
+            <a:off x="8275320" y="2212848"/>
+            <a:ext cx="3154680" cy="594360"/>
+          </a:xfrm>
+          <a:prstGeom prst="rect">
+            <a:avLst/>
+          </a:prstGeom>
+          <a:noFill/>
+          <a:ln/>
+        </p:spPr>
+        <p:txBody>
+          <a:bodyPr wrap="square" lIns="0" tIns="0" rIns="0" bIns="0" rtlCol="0" anchor="t"/>
+          <a:lstStyle/>
+          <a:p>
+            <a:pPr indent="0" marL="0">
+              <a:buNone/>
+            </a:pPr>
+            <a:r>
+              <a:rPr lang="en-US" sz="1300" dirty="0">
+                <a:solidFill>
+                  <a:schemeClr val="tx1"/>
+                </a:solidFill>
+              </a:rPr>
+              <a:t>Every 4xx / 5xx or unreachable link becomes its own bug with ML severity</a:t>
+            </a:r>
+            <a:endParaRPr lang="en-US" sz="1300" dirty="0"/>
+          </a:p>
+        </p:txBody>
+      </p:sp>
+      <p:sp>
+        <p:nvSpPr>
+          <p:cNvPr id="20" name="Text 15"/>
+          <p:cNvSpPr txBox="1"/>
+          <p:nvPr/>
+        </p:nvSpPr>
+        <p:spPr>
+          <a:xfrm>
+            <a:off x="548640" y="3154680"/>
+            <a:ext cx="7315200" cy="365760"/>
+          </a:xfrm>
+          <a:prstGeom prst="rect">
+            <a:avLst/>
+          </a:prstGeom>
+          <a:noFill/>
+          <a:ln/>
+        </p:spPr>
+        <p:txBody>
+          <a:bodyPr wrap="square" lIns="0" tIns="0" rIns="0" bIns="0" rtlCol="0" anchor="t"/>
+          <a:lstStyle/>
+          <a:p>
+            <a:pPr indent="0" marL="0">
+              <a:buNone/>
+            </a:pPr>
+            <a:r>
+              <a:rPr lang="en-US" sz="1800" b="1" dirty="0">
+                <a:solidFill>
+                  <a:schemeClr val="tx2"/>
+                </a:solidFill>
+              </a:rPr>
+              <a:t>Broken links found in ShopEase</a:t>
+            </a:r>
+            <a:endParaRPr lang="en-US" sz="1800" dirty="0"/>
+          </a:p>
+        </p:txBody>
+      </p:sp>
+      <p:graphicFrame>
+        <p:nvGraphicFramePr>
+          <p:cNvPr id="17" name="broken links table"/>
+          <p:cNvGraphicFramePr>
+            <a:graphicFrameLocks noGrp="1"/>
+          </p:cNvGraphicFramePr>
+          <p:nvPr>
+            <p:extLst>
+              <p:ext uri="{D42A27DB-BD31-4B8C-83A1-F6EECF244321}">
+                <p14:modId xmlns:p14="http://schemas.microsoft.com/office/powerpoint/2010/main" val="1579011935"/>
+              </p:ext>
+            </p:extLst>
+          </p:nvPr>
+        </p:nvGraphicFramePr>
+        <p:xfrm>
+          <a:off x="548640" y="3611880"/>
+          <a:ext cx="7315200" cy="914400"/>
+        </p:xfrm>
+        <a:graphic>
+          <a:graphicData uri="http://schemas.openxmlformats.org/drawingml/2006/table">
+            <a:tbl>
+              <a:tblPr/>
+              <a:tblGrid>
+                <a:gridCol w="3063240"/>
+                <a:gridCol w="2148840"/>
+                <a:gridCol w="914400"/>
+                <a:gridCol w="1188720"/>
+              </a:tblGrid>
+              <a:tr h="384048">
+                <a:tc>
+                  <a:txBody>
+                    <a:bodyPr/>
+                    <a:lstStyle/>
+                    <a:p>
+                      <a:pPr indent="0" marL="0">
+                        <a:buNone/>
+                      </a:pPr>
+                      <a:r>
+                        <a:rPr lang="en-US" sz="1300" b="1" dirty="0">
+                          <a:solidFill>
+                            <a:srgbClr val="FFFFFF"/>
+                          </a:solidFill>
+                          <a:latin typeface="Calibri" pitchFamily="34" charset="0"/>
+                          <a:ea typeface="Calibri" pitchFamily="34" charset="-122"/>
+                          <a:cs typeface="Calibri" pitchFamily="34" charset="-120"/>
+                        </a:rPr>
+                        <a:t>Link</a:t>
+                      </a:r>
+                      <a:endParaRPr lang="en-US" sz="1300" dirty="0">
+                        <a:latin typeface="Calibri" charset="0"/>
+                        <a:ea typeface="Calibri" charset="0"/>
+                        <a:cs typeface="Calibri" charset="0"/>
+                      </a:endParaRPr>
+                    </a:p>
+                  </a:txBody>
+                  <a:tcPr marL="91440" marR="91440" marT="36576" marB="36576" anchor="ctr">
+                    <a:lnL w="0" cap="flat" cmpd="sng" algn="ctr">
+                      <a:noFill/>
+                    </a:lnL>
+                    <a:lnR w="0" cap="flat" cmpd="sng" algn="ctr">
+                      <a:noFill/>
+                    </a:lnR>
+                    <a:lnT w="0" cap="flat" cmpd="sng" algn="ctr">
+                      <a:noFill/>
+                    </a:lnT>
+                    <a:lnB w="0" cap="flat" cmpd="sng" algn="ctr">
+                      <a:noFill/>
+                    </a:lnB>
+                    <a:solidFill>
+                      <a:srgbClr val="10243F"/>
+                    </a:solidFill>
+                  </a:tcPr>
+                </a:tc>
+                <a:tc>
+                  <a:txBody>
+                    <a:bodyPr/>
+                    <a:lstStyle/>
+                    <a:p>
+                      <a:pPr indent="0" marL="0">
+                        <a:buNone/>
+                      </a:pPr>
+                      <a:r>
+                        <a:rPr lang="en-US" sz="1300" b="1" dirty="0">
+                          <a:solidFill>
+                            <a:srgbClr val="FFFFFF"/>
+                          </a:solidFill>
+                          <a:latin typeface="Calibri" pitchFamily="34" charset="0"/>
+                          <a:ea typeface="Calibri" pitchFamily="34" charset="-122"/>
+                          <a:cs typeface="Calibri" pitchFamily="34" charset="-120"/>
+                        </a:rPr>
+                        <a:t>Found on</a:t>
+                      </a:r>
+                      <a:endParaRPr lang="en-US" sz="1300" dirty="0">
+                        <a:latin typeface="Calibri" charset="0"/>
+                        <a:ea typeface="Calibri" charset="0"/>
+                        <a:cs typeface="Calibri" charset="0"/>
+                      </a:endParaRPr>
+                    </a:p>
+                  </a:txBody>
+                  <a:tcPr marL="91440" marR="91440" marT="36576" marB="36576" anchor="ctr">
+                    <a:lnL w="0" cap="flat" cmpd="sng" algn="ctr">
+                      <a:noFill/>
+                    </a:lnL>
+                    <a:lnR w="0" cap="flat" cmpd="sng" algn="ctr">
+                      <a:noFill/>
+                    </a:lnR>
+                    <a:lnT w="0" cap="flat" cmpd="sng" algn="ctr">
+                      <a:noFill/>
+                    </a:lnT>
+                    <a:lnB w="0" cap="flat" cmpd="sng" algn="ctr">
+                      <a:noFill/>
+                    </a:lnB>
+                    <a:solidFill>
+                      <a:srgbClr val="10243F"/>
+                    </a:solidFill>
+                  </a:tcPr>
+                </a:tc>
+                <a:tc>
+                  <a:txBody>
+                    <a:bodyPr/>
+                    <a:lstStyle/>
+                    <a:p>
+                      <a:pPr indent="0" marL="0">
+                        <a:buNone/>
+                      </a:pPr>
+                      <a:r>
+                        <a:rPr lang="en-US" sz="1300" b="1" dirty="0">
+                          <a:solidFill>
+                            <a:srgbClr val="FFFFFF"/>
+                          </a:solidFill>
+                          <a:latin typeface="Calibri" pitchFamily="34" charset="0"/>
+                          <a:ea typeface="Calibri" pitchFamily="34" charset="-122"/>
+                          <a:cs typeface="Calibri" pitchFamily="34" charset="-120"/>
+                        </a:rPr>
+                        <a:t>Status</a:t>
+                      </a:r>
+                      <a:endParaRPr lang="en-US" sz="1300" dirty="0">
+                        <a:latin typeface="Calibri" charset="0"/>
+                        <a:ea typeface="Calibri" charset="0"/>
+                        <a:cs typeface="Calibri" charset="0"/>
+                      </a:endParaRPr>
+                    </a:p>
+                  </a:txBody>
+                  <a:tcPr marL="91440" marR="91440" marT="36576" marB="36576" anchor="ctr">
+                    <a:lnL w="0" cap="flat" cmpd="sng" algn="ctr">
+                      <a:noFill/>
+                    </a:lnL>
+                    <a:lnR w="0" cap="flat" cmpd="sng" algn="ctr">
+                      <a:noFill/>
+                    </a:lnR>
+                    <a:lnT w="0" cap="flat" cmpd="sng" algn="ctr">
+                      <a:noFill/>
+                    </a:lnT>
+                    <a:lnB w="0" cap="flat" cmpd="sng" algn="ctr">
+                      <a:noFill/>
+                    </a:lnB>
+                    <a:solidFill>
+                      <a:srgbClr val="10243F"/>
+                    </a:solidFill>
+                  </a:tcPr>
+                </a:tc>
+                <a:tc>
+                  <a:txBody>
+                    <a:bodyPr/>
+                    <a:lstStyle/>
+                    <a:p>
+                      <a:pPr indent="0" marL="0">
+                        <a:buNone/>
+                      </a:pPr>
+                      <a:r>
+                        <a:rPr lang="en-US" sz="1300" b="1" dirty="0">
+                          <a:solidFill>
+                            <a:srgbClr val="FFFFFF"/>
+                          </a:solidFill>
+                          <a:latin typeface="Calibri" pitchFamily="34" charset="0"/>
+                          <a:ea typeface="Calibri" pitchFamily="34" charset="-122"/>
+                          <a:cs typeface="Calibri" pitchFamily="34" charset="-120"/>
+                        </a:rPr>
+                        <a:t>ML severity</a:t>
+                      </a:r>
+                      <a:endParaRPr lang="en-US" sz="1300" dirty="0">
+                        <a:latin typeface="Calibri" charset="0"/>
+                        <a:ea typeface="Calibri" charset="0"/>
+                        <a:cs typeface="Calibri" charset="0"/>
+                      </a:endParaRPr>
+                    </a:p>
+                  </a:txBody>
+                  <a:tcPr marL="91440" marR="91440" marT="36576" marB="36576" anchor="ctr">
+                    <a:lnL w="0" cap="flat" cmpd="sng" algn="ctr">
+                      <a:noFill/>
+                    </a:lnL>
+                    <a:lnR w="0" cap="flat" cmpd="sng" algn="ctr">
+                      <a:noFill/>
+                    </a:lnR>
+                    <a:lnT w="0" cap="flat" cmpd="sng" algn="ctr">
+                      <a:noFill/>
+                    </a:lnT>
+                    <a:lnB w="0" cap="flat" cmpd="sng" algn="ctr">
+                      <a:noFill/>
+                    </a:lnB>
+                    <a:solidFill>
+                      <a:srgbClr val="10243F"/>
+                    </a:solidFill>
+                  </a:tcPr>
+                </a:tc>
+              </a:tr>
+              <a:tr h="548640">
+                <a:tc>
+                  <a:txBody>
+                    <a:bodyPr/>
+                    <a:lstStyle/>
+                    <a:p>
+                      <a:pPr indent="0" marL="0">
+                        <a:buNone/>
+                      </a:pPr>
+                      <a:r>
+                        <a:rPr lang="en-US" sz="1100" dirty="0">
+                          <a:solidFill>
+                            <a:srgbClr val="1F2328"/>
+                          </a:solidFill>
+                          <a:latin typeface="Courier New" pitchFamily="34" charset="0"/>
+                          <a:ea typeface="Courier New" pitchFamily="34" charset="-122"/>
+                          <a:cs typeface="Courier New" pitchFamily="34" charset="-120"/>
+                        </a:rPr>
+                        <a:t>/help</a:t>
+                      </a:r>
+                      <a:endParaRPr lang="en-US" sz="1100" dirty="0">
+                        <a:latin typeface="Courier New" charset="0"/>
+                        <a:ea typeface="Courier New" charset="0"/>
+                        <a:cs typeface="Courier New" charset="0"/>
+                      </a:endParaRPr>
+                    </a:p>
+                  </a:txBody>
+                  <a:tcPr marL="91440" marR="91440" marT="36576" marB="36576" anchor="ctr">
+                    <a:lnL w="0" cap="flat" cmpd="sng" algn="ctr">
+                      <a:noFill/>
+                    </a:lnL>
+                    <a:lnR w="0" cap="flat" cmpd="sng" algn="ctr">
+                      <a:noFill/>
+                    </a:lnR>
+                    <a:lnT w="0" cap="flat" cmpd="sng" algn="ctr">
+                      <a:noFill/>
+                    </a:lnT>
+                    <a:lnB w="0" cap="flat" cmpd="sng" algn="ctr">
+                      <a:noFill/>
+                    </a:lnB>
+                    <a:solidFill>
+                      <a:srgbClr val="FFFFFF"/>
+                    </a:solidFill>
+                  </a:tcPr>
+                </a:tc>
+                <a:tc>
+                  <a:txBody>
+                    <a:bodyPr/>
+                    <a:lstStyle/>
+                    <a:p>
+                      <a:pPr indent="0" marL="0">
+                        <a:buNone/>
+                      </a:pPr>
+                      <a:r>
+                        <a:rPr lang="en-US" sz="1300" dirty="0">
+                          <a:solidFill>
+                            <a:srgbClr val="1F2328"/>
+                          </a:solidFill>
+                          <a:latin typeface="Calibri" pitchFamily="34" charset="0"/>
+                          <a:ea typeface="Calibri" pitchFamily="34" charset="-122"/>
+                          <a:cs typeface="Calibri" pitchFamily="34" charset="-120"/>
+                        </a:rPr>
+                        <a:t>Footer "Help Center" (every page)</a:t>
+                      </a:r>
+                      <a:endParaRPr lang="en-US" sz="1300" dirty="0">
+                        <a:latin typeface="Calibri" charset="0"/>
+                        <a:ea typeface="Calibri" charset="0"/>
+                        <a:cs typeface="Calibri" charset="0"/>
+                      </a:endParaRPr>
+                    </a:p>
+                  </a:txBody>
+                  <a:tcPr marL="91440" marR="91440" marT="36576" marB="36576" anchor="ctr">
+                    <a:lnL w="0" cap="flat" cmpd="sng" algn="ctr">
+                      <a:noFill/>
+                    </a:lnL>
+                    <a:lnR w="0" cap="flat" cmpd="sng" algn="ctr">
+                      <a:noFill/>
+                    </a:lnR>
+                    <a:lnT w="0" cap="flat" cmpd="sng" algn="ctr">
+                      <a:noFill/>
+                    </a:lnT>
+                    <a:lnB w="0" cap="flat" cmpd="sng" algn="ctr">
+                      <a:noFill/>
+                    </a:lnB>
+                    <a:solidFill>
+                      <a:srgbClr val="FFFFFF"/>
+                    </a:solidFill>
+                  </a:tcPr>
+                </a:tc>
+                <a:tc>
+                  <a:txBody>
+                    <a:bodyPr/>
+                    <a:lstStyle/>
+                    <a:p>
+                      <a:pPr indent="0" marL="0">
+                        <a:buNone/>
+                      </a:pPr>
+                      <a:r>
+                        <a:rPr lang="en-US" sz="1300" b="1" dirty="0">
+                          <a:solidFill>
+                            <a:srgbClr val="1F2328"/>
+                          </a:solidFill>
+                          <a:latin typeface="Calibri" pitchFamily="34" charset="0"/>
+                          <a:ea typeface="Calibri" pitchFamily="34" charset="-122"/>
+                          <a:cs typeface="Calibri" pitchFamily="34" charset="-120"/>
+                        </a:rPr>
+                        <a:t>HTTP 500</a:t>
+                      </a:r>
+                      <a:endParaRPr lang="en-US" sz="1300" dirty="0">
+                        <a:latin typeface="Calibri" charset="0"/>
+                        <a:ea typeface="Calibri" charset="0"/>
+                        <a:cs typeface="Calibri" charset="0"/>
+                      </a:endParaRPr>
+                    </a:p>
+                  </a:txBody>
+                  <a:tcPr marL="91440" marR="91440" marT="36576" marB="36576" anchor="ctr">
+                    <a:lnL w="0" cap="flat" cmpd="sng" algn="ctr">
+                      <a:noFill/>
+                    </a:lnL>
+                    <a:lnR w="0" cap="flat" cmpd="sng" algn="ctr">
+                      <a:noFill/>
+                    </a:lnR>
+                    <a:lnT w="0" cap="flat" cmpd="sng" algn="ctr">
+                      <a:noFill/>
+                    </a:lnT>
+                    <a:lnB w="0" cap="flat" cmpd="sng" algn="ctr">
+                      <a:noFill/>
+                    </a:lnB>
+                    <a:solidFill>
+                      <a:srgbClr val="FFFFFF"/>
+                    </a:solidFill>
+                  </a:tcPr>
+                </a:tc>
+                <a:tc>
+                  <a:txBody>
+                    <a:bodyPr/>
+                    <a:lstStyle/>
+                    <a:p>
+                      <a:pPr indent="0" marL="0">
+                        <a:buNone/>
+                      </a:pPr>
+                      <a:r>
+                        <a:rPr lang="en-US" sz="1300" dirty="0">
+                          <a:solidFill>
+                            <a:srgbClr val="D03B3B"/>
+                          </a:solidFill>
+                          <a:latin typeface="Calibri" pitchFamily="34" charset="0"/>
+                          <a:ea typeface="Calibri" pitchFamily="34" charset="-122"/>
+                          <a:cs typeface="Calibri" pitchFamily="34" charset="-120"/>
+                        </a:rPr>
+                        <a:t>● </a:t>
+                      </a:r>
+                      <a:pPr indent="0" marL="0">
+                        <a:buNone/>
+                      </a:pPr>
+                      <a:r>
+                        <a:rPr lang="en-US" sz="1300" b="1" dirty="0">
+                          <a:solidFill>
+                            <a:srgbClr val="1F2328"/>
+                          </a:solidFill>
+                          <a:latin typeface="Calibri" pitchFamily="34" charset="0"/>
+                          <a:ea typeface="Calibri" pitchFamily="34" charset="-122"/>
+                          <a:cs typeface="Calibri" pitchFamily="34" charset="-120"/>
+                        </a:rPr>
+                        <a:t>Critical</a:t>
+                      </a:r>
+                      <a:endParaRPr lang="en-US" sz="1300" dirty="0">
+                        <a:latin typeface="Calibri" charset="0"/>
+                        <a:ea typeface="Calibri" charset="0"/>
+                        <a:cs typeface="Calibri" charset="0"/>
+                      </a:endParaRPr>
+                    </a:p>
+                  </a:txBody>
+                  <a:tcPr marL="91440" marR="91440" marT="36576" marB="36576" anchor="ctr">
+                    <a:lnL w="0" cap="flat" cmpd="sng" algn="ctr">
+                      <a:noFill/>
+                    </a:lnL>
+                    <a:lnR w="0" cap="flat" cmpd="sng" algn="ctr">
+                      <a:noFill/>
+                    </a:lnR>
+                    <a:lnT w="0" cap="flat" cmpd="sng" algn="ctr">
+                      <a:noFill/>
+                    </a:lnT>
+                    <a:lnB w="0" cap="flat" cmpd="sng" algn="ctr">
+                      <a:noFill/>
+                    </a:lnB>
+                    <a:solidFill>
+                      <a:srgbClr val="FFFFFF"/>
+                    </a:solidFill>
+                  </a:tcPr>
+                </a:tc>
+              </a:tr>
+              <a:tr h="548640">
+                <a:tc>
+                  <a:txBody>
+                    <a:bodyPr/>
+                    <a:lstStyle/>
+                    <a:p>
+                      <a:pPr indent="0" marL="0">
+                        <a:buNone/>
+                      </a:pPr>
+                      <a:r>
+                        <a:rPr lang="en-US" sz="1100" dirty="0">
+                          <a:solidFill>
+                            <a:srgbClr val="1F2328"/>
+                          </a:solidFill>
+                          <a:latin typeface="Courier New" pitchFamily="34" charset="0"/>
+                          <a:ea typeface="Courier New" pitchFamily="34" charset="-122"/>
+                          <a:cs typeface="Courier New" pitchFamily="34" charset="-120"/>
+                        </a:rPr>
+                        <a:t>/terms.html</a:t>
+                      </a:r>
+                      <a:endParaRPr lang="en-US" sz="1100" dirty="0">
+                        <a:latin typeface="Courier New" charset="0"/>
+                        <a:ea typeface="Courier New" charset="0"/>
+                        <a:cs typeface="Courier New" charset="0"/>
+                      </a:endParaRPr>
+                    </a:p>
+                  </a:txBody>
+                  <a:tcPr marL="91440" marR="91440" marT="36576" marB="36576" anchor="ctr">
+                    <a:lnL w="0" cap="flat" cmpd="sng" algn="ctr">
+                      <a:noFill/>
+                    </a:lnL>
+                    <a:lnR w="0" cap="flat" cmpd="sng" algn="ctr">
+                      <a:noFill/>
+                    </a:lnR>
+                    <a:lnT w="0" cap="flat" cmpd="sng" algn="ctr">
+                      <a:noFill/>
+                    </a:lnT>
+                    <a:lnB w="0" cap="flat" cmpd="sng" algn="ctr">
+                      <a:noFill/>
+                    </a:lnB>
+                    <a:solidFill>
+                      <a:srgbClr val="F1F4F8"/>
+                    </a:solidFill>
+                  </a:tcPr>
+                </a:tc>
+                <a:tc>
+                  <a:txBody>
+                    <a:bodyPr/>
+                    <a:lstStyle/>
+                    <a:p>
+                      <a:pPr indent="0" marL="0">
+                        <a:buNone/>
+                      </a:pPr>
+                      <a:r>
+                        <a:rPr lang="en-US" sz="1300" dirty="0">
+                          <a:solidFill>
+                            <a:srgbClr val="1F2328"/>
+                          </a:solidFill>
+                          <a:latin typeface="Calibri" pitchFamily="34" charset="0"/>
+                          <a:ea typeface="Calibri" pitchFamily="34" charset="-122"/>
+                          <a:cs typeface="Calibri" pitchFamily="34" charset="-120"/>
+                        </a:rPr>
+                        <a:t>Footer "Terms and Conditions" (every page)</a:t>
+                      </a:r>
+                      <a:endParaRPr lang="en-US" sz="1300" dirty="0">
+                        <a:latin typeface="Calibri" charset="0"/>
+                        <a:ea typeface="Calibri" charset="0"/>
+                        <a:cs typeface="Calibri" charset="0"/>
+                      </a:endParaRPr>
+                    </a:p>
+                  </a:txBody>
+                  <a:tcPr marL="91440" marR="91440" marT="36576" marB="36576" anchor="ctr">
+                    <a:lnL w="0" cap="flat" cmpd="sng" algn="ctr">
+                      <a:noFill/>
+                    </a:lnL>
+                    <a:lnR w="0" cap="flat" cmpd="sng" algn="ctr">
+                      <a:noFill/>
+                    </a:lnR>
+                    <a:lnT w="0" cap="flat" cmpd="sng" algn="ctr">
+                      <a:noFill/>
+                    </a:lnT>
+                    <a:lnB w="0" cap="flat" cmpd="sng" algn="ctr">
+                      <a:noFill/>
+                    </a:lnB>
+                    <a:solidFill>
+                      <a:srgbClr val="F1F4F8"/>
+                    </a:solidFill>
+                  </a:tcPr>
+                </a:tc>
+                <a:tc>
+                  <a:txBody>
+                    <a:bodyPr/>
+                    <a:lstStyle/>
+                    <a:p>
+                      <a:pPr indent="0" marL="0">
+                        <a:buNone/>
+                      </a:pPr>
+                      <a:r>
+                        <a:rPr lang="en-US" sz="1300" b="1" dirty="0">
+                          <a:solidFill>
+                            <a:srgbClr val="1F2328"/>
+                          </a:solidFill>
+                          <a:latin typeface="Calibri" pitchFamily="34" charset="0"/>
+                          <a:ea typeface="Calibri" pitchFamily="34" charset="-122"/>
+                          <a:cs typeface="Calibri" pitchFamily="34" charset="-120"/>
+                        </a:rPr>
+                        <a:t>HTTP 404</a:t>
+                      </a:r>
+                      <a:endParaRPr lang="en-US" sz="1300" dirty="0">
+                        <a:latin typeface="Calibri" charset="0"/>
+                        <a:ea typeface="Calibri" charset="0"/>
+                        <a:cs typeface="Calibri" charset="0"/>
+                      </a:endParaRPr>
+                    </a:p>
+                  </a:txBody>
+                  <a:tcPr marL="91440" marR="91440" marT="36576" marB="36576" anchor="ctr">
+                    <a:lnL w="0" cap="flat" cmpd="sng" algn="ctr">
+                      <a:noFill/>
+                    </a:lnL>
+                    <a:lnR w="0" cap="flat" cmpd="sng" algn="ctr">
+                      <a:noFill/>
+                    </a:lnR>
+                    <a:lnT w="0" cap="flat" cmpd="sng" algn="ctr">
+                      <a:noFill/>
+                    </a:lnT>
+                    <a:lnB w="0" cap="flat" cmpd="sng" algn="ctr">
+                      <a:noFill/>
+                    </a:lnB>
+                    <a:solidFill>
+                      <a:srgbClr val="F1F4F8"/>
+                    </a:solidFill>
+                  </a:tcPr>
+                </a:tc>
+                <a:tc>
+                  <a:txBody>
+                    <a:bodyPr/>
+                    <a:lstStyle/>
+                    <a:p>
+                      <a:pPr indent="0" marL="0">
+                        <a:buNone/>
+                      </a:pPr>
+                      <a:r>
+                        <a:rPr lang="en-US" sz="1300" dirty="0">
+                          <a:solidFill>
+                            <a:srgbClr val="EC835A"/>
+                          </a:solidFill>
+                          <a:latin typeface="Calibri" pitchFamily="34" charset="0"/>
+                          <a:ea typeface="Calibri" pitchFamily="34" charset="-122"/>
+                          <a:cs typeface="Calibri" pitchFamily="34" charset="-120"/>
+                        </a:rPr>
+                        <a:t>● </a:t>
+                      </a:r>
+                      <a:pPr indent="0" marL="0">
+                        <a:buNone/>
+                      </a:pPr>
+                      <a:r>
+                        <a:rPr lang="en-US" sz="1300" b="1" dirty="0">
+                          <a:solidFill>
+                            <a:srgbClr val="1F2328"/>
+                          </a:solidFill>
+                          <a:latin typeface="Calibri" pitchFamily="34" charset="0"/>
+                          <a:ea typeface="Calibri" pitchFamily="34" charset="-122"/>
+                          <a:cs typeface="Calibri" pitchFamily="34" charset="-120"/>
+                        </a:rPr>
+                        <a:t>Major</a:t>
+                      </a:r>
+                      <a:endParaRPr lang="en-US" sz="1300" dirty="0">
+                        <a:latin typeface="Calibri" charset="0"/>
+                        <a:ea typeface="Calibri" charset="0"/>
+                        <a:cs typeface="Calibri" charset="0"/>
+                      </a:endParaRPr>
+                    </a:p>
+                  </a:txBody>
+                  <a:tcPr marL="91440" marR="91440" marT="36576" marB="36576" anchor="ctr">
+                    <a:lnL w="0" cap="flat" cmpd="sng" algn="ctr">
+                      <a:noFill/>
+                    </a:lnL>
+                    <a:lnR w="0" cap="flat" cmpd="sng" algn="ctr">
+                      <a:noFill/>
+                    </a:lnR>
+                    <a:lnT w="0" cap="flat" cmpd="sng" algn="ctr">
+                      <a:noFill/>
+                    </a:lnT>
+                    <a:lnB w="0" cap="flat" cmpd="sng" algn="ctr">
+                      <a:noFill/>
+                    </a:lnB>
+                    <a:solidFill>
+                      <a:srgbClr val="F1F4F8"/>
+                    </a:solidFill>
+                  </a:tcPr>
+                </a:tc>
+              </a:tr>
+              <a:tr h="548640">
+                <a:tc>
+                  <a:txBody>
+                    <a:bodyPr/>
+                    <a:lstStyle/>
+                    <a:p>
+                      <a:pPr indent="0" marL="0">
+                        <a:buNone/>
+                      </a:pPr>
+                      <a:r>
+                        <a:rPr lang="en-US" sz="1100" dirty="0">
+                          <a:solidFill>
+                            <a:srgbClr val="1F2328"/>
+                          </a:solidFill>
+                          <a:latin typeface="Courier New" pitchFamily="34" charset="0"/>
+                          <a:ea typeface="Courier New" pitchFamily="34" charset="-122"/>
+                          <a:cs typeface="Courier New" pitchFamily="34" charset="-120"/>
+                        </a:rPr>
+                        <a:t>/downloads/laptop-pro-14-specs.pdf</a:t>
+                      </a:r>
+                      <a:endParaRPr lang="en-US" sz="1100" dirty="0">
+                        <a:latin typeface="Courier New" charset="0"/>
+                        <a:ea typeface="Courier New" charset="0"/>
+                        <a:cs typeface="Courier New" charset="0"/>
+                      </a:endParaRPr>
+                    </a:p>
+                  </a:txBody>
+                  <a:tcPr marL="91440" marR="91440" marT="36576" marB="36576" anchor="ctr">
+                    <a:lnL w="0" cap="flat" cmpd="sng" algn="ctr">
+                      <a:noFill/>
+                    </a:lnL>
+                    <a:lnR w="0" cap="flat" cmpd="sng" algn="ctr">
+                      <a:noFill/>
+                    </a:lnR>
+                    <a:lnT w="0" cap="flat" cmpd="sng" algn="ctr">
+                      <a:noFill/>
+                    </a:lnT>
+                    <a:lnB w="0" cap="flat" cmpd="sng" algn="ctr">
+                      <a:noFill/>
+                    </a:lnB>
+                    <a:solidFill>
+                      <a:srgbClr val="FFFFFF"/>
+                    </a:solidFill>
+                  </a:tcPr>
+                </a:tc>
+                <a:tc>
+                  <a:txBody>
+                    <a:bodyPr/>
+                    <a:lstStyle/>
+                    <a:p>
+                      <a:pPr indent="0" marL="0">
+                        <a:buNone/>
+                      </a:pPr>
+                      <a:r>
+                        <a:rPr lang="en-US" sz="1300" dirty="0">
+                          <a:solidFill>
+                            <a:srgbClr val="1F2328"/>
+                          </a:solidFill>
+                          <a:latin typeface="Calibri" pitchFamily="34" charset="0"/>
+                          <a:ea typeface="Calibri" pitchFamily="34" charset="-122"/>
+                          <a:cs typeface="Calibri" pitchFamily="34" charset="-120"/>
+                        </a:rPr>
+                        <a:t>Products: "Spec sheet (PDF)"</a:t>
+                      </a:r>
+                      <a:endParaRPr lang="en-US" sz="1300" dirty="0">
+                        <a:latin typeface="Calibri" charset="0"/>
+                        <a:ea typeface="Calibri" charset="0"/>
+                        <a:cs typeface="Calibri" charset="0"/>
+                      </a:endParaRPr>
+                    </a:p>
+                  </a:txBody>
+                  <a:tcPr marL="91440" marR="91440" marT="36576" marB="36576" anchor="ctr">
+                    <a:lnL w="0" cap="flat" cmpd="sng" algn="ctr">
+                      <a:noFill/>
+                    </a:lnL>
+                    <a:lnR w="0" cap="flat" cmpd="sng" algn="ctr">
+                      <a:noFill/>
+                    </a:lnR>
+                    <a:lnT w="0" cap="flat" cmpd="sng" algn="ctr">
+                      <a:noFill/>
+                    </a:lnT>
+                    <a:lnB w="0" cap="flat" cmpd="sng" algn="ctr">
+                      <a:noFill/>
+                    </a:lnB>
+                    <a:solidFill>
+                      <a:srgbClr val="FFFFFF"/>
+                    </a:solidFill>
+                  </a:tcPr>
+                </a:tc>
+                <a:tc>
+                  <a:txBody>
+                    <a:bodyPr/>
+                    <a:lstStyle/>
+                    <a:p>
+                      <a:pPr indent="0" marL="0">
+                        <a:buNone/>
+                      </a:pPr>
+                      <a:r>
+                        <a:rPr lang="en-US" sz="1300" b="1" dirty="0">
+                          <a:solidFill>
+                            <a:srgbClr val="1F2328"/>
+                          </a:solidFill>
+                          <a:latin typeface="Calibri" pitchFamily="34" charset="0"/>
+                          <a:ea typeface="Calibri" pitchFamily="34" charset="-122"/>
+                          <a:cs typeface="Calibri" pitchFamily="34" charset="-120"/>
+                        </a:rPr>
+                        <a:t>HTTP 404</a:t>
+                      </a:r>
+                      <a:endParaRPr lang="en-US" sz="1300" dirty="0">
+                        <a:latin typeface="Calibri" charset="0"/>
+                        <a:ea typeface="Calibri" charset="0"/>
+                        <a:cs typeface="Calibri" charset="0"/>
+                      </a:endParaRPr>
+                    </a:p>
+                  </a:txBody>
+                  <a:tcPr marL="91440" marR="91440" marT="36576" marB="36576" anchor="ctr">
+                    <a:lnL w="0" cap="flat" cmpd="sng" algn="ctr">
+                      <a:noFill/>
+                    </a:lnL>
+                    <a:lnR w="0" cap="flat" cmpd="sng" algn="ctr">
+                      <a:noFill/>
+                    </a:lnR>
+                    <a:lnT w="0" cap="flat" cmpd="sng" algn="ctr">
+                      <a:noFill/>
+                    </a:lnT>
+                    <a:lnB w="0" cap="flat" cmpd="sng" algn="ctr">
+                      <a:noFill/>
+                    </a:lnB>
+                    <a:solidFill>
+                      <a:srgbClr val="FFFFFF"/>
+                    </a:solidFill>
+                  </a:tcPr>
+                </a:tc>
+                <a:tc>
+                  <a:txBody>
+                    <a:bodyPr/>
+                    <a:lstStyle/>
+                    <a:p>
+                      <a:pPr indent="0" marL="0">
+                        <a:buNone/>
+                      </a:pPr>
+                      <a:r>
+                        <a:rPr lang="en-US" sz="1300" dirty="0">
+                          <a:solidFill>
+                            <a:srgbClr val="EC835A"/>
+                          </a:solidFill>
+                          <a:latin typeface="Calibri" pitchFamily="34" charset="0"/>
+                          <a:ea typeface="Calibri" pitchFamily="34" charset="-122"/>
+                          <a:cs typeface="Calibri" pitchFamily="34" charset="-120"/>
+                        </a:rPr>
+                        <a:t>● </a:t>
+                      </a:r>
+                      <a:pPr indent="0" marL="0">
+                        <a:buNone/>
+                      </a:pPr>
+                      <a:r>
+                        <a:rPr lang="en-US" sz="1300" b="1" dirty="0">
+                          <a:solidFill>
+                            <a:srgbClr val="1F2328"/>
+                          </a:solidFill>
+                          <a:latin typeface="Calibri" pitchFamily="34" charset="0"/>
+                          <a:ea typeface="Calibri" pitchFamily="34" charset="-122"/>
+                          <a:cs typeface="Calibri" pitchFamily="34" charset="-120"/>
+                        </a:rPr>
+                        <a:t>Major</a:t>
+                      </a:r>
+                      <a:endParaRPr lang="en-US" sz="1300" dirty="0">
+                        <a:latin typeface="Calibri" charset="0"/>
+                        <a:ea typeface="Calibri" charset="0"/>
+                        <a:cs typeface="Calibri" charset="0"/>
+                      </a:endParaRPr>
+                    </a:p>
+                  </a:txBody>
+                  <a:tcPr marL="91440" marR="91440" marT="36576" marB="36576" anchor="ctr">
+                    <a:lnL w="0" cap="flat" cmpd="sng" algn="ctr">
+                      <a:noFill/>
+                    </a:lnL>
+                    <a:lnR w="0" cap="flat" cmpd="sng" algn="ctr">
+                      <a:noFill/>
+                    </a:lnR>
+                    <a:lnT w="0" cap="flat" cmpd="sng" algn="ctr">
+                      <a:noFill/>
+                    </a:lnT>
+                    <a:lnB w="0" cap="flat" cmpd="sng" algn="ctr">
+                      <a:noFill/>
+                    </a:lnB>
+                    <a:solidFill>
+                      <a:srgbClr val="FFFFFF"/>
+                    </a:solidFill>
+                  </a:tcPr>
+                </a:tc>
+              </a:tr>
+            </a:tbl>
+          </a:graphicData>
+        </a:graphic>
+      </p:graphicFrame>
+      <p:sp>
+        <p:nvSpPr>
+          <p:cNvPr id="22" name="Text 16"/>
+          <p:cNvSpPr txBox="1"/>
+          <p:nvPr/>
+        </p:nvSpPr>
+        <p:spPr>
+          <a:xfrm>
+            <a:off x="548640" y="5943600"/>
+            <a:ext cx="7315200" cy="320040"/>
+          </a:xfrm>
+          <a:prstGeom prst="rect">
+            <a:avLst/>
+          </a:prstGeom>
+          <a:noFill/>
+          <a:ln/>
+        </p:spPr>
+        <p:txBody>
+          <a:bodyPr wrap="square" lIns="0" tIns="0" rIns="0" bIns="0" rtlCol="0" anchor="t"/>
+          <a:lstStyle/>
+          <a:p>
+            <a:pPr indent="0" marL="0">
+              <a:buNone/>
+            </a:pPr>
+            <a:r>
+              <a:rPr lang="en-US" sz="1400" b="1" dirty="0">
+                <a:solidFill>
+                  <a:srgbClr val="10243F"/>
+                </a:solidFill>
+              </a:rPr>
+              <a:t>Any website:  </a:t>
+            </a:r>
+            <a:pPr indent="0" marL="0">
+              <a:buNone/>
+            </a:pPr>
+            <a:r>
+              <a:rPr lang="en-US" sz="1300" dirty="0">
+                <a:solidFill>
+                  <a:schemeClr val="tx1"/>
+                </a:solidFill>
+                <a:latin typeface="Courier New" pitchFamily="34" charset="0"/>
+                <a:ea typeface="Courier New" pitchFamily="34" charset="-122"/>
+                <a:cs typeface="Courier New" pitchFamily="34" charset="-120"/>
+              </a:rPr>
+              <a:t>LINK_CHECK_START_URL=https://your-site.com npm run test:links</a:t>
+            </a:r>
+            <a:endParaRPr lang="en-US" sz="1400" dirty="0"/>
+          </a:p>
+        </p:txBody>
+      </p:sp>
+      <p:sp>
+        <p:nvSpPr>
+          <p:cNvPr id="23" name="link stat pages crawled"/>
+          <p:cNvSpPr/>
+          <p:nvPr/>
+        </p:nvSpPr>
+        <p:spPr>
+          <a:xfrm>
+            <a:off x="8183880" y="3154680"/>
+            <a:ext cx="3456432" cy="868680"/>
+          </a:xfrm>
+          <a:prstGeom prst="roundRect">
+            <a:avLst>
+              <a:gd name="adj" fmla="val 12632"/>
+            </a:avLst>
+          </a:prstGeom>
+          <a:solidFill>
+            <a:schemeClr val="bg2"/>
+          </a:solidFill>
+          <a:ln/>
+        </p:spPr>
+      </p:sp>
+      <p:sp>
+        <p:nvSpPr>
+          <p:cNvPr id="24" name="Text 18"/>
+          <p:cNvSpPr txBox="1"/>
+          <p:nvPr/>
+        </p:nvSpPr>
+        <p:spPr>
+          <a:xfrm>
+            <a:off x="8412480" y="3264408"/>
+            <a:ext cx="822960" cy="640080"/>
+          </a:xfrm>
+          <a:prstGeom prst="rect">
+            <a:avLst/>
+          </a:prstGeom>
+          <a:noFill/>
+          <a:ln/>
+        </p:spPr>
+        <p:txBody>
+          <a:bodyPr wrap="square" lIns="0" tIns="0" rIns="0" bIns="0" rtlCol="0" anchor="ctr"/>
+          <a:lstStyle/>
+          <a:p>
+            <a:pPr indent="0" marL="0">
+              <a:buNone/>
+            </a:pPr>
+            <a:r>
+              <a:rPr lang="en-US" sz="3000" b="1" dirty="0">
                 <a:solidFill>
                   <a:schemeClr val="tx2"/>
                 </a:solidFill>
@@ -11483,22 +13085,22 @@
                 <a:ea typeface="Arial" pitchFamily="34" charset="-122"/>
                 <a:cs typeface="Arial" pitchFamily="34" charset="-120"/>
               </a:rPr>
-              <a:t>96</a:t>
-            </a:r>
-            <a:endParaRPr lang="en-US" sz="3800" dirty="0"/>
-          </a:p>
-        </p:txBody>
-      </p:sp>
-      <p:sp>
-        <p:nvSpPr>
-          <p:cNvPr id="5" name="Text 3"/>
+              <a:t>11</a:t>
+            </a:r>
+            <a:endParaRPr lang="en-US" sz="3000" dirty="0"/>
+          </a:p>
+        </p:txBody>
+      </p:sp>
+      <p:sp>
+        <p:nvSpPr>
+          <p:cNvPr id="25" name="Text 19"/>
           <p:cNvSpPr txBox="1"/>
           <p:nvPr/>
         </p:nvSpPr>
         <p:spPr>
           <a:xfrm>
-            <a:off x="777240" y="2240280"/>
-            <a:ext cx="2103120" cy="502920"/>
+            <a:off x="9281160" y="3264408"/>
+            <a:ext cx="2240280" cy="640080"/>
           </a:xfrm>
           <a:prstGeom prst="rect">
             <a:avLst/>
@@ -11507,38 +13109,38 @@
           <a:ln/>
         </p:spPr>
         <p:txBody>
-          <a:bodyPr wrap="square" lIns="0" tIns="0" rIns="0" bIns="0" rtlCol="0" anchor="t"/>
+          <a:bodyPr wrap="square" lIns="0" tIns="0" rIns="0" bIns="0" rtlCol="0" anchor="ctr"/>
           <a:lstStyle/>
           <a:p>
             <a:pPr indent="0" marL="0">
               <a:buNone/>
             </a:pPr>
             <a:r>
-              <a:rPr lang="en-US" sz="1400" dirty="0">
+              <a:rPr lang="en-US" sz="1500" dirty="0">
                 <a:solidFill>
                   <a:schemeClr val="tx1"/>
                 </a:solidFill>
               </a:rPr>
-              <a:t>test executions in 6 runs</a:t>
-            </a:r>
-            <a:endParaRPr lang="en-US" sz="1400" dirty="0"/>
-          </a:p>
-        </p:txBody>
-      </p:sp>
-      <p:sp>
-        <p:nvSpPr>
-          <p:cNvPr id="6" name="result unique bugs logged automatically"/>
+              <a:t>pages crawled</a:t>
+            </a:r>
+            <a:endParaRPr lang="en-US" sz="1500" dirty="0"/>
+          </a:p>
+        </p:txBody>
+      </p:sp>
+      <p:sp>
+        <p:nvSpPr>
+          <p:cNvPr id="26" name="link stat unique links checked"/>
           <p:cNvSpPr/>
           <p:nvPr/>
         </p:nvSpPr>
         <p:spPr>
           <a:xfrm>
-            <a:off x="3246120" y="1371600"/>
-            <a:ext cx="2514600" cy="1463040"/>
+            <a:off x="8183880" y="4160520"/>
+            <a:ext cx="3456432" cy="868680"/>
           </a:xfrm>
           <a:prstGeom prst="roundRect">
             <a:avLst>
-              <a:gd name="adj" fmla="val 7500"/>
+              <a:gd name="adj" fmla="val 12632"/>
             </a:avLst>
           </a:prstGeom>
           <a:solidFill>
@@ -11549,14 +13151,14 @@
       </p:sp>
       <p:sp>
         <p:nvSpPr>
-          <p:cNvPr id="7" name="Text 5"/>
+          <p:cNvPr id="27" name="Text 21"/>
           <p:cNvSpPr txBox="1"/>
           <p:nvPr/>
         </p:nvSpPr>
         <p:spPr>
           <a:xfrm>
-            <a:off x="3474720" y="1508760"/>
-            <a:ext cx="2103120" cy="731520"/>
+            <a:off x="8412480" y="4270248"/>
+            <a:ext cx="822960" cy="640080"/>
           </a:xfrm>
           <a:prstGeom prst="rect">
             <a:avLst/>
@@ -11565,14 +13167,14 @@
           <a:ln/>
         </p:spPr>
         <p:txBody>
-          <a:bodyPr wrap="square" lIns="0" tIns="0" rIns="0" bIns="0" rtlCol="0" anchor="t"/>
+          <a:bodyPr wrap="square" lIns="0" tIns="0" rIns="0" bIns="0" rtlCol="0" anchor="ctr"/>
           <a:lstStyle/>
           <a:p>
             <a:pPr indent="0" marL="0">
               <a:buNone/>
             </a:pPr>
             <a:r>
-              <a:rPr lang="en-US" sz="3800" b="1" dirty="0">
+              <a:rPr lang="en-US" sz="3000" b="1" dirty="0">
                 <a:solidFill>
                   <a:schemeClr val="tx2"/>
                 </a:solidFill>
@@ -11580,22 +13182,22 @@
                 <a:ea typeface="Arial" pitchFamily="34" charset="-122"/>
                 <a:cs typeface="Arial" pitchFamily="34" charset="-120"/>
               </a:rPr>
-              <a:t>10</a:t>
-            </a:r>
-            <a:endParaRPr lang="en-US" sz="3800" dirty="0"/>
-          </a:p>
-        </p:txBody>
-      </p:sp>
-      <p:sp>
-        <p:nvSpPr>
-          <p:cNvPr id="8" name="Text 6"/>
+              <a:t>11</a:t>
+            </a:r>
+            <a:endParaRPr lang="en-US" sz="3000" dirty="0"/>
+          </a:p>
+        </p:txBody>
+      </p:sp>
+      <p:sp>
+        <p:nvSpPr>
+          <p:cNvPr id="28" name="Text 22"/>
           <p:cNvSpPr txBox="1"/>
           <p:nvPr/>
         </p:nvSpPr>
         <p:spPr>
           <a:xfrm>
-            <a:off x="3474720" y="2240280"/>
-            <a:ext cx="2103120" cy="502920"/>
+            <a:off x="9281160" y="4270248"/>
+            <a:ext cx="2240280" cy="640080"/>
           </a:xfrm>
           <a:prstGeom prst="rect">
             <a:avLst/>
@@ -11604,38 +13206,38 @@
           <a:ln/>
         </p:spPr>
         <p:txBody>
-          <a:bodyPr wrap="square" lIns="0" tIns="0" rIns="0" bIns="0" rtlCol="0" anchor="t"/>
+          <a:bodyPr wrap="square" lIns="0" tIns="0" rIns="0" bIns="0" rtlCol="0" anchor="ctr"/>
           <a:lstStyle/>
           <a:p>
             <a:pPr indent="0" marL="0">
               <a:buNone/>
             </a:pPr>
             <a:r>
-              <a:rPr lang="en-US" sz="1400" dirty="0">
+              <a:rPr lang="en-US" sz="1500" dirty="0">
                 <a:solidFill>
                   <a:schemeClr val="tx1"/>
                 </a:solidFill>
               </a:rPr>
-              <a:t>unique bugs logged automatically</a:t>
-            </a:r>
-            <a:endParaRPr lang="en-US" sz="1400" dirty="0"/>
-          </a:p>
-        </p:txBody>
-      </p:sp>
-      <p:sp>
-        <p:nvSpPr>
-          <p:cNvPr id="9" name="result manual bug reports written"/>
+              <a:t>unique links checked</a:t>
+            </a:r>
+            <a:endParaRPr lang="en-US" sz="1500" dirty="0"/>
+          </a:p>
+        </p:txBody>
+      </p:sp>
+      <p:sp>
+        <p:nvSpPr>
+          <p:cNvPr id="29" name="link stat broken links reported"/>
           <p:cNvSpPr/>
           <p:nvPr/>
         </p:nvSpPr>
         <p:spPr>
           <a:xfrm>
-            <a:off x="548640" y="3017520"/>
-            <a:ext cx="2514600" cy="1463040"/>
+            <a:off x="8183880" y="5166360"/>
+            <a:ext cx="3456432" cy="868680"/>
           </a:xfrm>
           <a:prstGeom prst="roundRect">
             <a:avLst>
-              <a:gd name="adj" fmla="val 7500"/>
+              <a:gd name="adj" fmla="val 12632"/>
             </a:avLst>
           </a:prstGeom>
           <a:solidFill>
@@ -11646,14 +13248,14 @@
       </p:sp>
       <p:sp>
         <p:nvSpPr>
-          <p:cNvPr id="10" name="Text 8"/>
+          <p:cNvPr id="30" name="Text 24"/>
           <p:cNvSpPr txBox="1"/>
           <p:nvPr/>
         </p:nvSpPr>
         <p:spPr>
           <a:xfrm>
-            <a:off x="777240" y="3154680"/>
-            <a:ext cx="2103120" cy="731520"/>
+            <a:off x="8412480" y="5276088"/>
+            <a:ext cx="822960" cy="640080"/>
           </a:xfrm>
           <a:prstGeom prst="rect">
             <a:avLst/>
@@ -11662,37 +13264,37 @@
           <a:ln/>
         </p:spPr>
         <p:txBody>
-          <a:bodyPr wrap="square" lIns="0" tIns="0" rIns="0" bIns="0" rtlCol="0" anchor="t"/>
+          <a:bodyPr wrap="square" lIns="0" tIns="0" rIns="0" bIns="0" rtlCol="0" anchor="ctr"/>
           <a:lstStyle/>
           <a:p>
             <a:pPr indent="0" marL="0">
               <a:buNone/>
             </a:pPr>
             <a:r>
-              <a:rPr lang="en-US" sz="3800" b="1" dirty="0">
-                <a:solidFill>
-                  <a:schemeClr val="tx2"/>
+              <a:rPr lang="en-US" sz="3000" b="1" dirty="0">
+                <a:solidFill>
+                  <a:schemeClr val="accent1"/>
                 </a:solidFill>
                 <a:latin typeface="Arial" pitchFamily="34" charset="0"/>
                 <a:ea typeface="Arial" pitchFamily="34" charset="-122"/>
                 <a:cs typeface="Arial" pitchFamily="34" charset="-120"/>
               </a:rPr>
-              <a:t>0</a:t>
-            </a:r>
-            <a:endParaRPr lang="en-US" sz="3800" dirty="0"/>
-          </a:p>
-        </p:txBody>
-      </p:sp>
-      <p:sp>
-        <p:nvSpPr>
-          <p:cNvPr id="11" name="Text 9"/>
+              <a:t>3</a:t>
+            </a:r>
+            <a:endParaRPr lang="en-US" sz="3000" dirty="0"/>
+          </a:p>
+        </p:txBody>
+      </p:sp>
+      <p:sp>
+        <p:nvSpPr>
+          <p:cNvPr id="31" name="Text 25"/>
           <p:cNvSpPr txBox="1"/>
           <p:nvPr/>
         </p:nvSpPr>
         <p:spPr>
           <a:xfrm>
-            <a:off x="777240" y="3886200"/>
-            <a:ext cx="2103120" cy="502920"/>
+            <a:off x="9281160" y="5276088"/>
+            <a:ext cx="2240280" cy="640080"/>
           </a:xfrm>
           <a:prstGeom prst="rect">
             <a:avLst/>
@@ -11701,364 +13303,21 @@
           <a:ln/>
         </p:spPr>
         <p:txBody>
-          <a:bodyPr wrap="square" lIns="0" tIns="0" rIns="0" bIns="0" rtlCol="0" anchor="t"/>
+          <a:bodyPr wrap="square" lIns="0" tIns="0" rIns="0" bIns="0" rtlCol="0" anchor="ctr"/>
           <a:lstStyle/>
           <a:p>
             <a:pPr indent="0" marL="0">
               <a:buNone/>
             </a:pPr>
             <a:r>
-              <a:rPr lang="en-US" sz="1400" dirty="0">
+              <a:rPr lang="en-US" sz="1500" dirty="0">
                 <a:solidFill>
                   <a:schemeClr val="tx1"/>
                 </a:solidFill>
               </a:rPr>
-              <a:t>manual bug reports written</a:t>
-            </a:r>
-            <a:endParaRPr lang="en-US" sz="1400" dirty="0"/>
-          </a:p>
-        </p:txBody>
-      </p:sp>
-      <p:sp>
-        <p:nvSpPr>
-          <p:cNvPr id="12" name="result severities predicted correctly"/>
-          <p:cNvSpPr/>
-          <p:nvPr/>
-        </p:nvSpPr>
-        <p:spPr>
-          <a:xfrm>
-            <a:off x="3246120" y="3017520"/>
-            <a:ext cx="2514600" cy="1463040"/>
-          </a:xfrm>
-          <a:prstGeom prst="roundRect">
-            <a:avLst>
-              <a:gd name="adj" fmla="val 7500"/>
-            </a:avLst>
-          </a:prstGeom>
-          <a:solidFill>
-            <a:schemeClr val="bg2"/>
-          </a:solidFill>
-          <a:ln/>
-        </p:spPr>
-      </p:sp>
-      <p:sp>
-        <p:nvSpPr>
-          <p:cNvPr id="13" name="Text 11"/>
-          <p:cNvSpPr txBox="1"/>
-          <p:nvPr/>
-        </p:nvSpPr>
-        <p:spPr>
-          <a:xfrm>
-            <a:off x="3474720" y="3154680"/>
-            <a:ext cx="2103120" cy="731520"/>
-          </a:xfrm>
-          <a:prstGeom prst="rect">
-            <a:avLst/>
-          </a:prstGeom>
-          <a:noFill/>
-          <a:ln/>
-        </p:spPr>
-        <p:txBody>
-          <a:bodyPr wrap="square" lIns="0" tIns="0" rIns="0" bIns="0" rtlCol="0" anchor="t"/>
-          <a:lstStyle/>
-          <a:p>
-            <a:pPr indent="0" marL="0">
-              <a:buNone/>
-            </a:pPr>
-            <a:r>
-              <a:rPr lang="en-US" sz="3800" b="1" dirty="0">
-                <a:solidFill>
-                  <a:schemeClr val="tx2"/>
-                </a:solidFill>
-                <a:latin typeface="Arial" pitchFamily="34" charset="0"/>
-                <a:ea typeface="Arial" pitchFamily="34" charset="-122"/>
-                <a:cs typeface="Arial" pitchFamily="34" charset="-120"/>
-              </a:rPr>
-              <a:t>10/10</a:t>
-            </a:r>
-            <a:endParaRPr lang="en-US" sz="3800" dirty="0"/>
-          </a:p>
-        </p:txBody>
-      </p:sp>
-      <p:sp>
-        <p:nvSpPr>
-          <p:cNvPr id="14" name="Text 12"/>
-          <p:cNvSpPr txBox="1"/>
-          <p:nvPr/>
-        </p:nvSpPr>
-        <p:spPr>
-          <a:xfrm>
-            <a:off x="3474720" y="3886200"/>
-            <a:ext cx="2103120" cy="502920"/>
-          </a:xfrm>
-          <a:prstGeom prst="rect">
-            <a:avLst/>
-          </a:prstGeom>
-          <a:noFill/>
-          <a:ln/>
-        </p:spPr>
-        <p:txBody>
-          <a:bodyPr wrap="square" lIns="0" tIns="0" rIns="0" bIns="0" rtlCol="0" anchor="t"/>
-          <a:lstStyle/>
-          <a:p>
-            <a:pPr indent="0" marL="0">
-              <a:buNone/>
-            </a:pPr>
-            <a:r>
-              <a:rPr lang="en-US" sz="1400" dirty="0">
-                <a:solidFill>
-                  <a:schemeClr val="tx1"/>
-                </a:solidFill>
-              </a:rPr>
-              <a:t>severities predicted correctly</a:t>
-            </a:r>
-            <a:endParaRPr lang="en-US" sz="1400" dirty="0"/>
-          </a:p>
-        </p:txBody>
-      </p:sp>
-      <p:sp>
-        <p:nvSpPr>
-          <p:cNvPr id="15" name="result flaky tests detected"/>
-          <p:cNvSpPr/>
-          <p:nvPr/>
-        </p:nvSpPr>
-        <p:spPr>
-          <a:xfrm>
-            <a:off x="548640" y="4663440"/>
-            <a:ext cx="2514600" cy="1463040"/>
-          </a:xfrm>
-          <a:prstGeom prst="roundRect">
-            <a:avLst>
-              <a:gd name="adj" fmla="val 7500"/>
-            </a:avLst>
-          </a:prstGeom>
-          <a:solidFill>
-            <a:schemeClr val="bg2"/>
-          </a:solidFill>
-          <a:ln/>
-        </p:spPr>
-      </p:sp>
-      <p:sp>
-        <p:nvSpPr>
-          <p:cNvPr id="16" name="Text 14"/>
-          <p:cNvSpPr txBox="1"/>
-          <p:nvPr/>
-        </p:nvSpPr>
-        <p:spPr>
-          <a:xfrm>
-            <a:off x="777240" y="4800600"/>
-            <a:ext cx="2103120" cy="731520"/>
-          </a:xfrm>
-          <a:prstGeom prst="rect">
-            <a:avLst/>
-          </a:prstGeom>
-          <a:noFill/>
-          <a:ln/>
-        </p:spPr>
-        <p:txBody>
-          <a:bodyPr wrap="square" lIns="0" tIns="0" rIns="0" bIns="0" rtlCol="0" anchor="t"/>
-          <a:lstStyle/>
-          <a:p>
-            <a:pPr indent="0" marL="0">
-              <a:buNone/>
-            </a:pPr>
-            <a:r>
-              <a:rPr lang="en-US" sz="3800" b="1" dirty="0">
-                <a:solidFill>
-                  <a:schemeClr val="tx2"/>
-                </a:solidFill>
-                <a:latin typeface="Arial" pitchFamily="34" charset="0"/>
-                <a:ea typeface="Arial" pitchFamily="34" charset="-122"/>
-                <a:cs typeface="Arial" pitchFamily="34" charset="-120"/>
-              </a:rPr>
-              <a:t>2</a:t>
-            </a:r>
-            <a:endParaRPr lang="en-US" sz="3800" dirty="0"/>
-          </a:p>
-        </p:txBody>
-      </p:sp>
-      <p:sp>
-        <p:nvSpPr>
-          <p:cNvPr id="17" name="Text 15"/>
-          <p:cNvSpPr txBox="1"/>
-          <p:nvPr/>
-        </p:nvSpPr>
-        <p:spPr>
-          <a:xfrm>
-            <a:off x="777240" y="5532120"/>
-            <a:ext cx="2103120" cy="502920"/>
-          </a:xfrm>
-          <a:prstGeom prst="rect">
-            <a:avLst/>
-          </a:prstGeom>
-          <a:noFill/>
-          <a:ln/>
-        </p:spPr>
-        <p:txBody>
-          <a:bodyPr wrap="square" lIns="0" tIns="0" rIns="0" bIns="0" rtlCol="0" anchor="t"/>
-          <a:lstStyle/>
-          <a:p>
-            <a:pPr indent="0" marL="0">
-              <a:buNone/>
-            </a:pPr>
-            <a:r>
-              <a:rPr lang="en-US" sz="1400" dirty="0">
-                <a:solidFill>
-                  <a:schemeClr val="tx1"/>
-                </a:solidFill>
-              </a:rPr>
-              <a:t>flaky tests detected</a:t>
-            </a:r>
-            <a:endParaRPr lang="en-US" sz="1400" dirty="0"/>
-          </a:p>
-        </p:txBody>
-      </p:sp>
-      <p:sp>
-        <p:nvSpPr>
-          <p:cNvPr id="18" name="result Critical alerts generated"/>
-          <p:cNvSpPr/>
-          <p:nvPr/>
-        </p:nvSpPr>
-        <p:spPr>
-          <a:xfrm>
-            <a:off x="3246120" y="4663440"/>
-            <a:ext cx="2514600" cy="1463040"/>
-          </a:xfrm>
-          <a:prstGeom prst="roundRect">
-            <a:avLst>
-              <a:gd name="adj" fmla="val 7500"/>
-            </a:avLst>
-          </a:prstGeom>
-          <a:solidFill>
-            <a:schemeClr val="bg2"/>
-          </a:solidFill>
-          <a:ln/>
-        </p:spPr>
-      </p:sp>
-      <p:sp>
-        <p:nvSpPr>
-          <p:cNvPr id="19" name="Text 17"/>
-          <p:cNvSpPr txBox="1"/>
-          <p:nvPr/>
-        </p:nvSpPr>
-        <p:spPr>
-          <a:xfrm>
-            <a:off x="3474720" y="4800600"/>
-            <a:ext cx="2103120" cy="731520"/>
-          </a:xfrm>
-          <a:prstGeom prst="rect">
-            <a:avLst/>
-          </a:prstGeom>
-          <a:noFill/>
-          <a:ln/>
-        </p:spPr>
-        <p:txBody>
-          <a:bodyPr wrap="square" lIns="0" tIns="0" rIns="0" bIns="0" rtlCol="0" anchor="t"/>
-          <a:lstStyle/>
-          <a:p>
-            <a:pPr indent="0" marL="0">
-              <a:buNone/>
-            </a:pPr>
-            <a:r>
-              <a:rPr lang="en-US" sz="3800" b="1" dirty="0">
-                <a:solidFill>
-                  <a:schemeClr val="tx2"/>
-                </a:solidFill>
-                <a:latin typeface="Arial" pitchFamily="34" charset="0"/>
-                <a:ea typeface="Arial" pitchFamily="34" charset="-122"/>
-                <a:cs typeface="Arial" pitchFamily="34" charset="-120"/>
-              </a:rPr>
-              <a:t>3</a:t>
-            </a:r>
-            <a:endParaRPr lang="en-US" sz="3800" dirty="0"/>
-          </a:p>
-        </p:txBody>
-      </p:sp>
-      <p:sp>
-        <p:nvSpPr>
-          <p:cNvPr id="20" name="Text 18"/>
-          <p:cNvSpPr txBox="1"/>
-          <p:nvPr/>
-        </p:nvSpPr>
-        <p:spPr>
-          <a:xfrm>
-            <a:off x="3474720" y="5532120"/>
-            <a:ext cx="2103120" cy="502920"/>
-          </a:xfrm>
-          <a:prstGeom prst="rect">
-            <a:avLst/>
-          </a:prstGeom>
-          <a:noFill/>
-          <a:ln/>
-        </p:spPr>
-        <p:txBody>
-          <a:bodyPr wrap="square" lIns="0" tIns="0" rIns="0" bIns="0" rtlCol="0" anchor="t"/>
-          <a:lstStyle/>
-          <a:p>
-            <a:pPr indent="0" marL="0">
-              <a:buNone/>
-            </a:pPr>
-            <a:r>
-              <a:rPr lang="en-US" sz="1400" dirty="0">
-                <a:solidFill>
-                  <a:schemeClr val="tx1"/>
-                </a:solidFill>
-              </a:rPr>
-              <a:t>Critical alerts generated</a:t>
-            </a:r>
-            <a:endParaRPr lang="en-US" sz="1400" dirty="0"/>
-          </a:p>
-        </p:txBody>
-      </p:sp>
-      <p:graphicFrame>
-        <p:nvGraphicFramePr>
-          <p:cNvPr id="21" name="runs chart" descr=""/>
-          <p:cNvGraphicFramePr/>
-          <p:nvPr/>
-        </p:nvGraphicFramePr>
-        <p:xfrm>
-          <a:off x="6035040" y="1371600"/>
-          <a:ext cx="5605272" cy="4023360"/>
-        </p:xfrm>
-        <a:graphic xmlns:a="http://schemas.openxmlformats.org/drawingml/2006/main">
-          <a:graphicData uri="http://schemas.openxmlformats.org/drawingml/2006/chart">
-            <c:chart xmlns:c="http://schemas.openxmlformats.org/drawingml/2006/chart" r:id="rId1"/>
-          </a:graphicData>
-        </a:graphic>
-      </p:graphicFrame>
-      <p:sp>
-        <p:nvSpPr>
-          <p:cNvPr id="22" name="Text 19"/>
-          <p:cNvSpPr txBox="1"/>
-          <p:nvPr/>
-        </p:nvSpPr>
-        <p:spPr>
-          <a:xfrm>
-            <a:off x="6035040" y="5532120"/>
-            <a:ext cx="5605272" cy="548640"/>
-          </a:xfrm>
-          <a:prstGeom prst="rect">
-            <a:avLst/>
-          </a:prstGeom>
-          <a:noFill/>
-          <a:ln/>
-        </p:spPr>
-        <p:txBody>
-          <a:bodyPr wrap="square" lIns="0" tIns="0" rIns="0" bIns="0" rtlCol="0" anchor="t"/>
-          <a:lstStyle/>
-          <a:p>
-            <a:pPr indent="0" marL="0">
-              <a:buNone/>
-            </a:pPr>
-            <a:r>
-              <a:rPr lang="en-US" sz="1400" i="1" dirty="0">
-                <a:solidFill>
-                  <a:srgbClr val="5B6472"/>
-                </a:solidFill>
-              </a:rPr>
-              <a:t>Failures vary between 8 and 10 per run only because of the 2 flaky tests</a:t>
-            </a:r>
-            <a:endParaRPr lang="en-US" sz="1400" dirty="0"/>
+              <a:t>broken links reported</a:t>
+            </a:r>
+            <a:endParaRPr lang="en-US" sz="1500" dirty="0"/>
           </a:p>
         </p:txBody>
       </p:sp>
@@ -12164,7 +13423,7 @@
                   <a:schemeClr val="tx2"/>
                 </a:solidFill>
               </a:rPr>
-              <a:t>Conclusion and future scope</a:t>
+              <a:t>Objective 8: end-to-end pipeline results</a:t>
             </a:r>
             <a:endParaRPr lang="en-US" sz="3000" dirty="0"/>
           </a:p>
@@ -12172,18 +13431,18 @@
       </p:sp>
       <p:sp>
         <p:nvSpPr>
-          <p:cNvPr id="3" name="conclusion card"/>
+          <p:cNvPr id="3" name="result test executions in 10 runs"/>
           <p:cNvSpPr/>
           <p:nvPr/>
         </p:nvSpPr>
         <p:spPr>
           <a:xfrm>
             <a:off x="548640" y="1371600"/>
-            <a:ext cx="5394960" cy="4480560"/>
+            <a:ext cx="2514600" cy="1463040"/>
           </a:xfrm>
           <a:prstGeom prst="roundRect">
             <a:avLst>
-              <a:gd name="adj" fmla="val 2449"/>
+              <a:gd name="adj" fmla="val 7500"/>
             </a:avLst>
           </a:prstGeom>
           <a:solidFill>
@@ -12194,272 +13453,208 @@
       </p:sp>
       <p:sp>
         <p:nvSpPr>
-          <p:cNvPr id="4" name="icon circle"/>
+          <p:cNvPr id="4" name="Text 2"/>
+          <p:cNvSpPr txBox="1"/>
+          <p:nvPr/>
+        </p:nvSpPr>
+        <p:spPr>
+          <a:xfrm>
+            <a:off x="777240" y="1508760"/>
+            <a:ext cx="2103120" cy="731520"/>
+          </a:xfrm>
+          <a:prstGeom prst="rect">
+            <a:avLst/>
+          </a:prstGeom>
+          <a:noFill/>
+          <a:ln/>
+        </p:spPr>
+        <p:txBody>
+          <a:bodyPr wrap="square" lIns="0" tIns="0" rIns="0" bIns="0" rtlCol="0" anchor="t"/>
+          <a:lstStyle/>
+          <a:p>
+            <a:pPr indent="0" marL="0">
+              <a:buNone/>
+            </a:pPr>
+            <a:r>
+              <a:rPr lang="en-US" sz="3800" b="1" dirty="0">
+                <a:solidFill>
+                  <a:schemeClr val="tx2"/>
+                </a:solidFill>
+                <a:latin typeface="Arial" pitchFamily="34" charset="0"/>
+                <a:ea typeface="Arial" pitchFamily="34" charset="-122"/>
+                <a:cs typeface="Arial" pitchFamily="34" charset="-120"/>
+              </a:rPr>
+              <a:t>170</a:t>
+            </a:r>
+            <a:endParaRPr lang="en-US" sz="3800" dirty="0"/>
+          </a:p>
+        </p:txBody>
+      </p:sp>
+      <p:sp>
+        <p:nvSpPr>
+          <p:cNvPr id="5" name="Text 3"/>
+          <p:cNvSpPr txBox="1"/>
+          <p:nvPr/>
+        </p:nvSpPr>
+        <p:spPr>
+          <a:xfrm>
+            <a:off x="777240" y="2240280"/>
+            <a:ext cx="2103120" cy="502920"/>
+          </a:xfrm>
+          <a:prstGeom prst="rect">
+            <a:avLst/>
+          </a:prstGeom>
+          <a:noFill/>
+          <a:ln/>
+        </p:spPr>
+        <p:txBody>
+          <a:bodyPr wrap="square" lIns="0" tIns="0" rIns="0" bIns="0" rtlCol="0" anchor="t"/>
+          <a:lstStyle/>
+          <a:p>
+            <a:pPr indent="0" marL="0">
+              <a:buNone/>
+            </a:pPr>
+            <a:r>
+              <a:rPr lang="en-US" sz="1400" dirty="0">
+                <a:solidFill>
+                  <a:schemeClr val="tx1"/>
+                </a:solidFill>
+              </a:rPr>
+              <a:t>test executions in 10 runs</a:t>
+            </a:r>
+            <a:endParaRPr lang="en-US" sz="1400" dirty="0"/>
+          </a:p>
+        </p:txBody>
+      </p:sp>
+      <p:sp>
+        <p:nvSpPr>
+          <p:cNvPr id="6" name="result unique bugs logged automatically"/>
           <p:cNvSpPr/>
           <p:nvPr/>
         </p:nvSpPr>
         <p:spPr>
           <a:xfrm>
-            <a:off x="822960" y="1600200"/>
-            <a:ext cx="548640" cy="548640"/>
-          </a:xfrm>
-          <a:prstGeom prst="ellipse">
-            <a:avLst/>
-          </a:prstGeom>
-          <a:solidFill>
-            <a:srgbClr val="1B8E4E"/>
-          </a:solidFill>
-          <a:ln/>
-        </p:spPr>
-      </p:sp>
-      <p:pic>
-        <p:nvPicPr>
-          <p:cNvPr id="5" name="FaCheckCircle icon" descr="preencoded.png">    </p:cNvPr>
-          <p:cNvPicPr>
-            <a:picLocks noChangeAspect="1"/>
-          </p:cNvPicPr>
-          <p:nvPr/>
-        </p:nvPicPr>
-        <p:blipFill>
-          <a:blip r:embed="rId1"/>
-          <a:stretch>
-            <a:fillRect/>
-          </a:stretch>
-        </p:blipFill>
-        <p:spPr>
-          <a:xfrm>
-            <a:off x="960120" y="1737360"/>
-            <a:ext cx="274320" cy="274320"/>
-          </a:xfrm>
-          <a:prstGeom prst="rect">
-            <a:avLst/>
-          </a:prstGeom>
-        </p:spPr>
-      </p:pic>
-      <p:sp>
-        <p:nvSpPr>
-          <p:cNvPr id="6" name="Text 3"/>
-          <p:cNvSpPr txBox="1"/>
-          <p:nvPr/>
-        </p:nvSpPr>
-        <p:spPr>
-          <a:xfrm>
-            <a:off x="1554480" y="1673352"/>
-            <a:ext cx="4114800" cy="411480"/>
-          </a:xfrm>
-          <a:prstGeom prst="rect">
-            <a:avLst/>
-          </a:prstGeom>
-          <a:noFill/>
-          <a:ln/>
-        </p:spPr>
-        <p:txBody>
-          <a:bodyPr wrap="square" lIns="0" tIns="0" rIns="0" bIns="0" rtlCol="0" anchor="t"/>
-          <a:lstStyle/>
-          <a:p>
-            <a:pPr indent="0" marL="0">
-              <a:buNone/>
-            </a:pPr>
-            <a:r>
-              <a:rPr lang="en-US" sz="2000" b="1" dirty="0">
-                <a:solidFill>
-                  <a:schemeClr val="tx2"/>
-                </a:solidFill>
-              </a:rPr>
-              <a:t>Conclusion</a:t>
-            </a:r>
-            <a:endParaRPr lang="en-US" sz="2000" dirty="0"/>
-          </a:p>
-        </p:txBody>
-      </p:sp>
-      <p:sp>
-        <p:nvSpPr>
-          <p:cNvPr id="7" name="Text 4"/>
-          <p:cNvSpPr txBox="1"/>
-          <p:nvPr/>
-        </p:nvSpPr>
-        <p:spPr>
-          <a:xfrm>
-            <a:off x="822960" y="2423160"/>
-            <a:ext cx="4846320" cy="3291840"/>
-          </a:xfrm>
-          <a:prstGeom prst="rect">
-            <a:avLst/>
-          </a:prstGeom>
-          <a:noFill/>
-          <a:ln/>
-        </p:spPr>
-        <p:txBody>
-          <a:bodyPr wrap="square" lIns="0" tIns="0" rIns="0" bIns="0" rtlCol="0" anchor="t"/>
-          <a:lstStyle/>
-          <a:p>
-            <a:pPr marL="342900" indent="-342900">
-              <a:spcAft>
-                <a:spcPts val="1600"/>
-              </a:spcAft>
-              <a:buSzPct val="100000"/>
-              <a:buChar char="•"/>
-            </a:pPr>
-            <a:r>
-              <a:rPr lang="en-US" sz="1800" dirty="0">
-                <a:solidFill>
-                  <a:schemeClr val="tx1"/>
-                </a:solidFill>
-              </a:rPr>
-              <a:t>All 8 objectives implemented and verified</a:t>
-            </a:r>
-            <a:endParaRPr lang="en-US" sz="1800" dirty="0"/>
-          </a:p>
-          <a:p>
-            <a:pPr marL="342900" indent="-342900">
-              <a:spcAft>
-                <a:spcPts val="1600"/>
-              </a:spcAft>
-              <a:buSzPct val="100000"/>
-              <a:buChar char="•"/>
-            </a:pPr>
-            <a:r>
-              <a:rPr lang="en-US" sz="1800" dirty="0">
-                <a:solidFill>
-                  <a:schemeClr val="tx1"/>
-                </a:solidFill>
-              </a:rPr>
-              <a:t>Bug reporting fully automated: zero manual effort</a:t>
-            </a:r>
-            <a:endParaRPr lang="en-US" sz="1800" dirty="0"/>
-          </a:p>
-          <a:p>
-            <a:pPr marL="342900" indent="-342900">
-              <a:spcAft>
-                <a:spcPts val="1600"/>
-              </a:spcAft>
-              <a:buSzPct val="100000"/>
-              <a:buChar char="•"/>
-            </a:pPr>
-            <a:r>
-              <a:rPr lang="en-US" sz="1800" dirty="0">
-                <a:solidFill>
-                  <a:schemeClr val="tx1"/>
-                </a:solidFill>
-              </a:rPr>
-              <a:t>ML severity: 87.2% cross-validated accuracy</a:t>
-            </a:r>
-            <a:endParaRPr lang="en-US" sz="1800" dirty="0"/>
-          </a:p>
-          <a:p>
-            <a:pPr marL="342900" indent="-342900">
-              <a:spcAft>
-                <a:spcPts val="1600"/>
-              </a:spcAft>
-              <a:buSzPct val="100000"/>
-              <a:buChar char="•"/>
-            </a:pPr>
-            <a:r>
-              <a:rPr lang="en-US" sz="1800" dirty="0">
-                <a:solidFill>
-                  <a:schemeClr val="tx1"/>
-                </a:solidFill>
-              </a:rPr>
-              <a:t>Flaky tests separated from real defects</a:t>
-            </a:r>
-            <a:endParaRPr lang="en-US" sz="1800" dirty="0"/>
-          </a:p>
-          <a:p>
-            <a:pPr marL="342900" indent="-342900">
-              <a:spcAft>
-                <a:spcPts val="1600"/>
-              </a:spcAft>
-              <a:buSzPct val="100000"/>
-              <a:buChar char="•"/>
-            </a:pPr>
-            <a:r>
-              <a:rPr lang="en-US" sz="1800" dirty="0">
-                <a:solidFill>
-                  <a:schemeClr val="tx1"/>
-                </a:solidFill>
-              </a:rPr>
-              <a:t>Every bug traceable from test to resolution</a:t>
-            </a:r>
-            <a:endParaRPr lang="en-US" sz="1800" dirty="0"/>
-          </a:p>
-        </p:txBody>
-      </p:sp>
-      <p:sp>
-        <p:nvSpPr>
-          <p:cNvPr id="8" name="future scope card"/>
-          <p:cNvSpPr/>
-          <p:nvPr/>
-        </p:nvSpPr>
-        <p:spPr>
-          <a:xfrm>
-            <a:off x="6245352" y="1371600"/>
-            <a:ext cx="5394960" cy="4480560"/>
+            <a:off x="3246120" y="1371600"/>
+            <a:ext cx="2514600" cy="1463040"/>
           </a:xfrm>
           <a:prstGeom prst="roundRect">
             <a:avLst>
-              <a:gd name="adj" fmla="val 2449"/>
+              <a:gd name="adj" fmla="val 7500"/>
             </a:avLst>
           </a:prstGeom>
           <a:solidFill>
-            <a:srgbClr val="10243F"/>
+            <a:schemeClr val="bg2"/>
           </a:solidFill>
           <a:ln/>
         </p:spPr>
       </p:sp>
       <p:sp>
         <p:nvSpPr>
-          <p:cNvPr id="9" name="icon circle"/>
+          <p:cNvPr id="7" name="Text 5"/>
+          <p:cNvSpPr txBox="1"/>
+          <p:nvPr/>
+        </p:nvSpPr>
+        <p:spPr>
+          <a:xfrm>
+            <a:off x="3474720" y="1508760"/>
+            <a:ext cx="2103120" cy="731520"/>
+          </a:xfrm>
+          <a:prstGeom prst="rect">
+            <a:avLst/>
+          </a:prstGeom>
+          <a:noFill/>
+          <a:ln/>
+        </p:spPr>
+        <p:txBody>
+          <a:bodyPr wrap="square" lIns="0" tIns="0" rIns="0" bIns="0" rtlCol="0" anchor="t"/>
+          <a:lstStyle/>
+          <a:p>
+            <a:pPr indent="0" marL="0">
+              <a:buNone/>
+            </a:pPr>
+            <a:r>
+              <a:rPr lang="en-US" sz="3800" b="1" dirty="0">
+                <a:solidFill>
+                  <a:schemeClr val="tx2"/>
+                </a:solidFill>
+                <a:latin typeface="Arial" pitchFamily="34" charset="0"/>
+                <a:ea typeface="Arial" pitchFamily="34" charset="-122"/>
+                <a:cs typeface="Arial" pitchFamily="34" charset="-120"/>
+              </a:rPr>
+              <a:t>13</a:t>
+            </a:r>
+            <a:endParaRPr lang="en-US" sz="3800" dirty="0"/>
+          </a:p>
+        </p:txBody>
+      </p:sp>
+      <p:sp>
+        <p:nvSpPr>
+          <p:cNvPr id="8" name="Text 6"/>
+          <p:cNvSpPr txBox="1"/>
+          <p:nvPr/>
+        </p:nvSpPr>
+        <p:spPr>
+          <a:xfrm>
+            <a:off x="3474720" y="2240280"/>
+            <a:ext cx="2103120" cy="502920"/>
+          </a:xfrm>
+          <a:prstGeom prst="rect">
+            <a:avLst/>
+          </a:prstGeom>
+          <a:noFill/>
+          <a:ln/>
+        </p:spPr>
+        <p:txBody>
+          <a:bodyPr wrap="square" lIns="0" tIns="0" rIns="0" bIns="0" rtlCol="0" anchor="t"/>
+          <a:lstStyle/>
+          <a:p>
+            <a:pPr indent="0" marL="0">
+              <a:buNone/>
+            </a:pPr>
+            <a:r>
+              <a:rPr lang="en-US" sz="1400" dirty="0">
+                <a:solidFill>
+                  <a:schemeClr val="tx1"/>
+                </a:solidFill>
+              </a:rPr>
+              <a:t>unique bugs logged automatically</a:t>
+            </a:r>
+            <a:endParaRPr lang="en-US" sz="1400" dirty="0"/>
+          </a:p>
+        </p:txBody>
+      </p:sp>
+      <p:sp>
+        <p:nvSpPr>
+          <p:cNvPr id="9" name="result manual bug reports written"/>
           <p:cNvSpPr/>
           <p:nvPr/>
         </p:nvSpPr>
         <p:spPr>
           <a:xfrm>
-            <a:off x="6519672" y="1600200"/>
-            <a:ext cx="548640" cy="548640"/>
-          </a:xfrm>
-          <a:prstGeom prst="ellipse">
-            <a:avLst/>
+            <a:off x="548640" y="3017520"/>
+            <a:ext cx="2514600" cy="1463040"/>
+          </a:xfrm>
+          <a:prstGeom prst="roundRect">
+            <a:avLst>
+              <a:gd name="adj" fmla="val 7500"/>
+            </a:avLst>
           </a:prstGeom>
           <a:solidFill>
-            <a:srgbClr val="D03B3B"/>
+            <a:schemeClr val="bg2"/>
           </a:solidFill>
           <a:ln/>
         </p:spPr>
       </p:sp>
-      <p:pic>
-        <p:nvPicPr>
-          <p:cNvPr id="10" name="FaRocket icon" descr="preencoded.png">    </p:cNvPr>
-          <p:cNvPicPr>
-            <a:picLocks noChangeAspect="1"/>
-          </p:cNvPicPr>
-          <p:nvPr/>
-        </p:nvPicPr>
-        <p:blipFill>
-          <a:blip r:embed="rId2"/>
-          <a:stretch>
-            <a:fillRect/>
-          </a:stretch>
-        </p:blipFill>
-        <p:spPr>
-          <a:xfrm>
-            <a:off x="6656832" y="1737360"/>
-            <a:ext cx="274320" cy="274320"/>
-          </a:xfrm>
-          <a:prstGeom prst="rect">
-            <a:avLst/>
-          </a:prstGeom>
-        </p:spPr>
-      </p:pic>
-      <p:sp>
-        <p:nvSpPr>
-          <p:cNvPr id="11" name="Text 7"/>
+      <p:sp>
+        <p:nvSpPr>
+          <p:cNvPr id="10" name="Text 8"/>
           <p:cNvSpPr txBox="1"/>
           <p:nvPr/>
         </p:nvSpPr>
         <p:spPr>
           <a:xfrm>
-            <a:off x="7251192" y="1673352"/>
-            <a:ext cx="4114800" cy="411480"/>
+            <a:off x="777240" y="3154680"/>
+            <a:ext cx="2103120" cy="731520"/>
           </a:xfrm>
           <a:prstGeom prst="rect">
             <a:avLst/>
@@ -12475,27 +13670,30 @@
               <a:buNone/>
             </a:pPr>
             <a:r>
-              <a:rPr lang="en-US" sz="2000" b="1" dirty="0">
-                <a:solidFill>
-                  <a:schemeClr val="bg1"/>
-                </a:solidFill>
-              </a:rPr>
-              <a:t>Future scope</a:t>
-            </a:r>
-            <a:endParaRPr lang="en-US" sz="2000" dirty="0"/>
-          </a:p>
-        </p:txBody>
-      </p:sp>
-      <p:sp>
-        <p:nvSpPr>
-          <p:cNvPr id="12" name="Text 8"/>
+              <a:rPr lang="en-US" sz="3800" b="1" dirty="0">
+                <a:solidFill>
+                  <a:schemeClr val="tx2"/>
+                </a:solidFill>
+                <a:latin typeface="Arial" pitchFamily="34" charset="0"/>
+                <a:ea typeface="Arial" pitchFamily="34" charset="-122"/>
+                <a:cs typeface="Arial" pitchFamily="34" charset="-120"/>
+              </a:rPr>
+              <a:t>0</a:t>
+            </a:r>
+            <a:endParaRPr lang="en-US" sz="3800" dirty="0"/>
+          </a:p>
+        </p:txBody>
+      </p:sp>
+      <p:sp>
+        <p:nvSpPr>
+          <p:cNvPr id="11" name="Text 9"/>
           <p:cNvSpPr txBox="1"/>
           <p:nvPr/>
         </p:nvSpPr>
         <p:spPr>
           <a:xfrm>
-            <a:off x="6519672" y="2423160"/>
-            <a:ext cx="4846320" cy="3291840"/>
+            <a:off x="777240" y="3886200"/>
+            <a:ext cx="2103120" cy="502920"/>
           </a:xfrm>
           <a:prstGeom prst="rect">
             <a:avLst/>
@@ -12507,94 +13705,361 @@
           <a:bodyPr wrap="square" lIns="0" tIns="0" rIns="0" bIns="0" rtlCol="0" anchor="t"/>
           <a:lstStyle/>
           <a:p>
-            <a:pPr marL="342900" indent="-342900">
-              <a:spcAft>
-                <a:spcPts val="1600"/>
-              </a:spcAft>
-              <a:buSzPct val="100000"/>
-              <a:buChar char="•"/>
-            </a:pPr>
-            <a:r>
-              <a:rPr lang="en-US" sz="1800" dirty="0">
-                <a:solidFill>
-                  <a:schemeClr val="bg1"/>
-                </a:solidFill>
-              </a:rPr>
-              <a:t>Larger real-world dataset; compare SVM, logistic regression, transformers</a:t>
-            </a:r>
-            <a:endParaRPr lang="en-US" sz="1800" dirty="0"/>
-          </a:p>
-          <a:p>
-            <a:pPr marL="342900" indent="-342900">
-              <a:spcAft>
-                <a:spcPts val="1600"/>
-              </a:spcAft>
-              <a:buSzPct val="100000"/>
-              <a:buChar char="•"/>
-            </a:pPr>
-            <a:r>
-              <a:rPr lang="en-US" sz="1800" dirty="0">
-                <a:solidFill>
-                  <a:schemeClr val="bg1"/>
-                </a:solidFill>
-              </a:rPr>
-              <a:t>Automatic Jira / GitHub Issues tickets</a:t>
-            </a:r>
-            <a:endParaRPr lang="en-US" sz="1800" dirty="0"/>
-          </a:p>
-          <a:p>
-            <a:pPr marL="342900" indent="-342900">
-              <a:spcAft>
-                <a:spcPts val="1600"/>
-              </a:spcAft>
-              <a:buSzPct val="100000"/>
-              <a:buChar char="•"/>
-            </a:pPr>
-            <a:r>
-              <a:rPr lang="en-US" sz="1800" dirty="0">
-                <a:solidFill>
-                  <a:schemeClr val="bg1"/>
-                </a:solidFill>
-              </a:rPr>
-              <a:t>Slack / Teams notifications</a:t>
-            </a:r>
-            <a:endParaRPr lang="en-US" sz="1800" dirty="0"/>
-          </a:p>
-          <a:p>
-            <a:pPr marL="342900" indent="-342900">
-              <a:spcAft>
-                <a:spcPts val="1600"/>
-              </a:spcAft>
-              <a:buSzPct val="100000"/>
-              <a:buChar char="•"/>
-            </a:pPr>
-            <a:r>
-              <a:rPr lang="en-US" sz="1800" dirty="0">
-                <a:solidFill>
-                  <a:schemeClr val="bg1"/>
-                </a:solidFill>
-              </a:rPr>
-              <a:t>CI/CD integration (GitHub Actions)</a:t>
-            </a:r>
-            <a:endParaRPr lang="en-US" sz="1800" dirty="0"/>
-          </a:p>
-          <a:p>
-            <a:pPr marL="342900" indent="-342900">
-              <a:spcAft>
-                <a:spcPts val="1600"/>
-              </a:spcAft>
-              <a:buSzPct val="100000"/>
-              <a:buChar char="•"/>
-            </a:pPr>
-            <a:r>
-              <a:rPr lang="en-US" sz="1800" dirty="0">
-                <a:solidFill>
-                  <a:schemeClr val="bg1"/>
-                </a:solidFill>
-              </a:rPr>
-              <a:t>Clustering similar failures for root cause</a:t>
-            </a:r>
-            <a:endParaRPr lang="en-US" sz="1800" dirty="0"/>
+            <a:pPr indent="0" marL="0">
+              <a:buNone/>
+            </a:pPr>
+            <a:r>
+              <a:rPr lang="en-US" sz="1400" dirty="0">
+                <a:solidFill>
+                  <a:schemeClr val="tx1"/>
+                </a:solidFill>
+              </a:rPr>
+              <a:t>manual bug reports written</a:t>
+            </a:r>
+            <a:endParaRPr lang="en-US" sz="1400" dirty="0"/>
+          </a:p>
+        </p:txBody>
+      </p:sp>
+      <p:sp>
+        <p:nvSpPr>
+          <p:cNvPr id="12" name="result severities predicted correctly"/>
+          <p:cNvSpPr/>
+          <p:nvPr/>
+        </p:nvSpPr>
+        <p:spPr>
+          <a:xfrm>
+            <a:off x="3246120" y="3017520"/>
+            <a:ext cx="2514600" cy="1463040"/>
+          </a:xfrm>
+          <a:prstGeom prst="roundRect">
+            <a:avLst>
+              <a:gd name="adj" fmla="val 7500"/>
+            </a:avLst>
+          </a:prstGeom>
+          <a:solidFill>
+            <a:schemeClr val="bg2"/>
+          </a:solidFill>
+          <a:ln/>
+        </p:spPr>
+      </p:sp>
+      <p:sp>
+        <p:nvSpPr>
+          <p:cNvPr id="13" name="Text 11"/>
+          <p:cNvSpPr txBox="1"/>
+          <p:nvPr/>
+        </p:nvSpPr>
+        <p:spPr>
+          <a:xfrm>
+            <a:off x="3474720" y="3154680"/>
+            <a:ext cx="2103120" cy="731520"/>
+          </a:xfrm>
+          <a:prstGeom prst="rect">
+            <a:avLst/>
+          </a:prstGeom>
+          <a:noFill/>
+          <a:ln/>
+        </p:spPr>
+        <p:txBody>
+          <a:bodyPr wrap="square" lIns="0" tIns="0" rIns="0" bIns="0" rtlCol="0" anchor="t"/>
+          <a:lstStyle/>
+          <a:p>
+            <a:pPr indent="0" marL="0">
+              <a:buNone/>
+            </a:pPr>
+            <a:r>
+              <a:rPr lang="en-US" sz="3800" b="1" dirty="0">
+                <a:solidFill>
+                  <a:schemeClr val="tx2"/>
+                </a:solidFill>
+                <a:latin typeface="Arial" pitchFamily="34" charset="0"/>
+                <a:ea typeface="Arial" pitchFamily="34" charset="-122"/>
+                <a:cs typeface="Arial" pitchFamily="34" charset="-120"/>
+              </a:rPr>
+              <a:t>13/13</a:t>
+            </a:r>
+            <a:endParaRPr lang="en-US" sz="3800" dirty="0"/>
+          </a:p>
+        </p:txBody>
+      </p:sp>
+      <p:sp>
+        <p:nvSpPr>
+          <p:cNvPr id="14" name="Text 12"/>
+          <p:cNvSpPr txBox="1"/>
+          <p:nvPr/>
+        </p:nvSpPr>
+        <p:spPr>
+          <a:xfrm>
+            <a:off x="3474720" y="3886200"/>
+            <a:ext cx="2103120" cy="502920"/>
+          </a:xfrm>
+          <a:prstGeom prst="rect">
+            <a:avLst/>
+          </a:prstGeom>
+          <a:noFill/>
+          <a:ln/>
+        </p:spPr>
+        <p:txBody>
+          <a:bodyPr wrap="square" lIns="0" tIns="0" rIns="0" bIns="0" rtlCol="0" anchor="t"/>
+          <a:lstStyle/>
+          <a:p>
+            <a:pPr indent="0" marL="0">
+              <a:buNone/>
+            </a:pPr>
+            <a:r>
+              <a:rPr lang="en-US" sz="1400" dirty="0">
+                <a:solidFill>
+                  <a:schemeClr val="tx1"/>
+                </a:solidFill>
+              </a:rPr>
+              <a:t>severities predicted correctly</a:t>
+            </a:r>
+            <a:endParaRPr lang="en-US" sz="1400" dirty="0"/>
+          </a:p>
+        </p:txBody>
+      </p:sp>
+      <p:sp>
+        <p:nvSpPr>
+          <p:cNvPr id="15" name="result flaky tests detected"/>
+          <p:cNvSpPr/>
+          <p:nvPr/>
+        </p:nvSpPr>
+        <p:spPr>
+          <a:xfrm>
+            <a:off x="548640" y="4663440"/>
+            <a:ext cx="2514600" cy="1463040"/>
+          </a:xfrm>
+          <a:prstGeom prst="roundRect">
+            <a:avLst>
+              <a:gd name="adj" fmla="val 7500"/>
+            </a:avLst>
+          </a:prstGeom>
+          <a:solidFill>
+            <a:schemeClr val="bg2"/>
+          </a:solidFill>
+          <a:ln/>
+        </p:spPr>
+      </p:sp>
+      <p:sp>
+        <p:nvSpPr>
+          <p:cNvPr id="16" name="Text 14"/>
+          <p:cNvSpPr txBox="1"/>
+          <p:nvPr/>
+        </p:nvSpPr>
+        <p:spPr>
+          <a:xfrm>
+            <a:off x="777240" y="4800600"/>
+            <a:ext cx="2103120" cy="731520"/>
+          </a:xfrm>
+          <a:prstGeom prst="rect">
+            <a:avLst/>
+          </a:prstGeom>
+          <a:noFill/>
+          <a:ln/>
+        </p:spPr>
+        <p:txBody>
+          <a:bodyPr wrap="square" lIns="0" tIns="0" rIns="0" bIns="0" rtlCol="0" anchor="t"/>
+          <a:lstStyle/>
+          <a:p>
+            <a:pPr indent="0" marL="0">
+              <a:buNone/>
+            </a:pPr>
+            <a:r>
+              <a:rPr lang="en-US" sz="3800" b="1" dirty="0">
+                <a:solidFill>
+                  <a:schemeClr val="tx2"/>
+                </a:solidFill>
+                <a:latin typeface="Arial" pitchFamily="34" charset="0"/>
+                <a:ea typeface="Arial" pitchFamily="34" charset="-122"/>
+                <a:cs typeface="Arial" pitchFamily="34" charset="-120"/>
+              </a:rPr>
+              <a:t>2</a:t>
+            </a:r>
+            <a:endParaRPr lang="en-US" sz="3800" dirty="0"/>
+          </a:p>
+        </p:txBody>
+      </p:sp>
+      <p:sp>
+        <p:nvSpPr>
+          <p:cNvPr id="17" name="Text 15"/>
+          <p:cNvSpPr txBox="1"/>
+          <p:nvPr/>
+        </p:nvSpPr>
+        <p:spPr>
+          <a:xfrm>
+            <a:off x="777240" y="5532120"/>
+            <a:ext cx="2103120" cy="502920"/>
+          </a:xfrm>
+          <a:prstGeom prst="rect">
+            <a:avLst/>
+          </a:prstGeom>
+          <a:noFill/>
+          <a:ln/>
+        </p:spPr>
+        <p:txBody>
+          <a:bodyPr wrap="square" lIns="0" tIns="0" rIns="0" bIns="0" rtlCol="0" anchor="t"/>
+          <a:lstStyle/>
+          <a:p>
+            <a:pPr indent="0" marL="0">
+              <a:buNone/>
+            </a:pPr>
+            <a:r>
+              <a:rPr lang="en-US" sz="1400" dirty="0">
+                <a:solidFill>
+                  <a:schemeClr val="tx1"/>
+                </a:solidFill>
+              </a:rPr>
+              <a:t>flaky tests detected</a:t>
+            </a:r>
+            <a:endParaRPr lang="en-US" sz="1400" dirty="0"/>
+          </a:p>
+        </p:txBody>
+      </p:sp>
+      <p:sp>
+        <p:nvSpPr>
+          <p:cNvPr id="18" name="result Critical alerts generated"/>
+          <p:cNvSpPr/>
+          <p:nvPr/>
+        </p:nvSpPr>
+        <p:spPr>
+          <a:xfrm>
+            <a:off x="3246120" y="4663440"/>
+            <a:ext cx="2514600" cy="1463040"/>
+          </a:xfrm>
+          <a:prstGeom prst="roundRect">
+            <a:avLst>
+              <a:gd name="adj" fmla="val 7500"/>
+            </a:avLst>
+          </a:prstGeom>
+          <a:solidFill>
+            <a:schemeClr val="bg2"/>
+          </a:solidFill>
+          <a:ln/>
+        </p:spPr>
+      </p:sp>
+      <p:sp>
+        <p:nvSpPr>
+          <p:cNvPr id="19" name="Text 17"/>
+          <p:cNvSpPr txBox="1"/>
+          <p:nvPr/>
+        </p:nvSpPr>
+        <p:spPr>
+          <a:xfrm>
+            <a:off x="3474720" y="4800600"/>
+            <a:ext cx="2103120" cy="731520"/>
+          </a:xfrm>
+          <a:prstGeom prst="rect">
+            <a:avLst/>
+          </a:prstGeom>
+          <a:noFill/>
+          <a:ln/>
+        </p:spPr>
+        <p:txBody>
+          <a:bodyPr wrap="square" lIns="0" tIns="0" rIns="0" bIns="0" rtlCol="0" anchor="t"/>
+          <a:lstStyle/>
+          <a:p>
+            <a:pPr indent="0" marL="0">
+              <a:buNone/>
+            </a:pPr>
+            <a:r>
+              <a:rPr lang="en-US" sz="3800" b="1" dirty="0">
+                <a:solidFill>
+                  <a:schemeClr val="tx2"/>
+                </a:solidFill>
+                <a:latin typeface="Arial" pitchFamily="34" charset="0"/>
+                <a:ea typeface="Arial" pitchFamily="34" charset="-122"/>
+                <a:cs typeface="Arial" pitchFamily="34" charset="-120"/>
+              </a:rPr>
+              <a:t>4</a:t>
+            </a:r>
+            <a:endParaRPr lang="en-US" sz="3800" dirty="0"/>
+          </a:p>
+        </p:txBody>
+      </p:sp>
+      <p:sp>
+        <p:nvSpPr>
+          <p:cNvPr id="20" name="Text 18"/>
+          <p:cNvSpPr txBox="1"/>
+          <p:nvPr/>
+        </p:nvSpPr>
+        <p:spPr>
+          <a:xfrm>
+            <a:off x="3474720" y="5532120"/>
+            <a:ext cx="2103120" cy="502920"/>
+          </a:xfrm>
+          <a:prstGeom prst="rect">
+            <a:avLst/>
+          </a:prstGeom>
+          <a:noFill/>
+          <a:ln/>
+        </p:spPr>
+        <p:txBody>
+          <a:bodyPr wrap="square" lIns="0" tIns="0" rIns="0" bIns="0" rtlCol="0" anchor="t"/>
+          <a:lstStyle/>
+          <a:p>
+            <a:pPr indent="0" marL="0">
+              <a:buNone/>
+            </a:pPr>
+            <a:r>
+              <a:rPr lang="en-US" sz="1400" dirty="0">
+                <a:solidFill>
+                  <a:schemeClr val="tx1"/>
+                </a:solidFill>
+              </a:rPr>
+              <a:t>Critical alerts generated</a:t>
+            </a:r>
+            <a:endParaRPr lang="en-US" sz="1400" dirty="0"/>
+          </a:p>
+        </p:txBody>
+      </p:sp>
+      <p:graphicFrame>
+        <p:nvGraphicFramePr>
+          <p:cNvPr id="21" name="runs chart" descr=""/>
+          <p:cNvGraphicFramePr/>
+          <p:nvPr/>
+        </p:nvGraphicFramePr>
+        <p:xfrm>
+          <a:off x="6035040" y="1371600"/>
+          <a:ext cx="5605272" cy="4023360"/>
+        </p:xfrm>
+        <a:graphic xmlns:a="http://schemas.openxmlformats.org/drawingml/2006/main">
+          <a:graphicData uri="http://schemas.openxmlformats.org/drawingml/2006/chart">
+            <c:chart xmlns:c="http://schemas.openxmlformats.org/drawingml/2006/chart" r:id="rId1"/>
+          </a:graphicData>
+        </a:graphic>
+      </p:graphicFrame>
+      <p:sp>
+        <p:nvSpPr>
+          <p:cNvPr id="22" name="Text 19"/>
+          <p:cNvSpPr txBox="1"/>
+          <p:nvPr/>
+        </p:nvSpPr>
+        <p:spPr>
+          <a:xfrm>
+            <a:off x="6035040" y="5532120"/>
+            <a:ext cx="5605272" cy="548640"/>
+          </a:xfrm>
+          <a:prstGeom prst="rect">
+            <a:avLst/>
+          </a:prstGeom>
+          <a:noFill/>
+          <a:ln/>
+        </p:spPr>
+        <p:txBody>
+          <a:bodyPr wrap="square" lIns="0" tIns="0" rIns="0" bIns="0" rtlCol="0" anchor="t"/>
+          <a:lstStyle/>
+          <a:p>
+            <a:pPr indent="0" marL="0">
+              <a:buNone/>
+            </a:pPr>
+            <a:r>
+              <a:rPr lang="en-US" sz="1400" i="1" dirty="0">
+                <a:solidFill>
+                  <a:srgbClr val="5B6472"/>
+                </a:solidFill>
+              </a:rPr>
+              <a:t>Failures vary between 9 and 10 per run only because of the 2 flaky tests</a:t>
+            </a:r>
+            <a:endParaRPr lang="en-US" sz="1400" dirty="0"/>
           </a:p>
         </p:txBody>
       </p:sp>
@@ -12654,6 +14119,560 @@
 <file path=ppt/slides/slide18.xml><?xml version="1.0" encoding="utf-8"?>
 <p:sld xmlns:a="http://schemas.openxmlformats.org/drawingml/2006/main" xmlns:r="http://schemas.openxmlformats.org/officeDocument/2006/relationships" xmlns:p="http://schemas.openxmlformats.org/presentationml/2006/main">
   <p:cSld name="Slide 18">
+    <p:spTree>
+      <p:nvGrpSpPr>
+        <p:cNvPr id="1" name=""/>
+        <p:cNvGrpSpPr/>
+        <p:nvPr/>
+      </p:nvGrpSpPr>
+      <p:grpSpPr>
+        <a:xfrm>
+          <a:off x="0" y="0"/>
+          <a:ext cx="0" cy="0"/>
+          <a:chOff x="0" y="0"/>
+          <a:chExt cx="0" cy="0"/>
+        </a:xfrm>
+      </p:grpSpPr>
+      <p:sp>
+        <p:nvSpPr>
+          <p:cNvPr id="2" name="Text 0"/>
+          <p:cNvSpPr/>
+          <p:nvPr>
+            <p:ph idx="100" type="title" hasCustomPrompt="1"/>
+          </p:nvPr>
+        </p:nvSpPr>
+        <p:spPr>
+          <a:xfrm>
+            <a:off x="548640" y="320040"/>
+            <a:ext cx="11064240" cy="777240"/>
+          </a:xfrm>
+          <a:prstGeom prst="rect">
+            <a:avLst/>
+          </a:prstGeom>
+          <a:noFill/>
+          <a:ln/>
+        </p:spPr>
+        <p:txBody>
+          <a:bodyPr wrap="square" lIns="0" tIns="0" rIns="0" bIns="0" rtlCol="0" anchor="ctr"/>
+          <a:lstStyle/>
+          <a:p>
+            <a:pPr algn="l" indent="0" marL="0">
+              <a:buNone/>
+            </a:pPr>
+            <a:r>
+              <a:rPr lang="en-US" sz="3000" b="1" dirty="0">
+                <a:solidFill>
+                  <a:schemeClr val="tx2"/>
+                </a:solidFill>
+              </a:rPr>
+              <a:t>Conclusion and future scope</a:t>
+            </a:r>
+            <a:endParaRPr lang="en-US" sz="3000" dirty="0"/>
+          </a:p>
+        </p:txBody>
+      </p:sp>
+      <p:sp>
+        <p:nvSpPr>
+          <p:cNvPr id="3" name="conclusion card"/>
+          <p:cNvSpPr/>
+          <p:nvPr/>
+        </p:nvSpPr>
+        <p:spPr>
+          <a:xfrm>
+            <a:off x="548640" y="1371600"/>
+            <a:ext cx="5394960" cy="4480560"/>
+          </a:xfrm>
+          <a:prstGeom prst="roundRect">
+            <a:avLst>
+              <a:gd name="adj" fmla="val 2449"/>
+            </a:avLst>
+          </a:prstGeom>
+          <a:solidFill>
+            <a:schemeClr val="bg2"/>
+          </a:solidFill>
+          <a:ln/>
+        </p:spPr>
+      </p:sp>
+      <p:sp>
+        <p:nvSpPr>
+          <p:cNvPr id="4" name="icon circle"/>
+          <p:cNvSpPr/>
+          <p:nvPr/>
+        </p:nvSpPr>
+        <p:spPr>
+          <a:xfrm>
+            <a:off x="822960" y="1600200"/>
+            <a:ext cx="548640" cy="548640"/>
+          </a:xfrm>
+          <a:prstGeom prst="ellipse">
+            <a:avLst/>
+          </a:prstGeom>
+          <a:solidFill>
+            <a:srgbClr val="1B8E4E"/>
+          </a:solidFill>
+          <a:ln/>
+        </p:spPr>
+      </p:sp>
+      <p:pic>
+        <p:nvPicPr>
+          <p:cNvPr id="5" name="FaCheckCircle icon" descr="preencoded.png">    </p:cNvPr>
+          <p:cNvPicPr>
+            <a:picLocks noChangeAspect="1"/>
+          </p:cNvPicPr>
+          <p:nvPr/>
+        </p:nvPicPr>
+        <p:blipFill>
+          <a:blip r:embed="rId1"/>
+          <a:stretch>
+            <a:fillRect/>
+          </a:stretch>
+        </p:blipFill>
+        <p:spPr>
+          <a:xfrm>
+            <a:off x="960120" y="1737360"/>
+            <a:ext cx="274320" cy="274320"/>
+          </a:xfrm>
+          <a:prstGeom prst="rect">
+            <a:avLst/>
+          </a:prstGeom>
+        </p:spPr>
+      </p:pic>
+      <p:sp>
+        <p:nvSpPr>
+          <p:cNvPr id="6" name="Text 3"/>
+          <p:cNvSpPr txBox="1"/>
+          <p:nvPr/>
+        </p:nvSpPr>
+        <p:spPr>
+          <a:xfrm>
+            <a:off x="1554480" y="1673352"/>
+            <a:ext cx="4114800" cy="411480"/>
+          </a:xfrm>
+          <a:prstGeom prst="rect">
+            <a:avLst/>
+          </a:prstGeom>
+          <a:noFill/>
+          <a:ln/>
+        </p:spPr>
+        <p:txBody>
+          <a:bodyPr wrap="square" lIns="0" tIns="0" rIns="0" bIns="0" rtlCol="0" anchor="t"/>
+          <a:lstStyle/>
+          <a:p>
+            <a:pPr indent="0" marL="0">
+              <a:buNone/>
+            </a:pPr>
+            <a:r>
+              <a:rPr lang="en-US" sz="2000" b="1" dirty="0">
+                <a:solidFill>
+                  <a:schemeClr val="tx2"/>
+                </a:solidFill>
+              </a:rPr>
+              <a:t>Conclusion</a:t>
+            </a:r>
+            <a:endParaRPr lang="en-US" sz="2000" dirty="0"/>
+          </a:p>
+        </p:txBody>
+      </p:sp>
+      <p:sp>
+        <p:nvSpPr>
+          <p:cNvPr id="7" name="Text 4"/>
+          <p:cNvSpPr txBox="1"/>
+          <p:nvPr/>
+        </p:nvSpPr>
+        <p:spPr>
+          <a:xfrm>
+            <a:off x="822960" y="2423160"/>
+            <a:ext cx="4846320" cy="3291840"/>
+          </a:xfrm>
+          <a:prstGeom prst="rect">
+            <a:avLst/>
+          </a:prstGeom>
+          <a:noFill/>
+          <a:ln/>
+        </p:spPr>
+        <p:txBody>
+          <a:bodyPr wrap="square" lIns="0" tIns="0" rIns="0" bIns="0" rtlCol="0" anchor="t"/>
+          <a:lstStyle/>
+          <a:p>
+            <a:pPr marL="342900" indent="-342900">
+              <a:spcAft>
+                <a:spcPts val="1200"/>
+              </a:spcAft>
+              <a:buSzPct val="100000"/>
+              <a:buChar char="•"/>
+            </a:pPr>
+            <a:r>
+              <a:rPr lang="en-US" sz="1800" dirty="0">
+                <a:solidFill>
+                  <a:schemeClr val="tx1"/>
+                </a:solidFill>
+              </a:rPr>
+              <a:t>All 8 objectives implemented and verified</a:t>
+            </a:r>
+            <a:endParaRPr lang="en-US" sz="1800" dirty="0"/>
+          </a:p>
+          <a:p>
+            <a:pPr marL="342900" indent="-342900">
+              <a:spcAft>
+                <a:spcPts val="1200"/>
+              </a:spcAft>
+              <a:buSzPct val="100000"/>
+              <a:buChar char="•"/>
+            </a:pPr>
+            <a:r>
+              <a:rPr lang="en-US" sz="1800" dirty="0">
+                <a:solidFill>
+                  <a:schemeClr val="tx1"/>
+                </a:solidFill>
+              </a:rPr>
+              <a:t>Bug reporting fully automated: zero manual effort</a:t>
+            </a:r>
+            <a:endParaRPr lang="en-US" sz="1800" dirty="0"/>
+          </a:p>
+          <a:p>
+            <a:pPr marL="342900" indent="-342900">
+              <a:spcAft>
+                <a:spcPts val="1200"/>
+              </a:spcAft>
+              <a:buSzPct val="100000"/>
+              <a:buChar char="•"/>
+            </a:pPr>
+            <a:r>
+              <a:rPr lang="en-US" sz="1800" dirty="0">
+                <a:solidFill>
+                  <a:schemeClr val="tx1"/>
+                </a:solidFill>
+              </a:rPr>
+              <a:t>ML severity: 87.2% cross-validated accuracy</a:t>
+            </a:r>
+            <a:endParaRPr lang="en-US" sz="1800" dirty="0"/>
+          </a:p>
+          <a:p>
+            <a:pPr marL="342900" indent="-342900">
+              <a:spcAft>
+                <a:spcPts val="1200"/>
+              </a:spcAft>
+              <a:buSzPct val="100000"/>
+              <a:buChar char="•"/>
+            </a:pPr>
+            <a:r>
+              <a:rPr lang="en-US" sz="1800" dirty="0">
+                <a:solidFill>
+                  <a:schemeClr val="tx1"/>
+                </a:solidFill>
+              </a:rPr>
+              <a:t>Flaky tests separated from real defects</a:t>
+            </a:r>
+            <a:endParaRPr lang="en-US" sz="1800" dirty="0"/>
+          </a:p>
+          <a:p>
+            <a:pPr marL="342900" indent="-342900">
+              <a:spcAft>
+                <a:spcPts val="1200"/>
+              </a:spcAft>
+              <a:buSzPct val="100000"/>
+              <a:buChar char="•"/>
+            </a:pPr>
+            <a:r>
+              <a:rPr lang="en-US" sz="1800" dirty="0">
+                <a:solidFill>
+                  <a:schemeClr val="tx1"/>
+                </a:solidFill>
+              </a:rPr>
+              <a:t>Broken links found across the whole website</a:t>
+            </a:r>
+            <a:endParaRPr lang="en-US" sz="1800" dirty="0"/>
+          </a:p>
+          <a:p>
+            <a:pPr marL="342900" indent="-342900">
+              <a:spcAft>
+                <a:spcPts val="1200"/>
+              </a:spcAft>
+              <a:buSzPct val="100000"/>
+              <a:buChar char="•"/>
+            </a:pPr>
+            <a:r>
+              <a:rPr lang="en-US" sz="1800" dirty="0">
+                <a:solidFill>
+                  <a:schemeClr val="tx1"/>
+                </a:solidFill>
+              </a:rPr>
+              <a:t>Every bug traceable from test to resolution</a:t>
+            </a:r>
+            <a:endParaRPr lang="en-US" sz="1800" dirty="0"/>
+          </a:p>
+        </p:txBody>
+      </p:sp>
+      <p:sp>
+        <p:nvSpPr>
+          <p:cNvPr id="8" name="future scope card"/>
+          <p:cNvSpPr/>
+          <p:nvPr/>
+        </p:nvSpPr>
+        <p:spPr>
+          <a:xfrm>
+            <a:off x="6245352" y="1371600"/>
+            <a:ext cx="5394960" cy="4480560"/>
+          </a:xfrm>
+          <a:prstGeom prst="roundRect">
+            <a:avLst>
+              <a:gd name="adj" fmla="val 2449"/>
+            </a:avLst>
+          </a:prstGeom>
+          <a:solidFill>
+            <a:srgbClr val="10243F"/>
+          </a:solidFill>
+          <a:ln/>
+        </p:spPr>
+      </p:sp>
+      <p:sp>
+        <p:nvSpPr>
+          <p:cNvPr id="9" name="icon circle"/>
+          <p:cNvSpPr/>
+          <p:nvPr/>
+        </p:nvSpPr>
+        <p:spPr>
+          <a:xfrm>
+            <a:off x="6519672" y="1600200"/>
+            <a:ext cx="548640" cy="548640"/>
+          </a:xfrm>
+          <a:prstGeom prst="ellipse">
+            <a:avLst/>
+          </a:prstGeom>
+          <a:solidFill>
+            <a:srgbClr val="D03B3B"/>
+          </a:solidFill>
+          <a:ln/>
+        </p:spPr>
+      </p:sp>
+      <p:pic>
+        <p:nvPicPr>
+          <p:cNvPr id="10" name="FaRocket icon" descr="preencoded.png">    </p:cNvPr>
+          <p:cNvPicPr>
+            <a:picLocks noChangeAspect="1"/>
+          </p:cNvPicPr>
+          <p:nvPr/>
+        </p:nvPicPr>
+        <p:blipFill>
+          <a:blip r:embed="rId2"/>
+          <a:stretch>
+            <a:fillRect/>
+          </a:stretch>
+        </p:blipFill>
+        <p:spPr>
+          <a:xfrm>
+            <a:off x="6656832" y="1737360"/>
+            <a:ext cx="274320" cy="274320"/>
+          </a:xfrm>
+          <a:prstGeom prst="rect">
+            <a:avLst/>
+          </a:prstGeom>
+        </p:spPr>
+      </p:pic>
+      <p:sp>
+        <p:nvSpPr>
+          <p:cNvPr id="11" name="Text 7"/>
+          <p:cNvSpPr txBox="1"/>
+          <p:nvPr/>
+        </p:nvSpPr>
+        <p:spPr>
+          <a:xfrm>
+            <a:off x="7251192" y="1673352"/>
+            <a:ext cx="4114800" cy="411480"/>
+          </a:xfrm>
+          <a:prstGeom prst="rect">
+            <a:avLst/>
+          </a:prstGeom>
+          <a:noFill/>
+          <a:ln/>
+        </p:spPr>
+        <p:txBody>
+          <a:bodyPr wrap="square" lIns="0" tIns="0" rIns="0" bIns="0" rtlCol="0" anchor="t"/>
+          <a:lstStyle/>
+          <a:p>
+            <a:pPr indent="0" marL="0">
+              <a:buNone/>
+            </a:pPr>
+            <a:r>
+              <a:rPr lang="en-US" sz="2000" b="1" dirty="0">
+                <a:solidFill>
+                  <a:schemeClr val="bg1"/>
+                </a:solidFill>
+              </a:rPr>
+              <a:t>Future scope</a:t>
+            </a:r>
+            <a:endParaRPr lang="en-US" sz="2000" dirty="0"/>
+          </a:p>
+        </p:txBody>
+      </p:sp>
+      <p:sp>
+        <p:nvSpPr>
+          <p:cNvPr id="12" name="Text 8"/>
+          <p:cNvSpPr txBox="1"/>
+          <p:nvPr/>
+        </p:nvSpPr>
+        <p:spPr>
+          <a:xfrm>
+            <a:off x="6519672" y="2423160"/>
+            <a:ext cx="4846320" cy="3291840"/>
+          </a:xfrm>
+          <a:prstGeom prst="rect">
+            <a:avLst/>
+          </a:prstGeom>
+          <a:noFill/>
+          <a:ln/>
+        </p:spPr>
+        <p:txBody>
+          <a:bodyPr wrap="square" lIns="0" tIns="0" rIns="0" bIns="0" rtlCol="0" anchor="t"/>
+          <a:lstStyle/>
+          <a:p>
+            <a:pPr marL="342900" indent="-342900">
+              <a:spcAft>
+                <a:spcPts val="1600"/>
+              </a:spcAft>
+              <a:buSzPct val="100000"/>
+              <a:buChar char="•"/>
+            </a:pPr>
+            <a:r>
+              <a:rPr lang="en-US" sz="1800" dirty="0">
+                <a:solidFill>
+                  <a:schemeClr val="bg1"/>
+                </a:solidFill>
+              </a:rPr>
+              <a:t>Larger real-world dataset; compare SVM, logistic regression, transformers</a:t>
+            </a:r>
+            <a:endParaRPr lang="en-US" sz="1800" dirty="0"/>
+          </a:p>
+          <a:p>
+            <a:pPr marL="342900" indent="-342900">
+              <a:spcAft>
+                <a:spcPts val="1600"/>
+              </a:spcAft>
+              <a:buSzPct val="100000"/>
+              <a:buChar char="•"/>
+            </a:pPr>
+            <a:r>
+              <a:rPr lang="en-US" sz="1800" dirty="0">
+                <a:solidFill>
+                  <a:schemeClr val="bg1"/>
+                </a:solidFill>
+              </a:rPr>
+              <a:t>Automatic Jira / GitHub Issues tickets</a:t>
+            </a:r>
+            <a:endParaRPr lang="en-US" sz="1800" dirty="0"/>
+          </a:p>
+          <a:p>
+            <a:pPr marL="342900" indent="-342900">
+              <a:spcAft>
+                <a:spcPts val="1600"/>
+              </a:spcAft>
+              <a:buSzPct val="100000"/>
+              <a:buChar char="•"/>
+            </a:pPr>
+            <a:r>
+              <a:rPr lang="en-US" sz="1800" dirty="0">
+                <a:solidFill>
+                  <a:schemeClr val="bg1"/>
+                </a:solidFill>
+              </a:rPr>
+              <a:t>Slack / Teams notifications</a:t>
+            </a:r>
+            <a:endParaRPr lang="en-US" sz="1800" dirty="0"/>
+          </a:p>
+          <a:p>
+            <a:pPr marL="342900" indent="-342900">
+              <a:spcAft>
+                <a:spcPts val="1600"/>
+              </a:spcAft>
+              <a:buSzPct val="100000"/>
+              <a:buChar char="•"/>
+            </a:pPr>
+            <a:r>
+              <a:rPr lang="en-US" sz="1800" dirty="0">
+                <a:solidFill>
+                  <a:schemeClr val="bg1"/>
+                </a:solidFill>
+              </a:rPr>
+              <a:t>CI/CD integration (GitHub Actions)</a:t>
+            </a:r>
+            <a:endParaRPr lang="en-US" sz="1800" dirty="0"/>
+          </a:p>
+          <a:p>
+            <a:pPr marL="342900" indent="-342900">
+              <a:spcAft>
+                <a:spcPts val="1600"/>
+              </a:spcAft>
+              <a:buSzPct val="100000"/>
+              <a:buChar char="•"/>
+            </a:pPr>
+            <a:r>
+              <a:rPr lang="en-US" sz="1800" dirty="0">
+                <a:solidFill>
+                  <a:schemeClr val="bg1"/>
+                </a:solidFill>
+              </a:rPr>
+              <a:t>Clustering similar failures for root cause</a:t>
+            </a:r>
+            <a:endParaRPr lang="en-US" sz="1800" dirty="0"/>
+          </a:p>
+        </p:txBody>
+      </p:sp>
+      <p:sp>
+        <p:nvSpPr>
+          <p:cNvPr id="25" name="Slide Number Placeholder 0"/>
+          <p:cNvSpPr>
+            <a:spLocks noGrp="1"/>
+          </p:cNvSpPr>
+          <p:nvPr>
+            <p:ph type="sldNum" sz="quarter" idx="4294967295"/>
+          </p:nvPr>
+        </p:nvSpPr>
+        <p:spPr>
+          <a:xfrm>
+            <a:off x="11155680" y="6419088"/>
+            <a:ext cx="457200" cy="274320"/>
+          </a:xfrm>
+          <a:prstGeom prst="rect">
+            <a:avLst/>
+          </a:prstGeom>
+          <a:extLst>
+            <a:ext uri="{C572A759-6A51-4108-AA02-DFA0A04FC94B}">
+              <ma14:wrappingTextBoxFlag xmlns:ma14="http://schemas.microsoft.com/office/mac/drawingml/2011/main" val="0"/>
+            </a:ext>
+          </a:extLst>
+        </p:spPr>
+        <p:txBody>
+          <a:bodyPr/>
+          <a:lstStyle>
+            <a:lvl1pPr>
+              <a:defRPr sz="1000">
+                <a:solidFill>
+                  <a:srgbClr val="5B6472"/>
+                </a:solidFill>
+              </a:defRPr>
+            </a:lvl1pPr>
+          </a:lstStyle>
+          <a:p>
+            <a:pPr algn="r"/>
+            <a:fld id="{F7021451-1387-4CA6-816F-3879F97B5CBC}" type="slidenum">
+              <a:rPr b="0" lang="en-US"/>
+              <a:t>18</a:t>
+            </a:fld>
+            <a:endParaRPr lang="en-US"/>
+          </a:p>
+        </p:txBody>
+      </p:sp>
+    </p:spTree>
+  </p:cSld>
+  <p:clrMapOvr>
+    <a:masterClrMapping/>
+  </p:clrMapOvr>
+</p:sld>
+</file>
+
+<file path=ppt/slides/slide19.xml><?xml version="1.0" encoding="utf-8"?>
+<p:sld xmlns:a="http://schemas.openxmlformats.org/drawingml/2006/main" xmlns:r="http://schemas.openxmlformats.org/officeDocument/2006/relationships" xmlns:p="http://schemas.openxmlformats.org/presentationml/2006/main">
+  <p:cSld name="Slide 19">
     <p:spTree>
       <p:nvGrpSpPr>
         <p:cNvPr id="1" name=""/>
@@ -13563,7 +15582,7 @@
                   <a:schemeClr val="tx2"/>
                 </a:solidFill>
               </a:rPr>
-              <a:t>Flaky tests and email alerts</a:t>
+              <a:t>Flaky tests, alerts, broken links</a:t>
             </a:r>
             <a:endParaRPr lang="en-US" sz="2000" dirty="0"/>
           </a:p>
@@ -16044,7 +18063,7 @@
                   <a:srgbClr val="CADCFC"/>
                 </a:solidFill>
               </a:rPr>
-              <a:t>16 tests · 5 modules</a:t>
+              <a:t>17 tests · 6 modules</a:t>
             </a:r>
             <a:endParaRPr lang="en-US" sz="1700" dirty="0"/>
           </a:p>
@@ -18114,7 +20133,7 @@
                   <a:srgbClr val="5B6472"/>
                 </a:solidFill>
               </a:rPr>
-              <a:t>Demo web shop built for this project, with defects seeded on purpose in 5 modules</a:t>
+              <a:t>Demo web shop built for this project, with defects seeded on purpose in 6 modules</a:t>
             </a:r>
             <a:endParaRPr lang="en-US" sz="1400" dirty="0"/>
           </a:p>
@@ -18147,7 +20166,7 @@
                 <a:gridCol w="2999232"/>
                 <a:gridCol w="1188720"/>
               </a:tblGrid>
-              <a:tr h="429768">
+              <a:tr h="384048">
                 <a:tc>
                   <a:txBody>
                     <a:bodyPr/>
@@ -18281,7 +20300,7 @@
                   </a:tcPr>
                 </a:tc>
               </a:tr>
-              <a:tr h="429768">
+              <a:tr h="384048">
                 <a:tc>
                   <a:txBody>
                     <a:bodyPr/>
@@ -18429,7 +20448,7 @@
                   </a:tcPr>
                 </a:tc>
               </a:tr>
-              <a:tr h="429768">
+              <a:tr h="384048">
                 <a:tc>
                   <a:txBody>
                     <a:bodyPr/>
@@ -18577,7 +20596,7 @@
                   </a:tcPr>
                 </a:tc>
               </a:tr>
-              <a:tr h="429768">
+              <a:tr h="384048">
                 <a:tc>
                   <a:txBody>
                     <a:bodyPr/>
@@ -18725,7 +20744,7 @@
                   </a:tcPr>
                 </a:tc>
               </a:tr>
-              <a:tr h="429768">
+              <a:tr h="384048">
                 <a:tc>
                   <a:txBody>
                     <a:bodyPr/>
@@ -18873,7 +20892,7 @@
                   </a:tcPr>
                 </a:tc>
               </a:tr>
-              <a:tr h="429768">
+              <a:tr h="384048">
                 <a:tc>
                   <a:txBody>
                     <a:bodyPr/>
@@ -19021,7 +21040,7 @@
                   </a:tcPr>
                 </a:tc>
               </a:tr>
-              <a:tr h="429768">
+              <a:tr h="384048">
                 <a:tc>
                   <a:txBody>
                     <a:bodyPr/>
@@ -19169,7 +21188,7 @@
                   </a:tcPr>
                 </a:tc>
               </a:tr>
-              <a:tr h="429768">
+              <a:tr h="384048">
                 <a:tc>
                   <a:txBody>
                     <a:bodyPr/>
@@ -19317,7 +21336,7 @@
                   </a:tcPr>
                 </a:tc>
               </a:tr>
-              <a:tr h="429768">
+              <a:tr h="384048">
                 <a:tc>
                   <a:txBody>
                     <a:bodyPr/>
@@ -19465,7 +21484,7 @@
                   </a:tcPr>
                 </a:tc>
               </a:tr>
-              <a:tr h="429768">
+              <a:tr h="384048">
                 <a:tc>
                   <a:txBody>
                     <a:bodyPr/>
@@ -19586,6 +21605,302 @@
                           <a:cs typeface="Calibri" pitchFamily="34" charset="-120"/>
                         </a:rPr>
                         <a:t>Flaky</a:t>
+                      </a:r>
+                      <a:endParaRPr lang="en-US" sz="1300" dirty="0">
+                        <a:latin typeface="Calibri" charset="0"/>
+                        <a:ea typeface="Calibri" charset="0"/>
+                        <a:cs typeface="Calibri" charset="0"/>
+                      </a:endParaRPr>
+                    </a:p>
+                  </a:txBody>
+                  <a:tcPr marL="91440" marR="91440" marT="36576" marB="36576" anchor="ctr">
+                    <a:lnL w="0" cap="flat" cmpd="sng" algn="ctr">
+                      <a:noFill/>
+                    </a:lnL>
+                    <a:lnR w="0" cap="flat" cmpd="sng" algn="ctr">
+                      <a:noFill/>
+                    </a:lnR>
+                    <a:lnT w="0" cap="flat" cmpd="sng" algn="ctr">
+                      <a:noFill/>
+                    </a:lnT>
+                    <a:lnB w="0" cap="flat" cmpd="sng" algn="ctr">
+                      <a:noFill/>
+                    </a:lnB>
+                    <a:solidFill>
+                      <a:srgbClr val="F1F4F8"/>
+                    </a:solidFill>
+                  </a:tcPr>
+                </a:tc>
+              </a:tr>
+              <a:tr h="384048">
+                <a:tc>
+                  <a:txBody>
+                    <a:bodyPr/>
+                    <a:lstStyle/>
+                    <a:p>
+                      <a:pPr indent="0" marL="0">
+                        <a:buNone/>
+                      </a:pPr>
+                      <a:r>
+                        <a:rPr lang="en-US" sz="1300" dirty="0">
+                          <a:solidFill>
+                            <a:srgbClr val="1F2328"/>
+                          </a:solidFill>
+                          <a:latin typeface="Calibri" pitchFamily="34" charset="0"/>
+                          <a:ea typeface="Calibri" pitchFamily="34" charset="-122"/>
+                          <a:cs typeface="Calibri" pitchFamily="34" charset="-120"/>
+                        </a:rPr>
+                        <a:t>Links</a:t>
+                      </a:r>
+                      <a:endParaRPr lang="en-US" sz="1300" dirty="0">
+                        <a:latin typeface="Calibri" charset="0"/>
+                        <a:ea typeface="Calibri" charset="0"/>
+                        <a:cs typeface="Calibri" charset="0"/>
+                      </a:endParaRPr>
+                    </a:p>
+                  </a:txBody>
+                  <a:tcPr marL="91440" marR="91440" marT="36576" marB="36576" anchor="ctr">
+                    <a:lnL w="0" cap="flat" cmpd="sng" algn="ctr">
+                      <a:noFill/>
+                    </a:lnL>
+                    <a:lnR w="0" cap="flat" cmpd="sng" algn="ctr">
+                      <a:noFill/>
+                    </a:lnR>
+                    <a:lnT w="0" cap="flat" cmpd="sng" algn="ctr">
+                      <a:noFill/>
+                    </a:lnT>
+                    <a:lnB w="0" cap="flat" cmpd="sng" algn="ctr">
+                      <a:noFill/>
+                    </a:lnB>
+                    <a:solidFill>
+                      <a:srgbClr val="FFFFFF"/>
+                    </a:solidFill>
+                  </a:tcPr>
+                </a:tc>
+                <a:tc>
+                  <a:txBody>
+                    <a:bodyPr/>
+                    <a:lstStyle/>
+                    <a:p>
+                      <a:pPr indent="0" marL="0">
+                        <a:buNone/>
+                      </a:pPr>
+                      <a:r>
+                        <a:rPr lang="en-US" sz="1300" dirty="0">
+                          <a:solidFill>
+                            <a:srgbClr val="1F2328"/>
+                          </a:solidFill>
+                          <a:latin typeface="Calibri" pitchFamily="34" charset="0"/>
+                          <a:ea typeface="Calibri" pitchFamily="34" charset="-122"/>
+                          <a:cs typeface="Calibri" pitchFamily="34" charset="-120"/>
+                        </a:rPr>
+                        <a:t>Help Center link returns HTTP 500</a:t>
+                      </a:r>
+                      <a:endParaRPr lang="en-US" sz="1300" dirty="0">
+                        <a:latin typeface="Calibri" charset="0"/>
+                        <a:ea typeface="Calibri" charset="0"/>
+                        <a:cs typeface="Calibri" charset="0"/>
+                      </a:endParaRPr>
+                    </a:p>
+                  </a:txBody>
+                  <a:tcPr marL="91440" marR="91440" marT="36576" marB="36576" anchor="ctr">
+                    <a:lnL w="0" cap="flat" cmpd="sng" algn="ctr">
+                      <a:noFill/>
+                    </a:lnL>
+                    <a:lnR w="0" cap="flat" cmpd="sng" algn="ctr">
+                      <a:noFill/>
+                    </a:lnR>
+                    <a:lnT w="0" cap="flat" cmpd="sng" algn="ctr">
+                      <a:noFill/>
+                    </a:lnT>
+                    <a:lnB w="0" cap="flat" cmpd="sng" algn="ctr">
+                      <a:noFill/>
+                    </a:lnB>
+                    <a:solidFill>
+                      <a:srgbClr val="FFFFFF"/>
+                    </a:solidFill>
+                  </a:tcPr>
+                </a:tc>
+                <a:tc>
+                  <a:txBody>
+                    <a:bodyPr/>
+                    <a:lstStyle/>
+                    <a:p>
+                      <a:pPr indent="0" marL="0">
+                        <a:buNone/>
+                      </a:pPr>
+                      <a:r>
+                        <a:rPr lang="en-US" sz="1300" dirty="0">
+                          <a:solidFill>
+                            <a:srgbClr val="D03B3B"/>
+                          </a:solidFill>
+                          <a:latin typeface="Calibri" pitchFamily="34" charset="0"/>
+                          <a:ea typeface="Calibri" pitchFamily="34" charset="-122"/>
+                          <a:cs typeface="Calibri" pitchFamily="34" charset="-120"/>
+                        </a:rPr>
+                        <a:t>● </a:t>
+                      </a:r>
+                      <a:pPr indent="0" marL="0">
+                        <a:buNone/>
+                      </a:pPr>
+                      <a:r>
+                        <a:rPr lang="en-US" sz="1300" b="1" dirty="0">
+                          <a:solidFill>
+                            <a:srgbClr val="1F2328"/>
+                          </a:solidFill>
+                          <a:latin typeface="Calibri" pitchFamily="34" charset="0"/>
+                          <a:ea typeface="Calibri" pitchFamily="34" charset="-122"/>
+                          <a:cs typeface="Calibri" pitchFamily="34" charset="-120"/>
+                        </a:rPr>
+                        <a:t>Critical</a:t>
+                      </a:r>
+                      <a:endParaRPr lang="en-US" sz="1300" dirty="0">
+                        <a:latin typeface="Calibri" charset="0"/>
+                        <a:ea typeface="Calibri" charset="0"/>
+                        <a:cs typeface="Calibri" charset="0"/>
+                      </a:endParaRPr>
+                    </a:p>
+                  </a:txBody>
+                  <a:tcPr marL="91440" marR="91440" marT="36576" marB="36576" anchor="ctr">
+                    <a:lnL w="0" cap="flat" cmpd="sng" algn="ctr">
+                      <a:noFill/>
+                    </a:lnL>
+                    <a:lnR w="0" cap="flat" cmpd="sng" algn="ctr">
+                      <a:noFill/>
+                    </a:lnR>
+                    <a:lnT w="0" cap="flat" cmpd="sng" algn="ctr">
+                      <a:noFill/>
+                    </a:lnT>
+                    <a:lnB w="0" cap="flat" cmpd="sng" algn="ctr">
+                      <a:noFill/>
+                    </a:lnB>
+                    <a:solidFill>
+                      <a:srgbClr val="FFFFFF"/>
+                    </a:solidFill>
+                  </a:tcPr>
+                </a:tc>
+              </a:tr>
+              <a:tr h="384048">
+                <a:tc>
+                  <a:txBody>
+                    <a:bodyPr/>
+                    <a:lstStyle/>
+                    <a:p>
+                      <a:pPr indent="0" marL="0">
+                        <a:buNone/>
+                      </a:pPr>
+                      <a:r>
+                        <a:rPr lang="en-US" sz="1300" dirty="0">
+                          <a:solidFill>
+                            <a:srgbClr val="1F2328"/>
+                          </a:solidFill>
+                          <a:latin typeface="Calibri" pitchFamily="34" charset="0"/>
+                          <a:ea typeface="Calibri" pitchFamily="34" charset="-122"/>
+                          <a:cs typeface="Calibri" pitchFamily="34" charset="-120"/>
+                        </a:rPr>
+                        <a:t>Links</a:t>
+                      </a:r>
+                      <a:endParaRPr lang="en-US" sz="1300" dirty="0">
+                        <a:latin typeface="Calibri" charset="0"/>
+                        <a:ea typeface="Calibri" charset="0"/>
+                        <a:cs typeface="Calibri" charset="0"/>
+                      </a:endParaRPr>
+                    </a:p>
+                  </a:txBody>
+                  <a:tcPr marL="91440" marR="91440" marT="36576" marB="36576" anchor="ctr">
+                    <a:lnL w="0" cap="flat" cmpd="sng" algn="ctr">
+                      <a:noFill/>
+                    </a:lnL>
+                    <a:lnR w="0" cap="flat" cmpd="sng" algn="ctr">
+                      <a:noFill/>
+                    </a:lnR>
+                    <a:lnT w="0" cap="flat" cmpd="sng" algn="ctr">
+                      <a:noFill/>
+                    </a:lnT>
+                    <a:lnB w="0" cap="flat" cmpd="sng" algn="ctr">
+                      <a:noFill/>
+                    </a:lnB>
+                    <a:solidFill>
+                      <a:srgbClr val="F1F4F8"/>
+                    </a:solidFill>
+                  </a:tcPr>
+                </a:tc>
+                <a:tc>
+                  <a:txBody>
+                    <a:bodyPr/>
+                    <a:lstStyle/>
+                    <a:p>
+                      <a:pPr indent="0" marL="0">
+                        <a:buNone/>
+                      </a:pPr>
+                      <a:r>
+                        <a:rPr lang="en-US" sz="1300" dirty="0">
+                          <a:solidFill>
+                            <a:srgbClr val="1F2328"/>
+                          </a:solidFill>
+                          <a:latin typeface="Calibri" pitchFamily="34" charset="0"/>
+                          <a:ea typeface="Calibri" pitchFamily="34" charset="-122"/>
+                          <a:cs typeface="Calibri" pitchFamily="34" charset="-120"/>
+                        </a:rPr>
+                        <a:t>Terms page and spec PDF missing (404)</a:t>
+                      </a:r>
+                      <a:endParaRPr lang="en-US" sz="1300" dirty="0">
+                        <a:latin typeface="Calibri" charset="0"/>
+                        <a:ea typeface="Calibri" charset="0"/>
+                        <a:cs typeface="Calibri" charset="0"/>
+                      </a:endParaRPr>
+                    </a:p>
+                  </a:txBody>
+                  <a:tcPr marL="91440" marR="91440" marT="36576" marB="36576" anchor="ctr">
+                    <a:lnL w="0" cap="flat" cmpd="sng" algn="ctr">
+                      <a:noFill/>
+                    </a:lnL>
+                    <a:lnR w="0" cap="flat" cmpd="sng" algn="ctr">
+                      <a:noFill/>
+                    </a:lnR>
+                    <a:lnT w="0" cap="flat" cmpd="sng" algn="ctr">
+                      <a:noFill/>
+                    </a:lnT>
+                    <a:lnB w="0" cap="flat" cmpd="sng" algn="ctr">
+                      <a:noFill/>
+                    </a:lnB>
+                    <a:solidFill>
+                      <a:srgbClr val="F1F4F8"/>
+                    </a:solidFill>
+                  </a:tcPr>
+                </a:tc>
+                <a:tc>
+                  <a:txBody>
+                    <a:bodyPr/>
+                    <a:lstStyle/>
+                    <a:p>
+                      <a:pPr indent="0" marL="0">
+                        <a:buNone/>
+                      </a:pPr>
+                      <a:r>
+                        <a:rPr lang="en-US" sz="1300" dirty="0">
+                          <a:solidFill>
+                            <a:srgbClr val="EC835A"/>
+                          </a:solidFill>
+                          <a:latin typeface="Calibri" pitchFamily="34" charset="0"/>
+                          <a:ea typeface="Calibri" pitchFamily="34" charset="-122"/>
+                          <a:cs typeface="Calibri" pitchFamily="34" charset="-120"/>
+                        </a:rPr>
+                        <a:t>● </a:t>
+                      </a:r>
+                      <a:pPr indent="0" marL="0">
+                        <a:buNone/>
+                      </a:pPr>
+                      <a:r>
+                        <a:rPr lang="en-US" sz="1300" b="1" dirty="0">
+                          <a:solidFill>
+                            <a:srgbClr val="1F2328"/>
+                          </a:solidFill>
+                          <a:latin typeface="Calibri" pitchFamily="34" charset="0"/>
+                          <a:ea typeface="Calibri" pitchFamily="34" charset="-122"/>
+                          <a:cs typeface="Calibri" pitchFamily="34" charset="-120"/>
+                        </a:rPr>
+                        <a:t>Major</a:t>
                       </a:r>
                       <a:endParaRPr lang="en-US" sz="1300" dirty="0">
                         <a:latin typeface="Calibri" charset="0"/>

--- a/presentation/Automated_Bug_Reporting_Presentation.pptx
+++ b/presentation/Automated_Bug_Reporting_Presentation.pptx
@@ -3560,7 +3560,7 @@
           <a:p>
             <a:r>
               <a:rPr lang="en-US" dirty="0"/>
-              <a:t>When the model predicts Critical for a new bug, Nodemailer sends an email over SMTP with the bug details, a link to the dashboard and the screenshot attached. Repeat failures of the same bug do not send new emails. Without SMTP settings, the same email is saved as an HTML preview so the feature can still be demonstrated.</a:t>
+              <a:t>Whenever a test run ends and at least one Critical bug was detected, new or already known, one email goes to every address configured in the .env file. For each Critical bug it shows the module, the test, the error and a clear screenshot of the page at the moment of failure, embedded in the email. A run without Critical bugs sends nothing, so the email always means something urgent. The pipeline sends one email covering all its runs, with the full report attached. Without SMTP settings the same email is saved as an HTML preview.</a:t>
             </a:r>
             <a:endParaRPr lang="en-US" dirty="0"/>
           </a:p>
@@ -11198,7 +11198,7 @@
                   <a:schemeClr val="tx2"/>
                 </a:solidFill>
               </a:rPr>
-              <a:t>ML predicts Critical</a:t>
+              <a:t>Run ends with a Critical bug</a:t>
             </a:r>
             <a:endParaRPr lang="en-US" sz="1800" dirty="0"/>
           </a:p>
@@ -11234,7 +11234,7 @@
                   <a:schemeClr val="tx1"/>
                 </a:solidFill>
               </a:rPr>
-              <a:t>for a newly detected bug</a:t>
+              <a:t>new or already known, in any module</a:t>
             </a:r>
             <a:endParaRPr lang="en-US" sz="1500" dirty="0"/>
           </a:p>
@@ -11332,7 +11332,7 @@
                   <a:schemeClr val="tx2"/>
                 </a:solidFill>
               </a:rPr>
-              <a:t>Nodemailer sends the email</a:t>
+              <a:t>One email to every address in .env</a:t>
             </a:r>
             <a:endParaRPr lang="en-US" sz="1800" dirty="0"/>
           </a:p>
@@ -11368,7 +11368,7 @@
                   <a:schemeClr val="tx1"/>
                 </a:solidFill>
               </a:rPr>
-              <a:t>SMTP, e.g. Gmail with an App Password</a:t>
+              <a:t>Nodemailer via SMTP (Gmail App Password)</a:t>
             </a:r>
             <a:endParaRPr lang="en-US" sz="1500" dirty="0"/>
           </a:p>
@@ -11466,7 +11466,7 @@
                   <a:schemeClr val="tx2"/>
                 </a:solidFill>
               </a:rPr>
-              <a:t>Team is notified</a:t>
+              <a:t>Clear snapshot of each Critical bug</a:t>
             </a:r>
             <a:endParaRPr lang="en-US" sz="1800" dirty="0"/>
           </a:p>
@@ -11502,7 +11502,7 @@
                   <a:schemeClr val="tx1"/>
                 </a:solidFill>
               </a:rPr>
-              <a:t>details, dashboard link, screenshot attached</a:t>
+              <a:t>error, details and screenshot inside the email</a:t>
             </a:r>
             <a:endParaRPr lang="en-US" sz="1500" dirty="0"/>
           </a:p>
@@ -11564,7 +11564,7 @@
                   <a:schemeClr val="tx1"/>
                 </a:solidFill>
               </a:rPr>
-              <a:t>Sent once per new Critical bug, never again for repeats</a:t>
+              <a:t>No Critical bug in the run = no email</a:t>
             </a:r>
             <a:endParaRPr lang="en-US" sz="1400" dirty="0"/>
           </a:p>

--- a/presentation/Automated_Bug_Reporting_Presentation.pptx
+++ b/presentation/Automated_Bug_Reporting_Presentation.pptx
@@ -21,6 +21,8 @@
     <p:sldId id="269" r:id="rId15"/>
     <p:sldId id="270" r:id="rId16"/>
     <p:sldId id="271" r:id="rId17"/>
+    <p:sldId id="275" r:id="rId26"/>
+    <p:sldId id="276" r:id="rId27"/>
     <p:sldId id="272" r:id="rId18"/>
     <p:sldId id="273" r:id="rId19"/>
     <p:sldId id="274" r:id="rId20"/>
@@ -151,6 +153,8 @@
             <p14:sldId id="269"/>
             <p14:sldId id="270"/>
             <p14:sldId id="271"/>
+            <p14:sldId id="275"/>
+            <p14:sldId id="276"/>
           </p14:sldIdLst>
         </p14:section>
         <p14:section name="Results" id="{dc982aa5-cf9e-cb24-6be6-3fea45960e0c}">
@@ -4024,6 +4028,182 @@
             <a:fld id="{F7021451-1387-4CA6-816F-3879F97B5CBC}" type="slidenum">
               <a:rPr lang="en-US"/>
               <a:t>2</a:t>
+            </a:fld>
+            <a:endParaRPr lang="en-US"/>
+          </a:p>
+        </p:txBody>
+      </p:sp>
+    </p:spTree>
+    <p:extLst>
+      <p:ext uri="{BB962C8B-B14F-4D97-AF65-F5344CB8AC3E}">
+        <p14:creationId xmlns:p14="http://schemas.microsoft.com/office/powerpoint/2010/main" val="1024086991"/>
+      </p:ext>
+    </p:extLst>
+  </p:cSld>
+  <p:clrMapOvr>
+    <a:masterClrMapping/>
+  </p:clrMapOvr>
+</p:notes>
+</file>
+
+<file path=ppt/notesSlides/notesSlide20.xml><?xml version="1.0" encoding="utf-8"?>
+<p:notes xmlns:a="http://schemas.openxmlformats.org/drawingml/2006/main" xmlns:r="http://schemas.openxmlformats.org/officeDocument/2006/relationships" xmlns:p="http://schemas.openxmlformats.org/presentationml/2006/main">
+  <p:cSld>
+    <p:spTree>
+      <p:nvGrpSpPr>
+        <p:cNvPr id="1" name=""/>
+        <p:cNvGrpSpPr/>
+        <p:nvPr/>
+      </p:nvGrpSpPr>
+      <p:grpSpPr>
+        <a:xfrm>
+          <a:off x="0" y="0"/>
+          <a:ext cx="0" cy="0"/>
+          <a:chOff x="0" y="0"/>
+          <a:chExt cx="0" cy="0"/>
+        </a:xfrm>
+      </p:grpSpPr>
+      <p:sp>
+        <p:nvSpPr>
+          <p:cNvPr id="2" name="Slide Image Placeholder 1"/>
+          <p:cNvSpPr>
+            <a:spLocks noGrp="1" noRot="1" noChangeAspect="1"/>
+          </p:cNvSpPr>
+          <p:nvPr>
+            <p:ph type="sldImg"/>
+          </p:nvPr>
+        </p:nvSpPr>
+        <p:spPr/>
+      </p:sp>
+      <p:sp>
+        <p:nvSpPr>
+          <p:cNvPr id="3" name="Notes Placeholder 2"/>
+          <p:cNvSpPr>
+            <a:spLocks noGrp="1"/>
+          </p:cNvSpPr>
+          <p:nvPr>
+            <p:ph type="body" idx="1"/>
+          </p:nvPr>
+        </p:nvSpPr>
+        <p:spPr/>
+        <p:txBody>
+          <a:bodyPr/>
+          <a:lstStyle/>
+          <a:p>
+            <a:r>
+              <a:rPr lang="en-US" dirty="0"/>
+              <a:t>The manager asked that manual testers can run the automation without VS Code. This is the Test Runner: a web page with a suite dropdown, an email box and a Run button. The tester double-clicks Start Test Runner, chooses Smoke, Sanity, Regression or Broken links, types the email addresses and presses Run. The server starts Playwright with the suite tag, the page shows live progress, and when the run ends the report opens in the same page and is emailed to the people entered. Every run is kept in the run history with the date as prefix.</a:t>
+            </a:r>
+            <a:endParaRPr lang="en-US" dirty="0"/>
+          </a:p>
+        </p:txBody>
+      </p:sp>
+      <p:sp>
+        <p:nvSpPr>
+          <p:cNvPr id="4" name="Slide Number Placeholder 3"/>
+          <p:cNvSpPr>
+            <a:spLocks noGrp="1"/>
+          </p:cNvSpPr>
+          <p:nvPr>
+            <p:ph type="sldNum" sz="quarter" idx="10"/>
+          </p:nvPr>
+        </p:nvSpPr>
+        <p:spPr/>
+        <p:txBody>
+          <a:bodyPr/>
+          <a:lstStyle/>
+          <a:p>
+            <a:fld id="{F7021451-1387-4CA6-816F-3879F97B5CBC}" type="slidenum">
+              <a:rPr lang="en-US"/>
+              <a:t>12</a:t>
+            </a:fld>
+            <a:endParaRPr lang="en-US"/>
+          </a:p>
+        </p:txBody>
+      </p:sp>
+    </p:spTree>
+    <p:extLst>
+      <p:ext uri="{BB962C8B-B14F-4D97-AF65-F5344CB8AC3E}">
+        <p14:creationId xmlns:p14="http://schemas.microsoft.com/office/powerpoint/2010/main" val="1024086991"/>
+      </p:ext>
+    </p:extLst>
+  </p:cSld>
+  <p:clrMapOvr>
+    <a:masterClrMapping/>
+  </p:clrMapOvr>
+</p:notes>
+</file>
+
+<file path=ppt/notesSlides/notesSlide21.xml><?xml version="1.0" encoding="utf-8"?>
+<p:notes xmlns:a="http://schemas.openxmlformats.org/drawingml/2006/main" xmlns:r="http://schemas.openxmlformats.org/officeDocument/2006/relationships" xmlns:p="http://schemas.openxmlformats.org/presentationml/2006/main">
+  <p:cSld>
+    <p:spTree>
+      <p:nvGrpSpPr>
+        <p:cNvPr id="1" name=""/>
+        <p:cNvGrpSpPr/>
+        <p:nvPr/>
+      </p:nvGrpSpPr>
+      <p:grpSpPr>
+        <a:xfrm>
+          <a:off x="0" y="0"/>
+          <a:ext cx="0" cy="0"/>
+          <a:chOff x="0" y="0"/>
+          <a:chExt cx="0" cy="0"/>
+        </a:xfrm>
+      </p:grpSpPr>
+      <p:sp>
+        <p:nvSpPr>
+          <p:cNvPr id="2" name="Slide Image Placeholder 1"/>
+          <p:cNvSpPr>
+            <a:spLocks noGrp="1" noRot="1" noChangeAspect="1"/>
+          </p:cNvSpPr>
+          <p:nvPr>
+            <p:ph type="sldImg"/>
+          </p:nvPr>
+        </p:nvSpPr>
+        <p:spPr/>
+      </p:sp>
+      <p:sp>
+        <p:nvSpPr>
+          <p:cNvPr id="3" name="Notes Placeholder 2"/>
+          <p:cNvSpPr>
+            <a:spLocks noGrp="1"/>
+          </p:cNvSpPr>
+          <p:nvPr>
+            <p:ph type="body" idx="1"/>
+          </p:nvPr>
+        </p:nvSpPr>
+        <p:spPr/>
+        <p:txBody>
+          <a:bodyPr/>
+          <a:lstStyle/>
+          <a:p>
+            <a:r>
+              <a:rPr lang="en-US" dirty="0"/>
+              <a:t>This is the report of a Regression run, shown in the same UI. At the top: the run name with the date first, the status, suite, duration and who received the email. Then the pass rate, the totals, results by module and bugs by severity, with the Critical bugs called out. Below, every test is listed by module; clicking a failed test shows its error, its ML severity and the screenshot. The report can be downloaded as one self-contained HTML file, it is emailed automatically, and it stays in the run history.</a:t>
+            </a:r>
+            <a:endParaRPr lang="en-US" dirty="0"/>
+          </a:p>
+        </p:txBody>
+      </p:sp>
+      <p:sp>
+        <p:nvSpPr>
+          <p:cNvPr id="4" name="Slide Number Placeholder 3"/>
+          <p:cNvSpPr>
+            <a:spLocks noGrp="1"/>
+          </p:cNvSpPr>
+          <p:nvPr>
+            <p:ph type="sldNum" sz="quarter" idx="10"/>
+          </p:nvPr>
+        </p:nvSpPr>
+        <p:spPr/>
+        <p:txBody>
+          <a:bodyPr/>
+          <a:lstStyle/>
+          <a:p>
+            <a:fld id="{F7021451-1387-4CA6-816F-3879F97B5CBC}" type="slidenum">
+              <a:rPr lang="en-US"/>
+              <a:t>12</a:t>
             </a:fld>
             <a:endParaRPr lang="en-US"/>
           </a:p>
@@ -15508,7 +15688,7 @@
                   <a:schemeClr val="tx2"/>
                 </a:solidFill>
               </a:rPr>
-              <a:t>Storage and dashboard</a:t>
+              <a:t>Dashboard and Test Runner</a:t>
             </a:r>
             <a:endParaRPr lang="en-US" sz="2000" dirty="0"/>
           </a:p>
@@ -15702,6 +15882,1510 @@
             <a:fld id="{F7021451-1387-4CA6-816F-3879F97B5CBC}" type="slidenum">
               <a:rPr b="0" lang="en-US"/>
               <a:t>2</a:t>
+            </a:fld>
+            <a:endParaRPr lang="en-US"/>
+          </a:p>
+        </p:txBody>
+      </p:sp>
+    </p:spTree>
+  </p:cSld>
+  <p:clrMapOvr>
+    <a:masterClrMapping/>
+  </p:clrMapOvr>
+</p:sld>
+</file>
+
+<file path=ppt/slides/slide20.xml><?xml version="1.0" encoding="utf-8"?>
+<p:sld xmlns:a="http://schemas.openxmlformats.org/drawingml/2006/main" xmlns:r="http://schemas.openxmlformats.org/officeDocument/2006/relationships" xmlns:p="http://schemas.openxmlformats.org/presentationml/2006/main">
+  <p:cSld name="Slide 12">
+    <p:spTree>
+      <p:nvGrpSpPr>
+        <p:cNvPr id="1" name=""/>
+        <p:cNvGrpSpPr/>
+        <p:nvPr/>
+      </p:nvGrpSpPr>
+      <p:grpSpPr>
+        <a:xfrm>
+          <a:off x="0" y="0"/>
+          <a:ext cx="0" cy="0"/>
+          <a:chOff x="0" y="0"/>
+          <a:chExt cx="0" cy="0"/>
+        </a:xfrm>
+      </p:grpSpPr>
+      <p:sp>
+        <p:nvSpPr>
+          <p:cNvPr id="2" name="Text 0"/>
+          <p:cNvSpPr/>
+          <p:nvPr>
+            <p:ph idx="100" type="title" hasCustomPrompt="1"/>
+          </p:nvPr>
+        </p:nvSpPr>
+        <p:spPr>
+          <a:xfrm>
+            <a:off x="548640" y="320040"/>
+            <a:ext cx="11064240" cy="777240"/>
+          </a:xfrm>
+          <a:prstGeom prst="rect">
+            <a:avLst/>
+          </a:prstGeom>
+          <a:noFill/>
+          <a:ln/>
+        </p:spPr>
+        <p:txBody>
+          <a:bodyPr wrap="square" lIns="0" tIns="0" rIns="0" bIns="0" rtlCol="0" anchor="ctr"/>
+          <a:lstStyle/>
+          <a:p>
+            <a:pPr algn="l" indent="0" marL="0">
+              <a:buNone/>
+            </a:pPr>
+            <a:r>
+              <a:rPr lang="en-US" sz="3000" b="1" dirty="0">
+                <a:solidFill>
+                  <a:schemeClr val="tx2"/>
+                </a:solidFill>
+              </a:rPr>
+              <a:t>Test Runner: one click for manual testers</a:t>
+            </a:r>
+            <a:endParaRPr lang="en-US" sz="3000" dirty="0"/>
+          </a:p>
+        </p:txBody>
+      </p:sp>
+      <p:sp>
+        <p:nvSpPr>
+          <p:cNvPr id="3" name="bug list screenshot frame"/>
+          <p:cNvSpPr/>
+          <p:nvPr/>
+        </p:nvSpPr>
+        <p:spPr>
+          <a:xfrm>
+            <a:off x="548640" y="1371600"/>
+            <a:ext cx="7040880" cy="4400550"/>
+          </a:xfrm>
+          <a:prstGeom prst="rect">
+            <a:avLst/>
+          </a:prstGeom>
+          <a:solidFill>
+            <a:srgbClr val="FFFFFF"/>
+          </a:solidFill>
+          <a:ln w="9525">
+            <a:solidFill>
+              <a:srgbClr val="D5DAE1"/>
+            </a:solidFill>
+            <a:prstDash val="solid"/>
+          </a:ln>
+          <a:effectLst>
+            <a:outerShdw sx="100000" sy="100000" kx="0" ky="0" algn="bl" rotWithShape="0" blurRad="101600" dist="25400" dir="5400000">
+              <a:srgbClr val="000000">
+                <a:alpha val="18000"/>
+              </a:srgbClr>
+            </a:outerShdw>
+          </a:effectLst>
+        </p:spPr>
+      </p:sp>
+      <p:pic>
+        <p:nvPicPr>
+          <p:cNvPr id="4" name="bug list screenshot" descr="preencoded.png">    </p:cNvPr>
+          <p:cNvPicPr>
+            <a:picLocks noChangeAspect="1"/>
+          </p:cNvPicPr>
+          <p:nvPr/>
+        </p:nvPicPr>
+        <p:blipFill>
+          <a:blip r:embed="rId1"/>
+          <a:stretch>
+            <a:fillRect/>
+          </a:stretch>
+        </p:blipFill>
+        <p:spPr>
+          <a:xfrm>
+            <a:off x="548640" y="1371600"/>
+            <a:ext cx="7040880" cy="4400550"/>
+          </a:xfrm>
+          <a:prstGeom prst="rect">
+            <a:avLst/>
+          </a:prstGeom>
+        </p:spPr>
+      </p:pic>
+      <p:sp>
+        <p:nvSpPr>
+          <p:cNvPr id="5" name="icon circle"/>
+          <p:cNvSpPr/>
+          <p:nvPr/>
+        </p:nvSpPr>
+        <p:spPr>
+          <a:xfrm>
+            <a:off x="7955280" y="1371600"/>
+            <a:ext cx="548640" cy="548640"/>
+          </a:xfrm>
+          <a:prstGeom prst="ellipse">
+            <a:avLst/>
+          </a:prstGeom>
+          <a:solidFill>
+            <a:srgbClr val="2A78D6"/>
+          </a:solidFill>
+          <a:ln/>
+        </p:spPr>
+      </p:sp>
+      <p:pic>
+        <p:nvPicPr>
+          <p:cNvPr id="6" name="FaFilter icon" descr="preencoded.png">    </p:cNvPr>
+          <p:cNvPicPr>
+            <a:picLocks noChangeAspect="1"/>
+          </p:cNvPicPr>
+          <p:nvPr/>
+        </p:nvPicPr>
+        <p:blipFill>
+          <a:blip r:embed="rId2"/>
+          <a:stretch>
+            <a:fillRect/>
+          </a:stretch>
+        </p:blipFill>
+        <p:spPr>
+          <a:xfrm>
+            <a:off x="8092440" y="1508760"/>
+            <a:ext cx="274320" cy="274320"/>
+          </a:xfrm>
+          <a:prstGeom prst="rect">
+            <a:avLst/>
+          </a:prstGeom>
+        </p:spPr>
+      </p:pic>
+      <p:sp>
+        <p:nvSpPr>
+          <p:cNvPr id="7" name="Text 3"/>
+          <p:cNvSpPr txBox="1"/>
+          <p:nvPr/>
+        </p:nvSpPr>
+        <p:spPr>
+          <a:xfrm>
+            <a:off x="8686800" y="1353312"/>
+            <a:ext cx="2926080" cy="320040"/>
+          </a:xfrm>
+          <a:prstGeom prst="rect">
+            <a:avLst/>
+          </a:prstGeom>
+          <a:noFill/>
+          <a:ln/>
+        </p:spPr>
+        <p:txBody>
+          <a:bodyPr wrap="square" lIns="0" tIns="0" rIns="0" bIns="0" rtlCol="0" anchor="t"/>
+          <a:lstStyle/>
+          <a:p>
+            <a:pPr indent="0" marL="0">
+              <a:buNone/>
+            </a:pPr>
+            <a:r>
+              <a:rPr lang="en-US" sz="1700" b="1" dirty="0">
+                <a:solidFill>
+                  <a:schemeClr val="tx2"/>
+                </a:solidFill>
+              </a:rPr>
+              <a:t>Choose a suite</a:t>
+            </a:r>
+            <a:endParaRPr lang="en-US" sz="1700" dirty="0"/>
+          </a:p>
+        </p:txBody>
+      </p:sp>
+      <p:sp>
+        <p:nvSpPr>
+          <p:cNvPr id="8" name="Text 4"/>
+          <p:cNvSpPr txBox="1"/>
+          <p:nvPr/>
+        </p:nvSpPr>
+        <p:spPr>
+          <a:xfrm>
+            <a:off x="8686800" y="1673352"/>
+            <a:ext cx="2926080" cy="365760"/>
+          </a:xfrm>
+          <a:prstGeom prst="rect">
+            <a:avLst/>
+          </a:prstGeom>
+          <a:noFill/>
+          <a:ln/>
+        </p:spPr>
+        <p:txBody>
+          <a:bodyPr wrap="square" lIns="0" tIns="0" rIns="0" bIns="0" rtlCol="0" anchor="t"/>
+          <a:lstStyle/>
+          <a:p>
+            <a:pPr indent="0" marL="0">
+              <a:buNone/>
+            </a:pPr>
+            <a:r>
+              <a:rPr lang="en-US" sz="1400" dirty="0">
+                <a:solidFill>
+                  <a:schemeClr val="tx1"/>
+                </a:solidFill>
+              </a:rPr>
+              <a:t>Smoke, Sanity, Regression, Broken links</a:t>
+            </a:r>
+            <a:endParaRPr lang="en-US" sz="1400" dirty="0"/>
+          </a:p>
+        </p:txBody>
+      </p:sp>
+      <p:sp>
+        <p:nvSpPr>
+          <p:cNvPr id="9" name="icon circle"/>
+          <p:cNvSpPr/>
+          <p:nvPr/>
+        </p:nvSpPr>
+        <p:spPr>
+          <a:xfrm>
+            <a:off x="7955280" y="2331720"/>
+            <a:ext cx="548640" cy="548640"/>
+          </a:xfrm>
+          <a:prstGeom prst="ellipse">
+            <a:avLst/>
+          </a:prstGeom>
+          <a:solidFill>
+            <a:srgbClr val="2A78D6"/>
+          </a:solidFill>
+          <a:ln/>
+        </p:spPr>
+      </p:sp>
+      <p:pic>
+        <p:nvPicPr>
+          <p:cNvPr id="10" name="FaSearch icon" descr="preencoded.png">    </p:cNvPr>
+          <p:cNvPicPr>
+            <a:picLocks noChangeAspect="1"/>
+          </p:cNvPicPr>
+          <p:nvPr/>
+        </p:nvPicPr>
+        <p:blipFill>
+          <a:blip r:embed="rId3"/>
+          <a:stretch>
+            <a:fillRect/>
+          </a:stretch>
+        </p:blipFill>
+        <p:spPr>
+          <a:xfrm>
+            <a:off x="8092440" y="2468880"/>
+            <a:ext cx="274320" cy="274320"/>
+          </a:xfrm>
+          <a:prstGeom prst="rect">
+            <a:avLst/>
+          </a:prstGeom>
+        </p:spPr>
+      </p:pic>
+      <p:sp>
+        <p:nvSpPr>
+          <p:cNvPr id="11" name="Text 6"/>
+          <p:cNvSpPr txBox="1"/>
+          <p:nvPr/>
+        </p:nvSpPr>
+        <p:spPr>
+          <a:xfrm>
+            <a:off x="8686800" y="2313432"/>
+            <a:ext cx="2926080" cy="320040"/>
+          </a:xfrm>
+          <a:prstGeom prst="rect">
+            <a:avLst/>
+          </a:prstGeom>
+          <a:noFill/>
+          <a:ln/>
+        </p:spPr>
+        <p:txBody>
+          <a:bodyPr wrap="square" lIns="0" tIns="0" rIns="0" bIns="0" rtlCol="0" anchor="t"/>
+          <a:lstStyle/>
+          <a:p>
+            <a:pPr indent="0" marL="0">
+              <a:buNone/>
+            </a:pPr>
+            <a:r>
+              <a:rPr lang="en-US" sz="1700" b="1" dirty="0">
+                <a:solidFill>
+                  <a:schemeClr val="tx2"/>
+                </a:solidFill>
+              </a:rPr>
+              <a:t>Enter email ID(s)</a:t>
+            </a:r>
+            <a:endParaRPr lang="en-US" sz="1700" dirty="0"/>
+          </a:p>
+        </p:txBody>
+      </p:sp>
+      <p:sp>
+        <p:nvSpPr>
+          <p:cNvPr id="12" name="Text 7"/>
+          <p:cNvSpPr txBox="1"/>
+          <p:nvPr/>
+        </p:nvSpPr>
+        <p:spPr>
+          <a:xfrm>
+            <a:off x="8686800" y="2633472"/>
+            <a:ext cx="2926080" cy="365760"/>
+          </a:xfrm>
+          <a:prstGeom prst="rect">
+            <a:avLst/>
+          </a:prstGeom>
+          <a:noFill/>
+          <a:ln/>
+        </p:spPr>
+        <p:txBody>
+          <a:bodyPr wrap="square" lIns="0" tIns="0" rIns="0" bIns="0" rtlCol="0" anchor="t"/>
+          <a:lstStyle/>
+          <a:p>
+            <a:pPr indent="0" marL="0">
+              <a:buNone/>
+            </a:pPr>
+            <a:r>
+              <a:rPr lang="en-US" sz="1400" dirty="0">
+                <a:solidFill>
+                  <a:schemeClr val="tx1"/>
+                </a:solidFill>
+              </a:rPr>
+              <a:t>Report emailed when the run ends</a:t>
+            </a:r>
+            <a:endParaRPr lang="en-US" sz="1400" dirty="0"/>
+          </a:p>
+        </p:txBody>
+      </p:sp>
+      <p:sp>
+        <p:nvSpPr>
+          <p:cNvPr id="13" name="icon circle"/>
+          <p:cNvSpPr/>
+          <p:nvPr/>
+        </p:nvSpPr>
+        <p:spPr>
+          <a:xfrm>
+            <a:off x="7955280" y="3291840"/>
+            <a:ext cx="548640" cy="548640"/>
+          </a:xfrm>
+          <a:prstGeom prst="ellipse">
+            <a:avLst/>
+          </a:prstGeom>
+          <a:solidFill>
+            <a:srgbClr val="2A78D6"/>
+          </a:solidFill>
+          <a:ln/>
+        </p:spPr>
+      </p:sp>
+      <p:pic>
+        <p:nvPicPr>
+          <p:cNvPr id="14" name="FaImage icon" descr="preencoded.png">    </p:cNvPr>
+          <p:cNvPicPr>
+            <a:picLocks noChangeAspect="1"/>
+          </p:cNvPicPr>
+          <p:nvPr/>
+        </p:nvPicPr>
+        <p:blipFill>
+          <a:blip r:embed="rId4"/>
+          <a:stretch>
+            <a:fillRect/>
+          </a:stretch>
+        </p:blipFill>
+        <p:spPr>
+          <a:xfrm>
+            <a:off x="8092440" y="3429000"/>
+            <a:ext cx="274320" cy="274320"/>
+          </a:xfrm>
+          <a:prstGeom prst="rect">
+            <a:avLst/>
+          </a:prstGeom>
+        </p:spPr>
+      </p:pic>
+      <p:sp>
+        <p:nvSpPr>
+          <p:cNvPr id="15" name="Text 9"/>
+          <p:cNvSpPr txBox="1"/>
+          <p:nvPr/>
+        </p:nvSpPr>
+        <p:spPr>
+          <a:xfrm>
+            <a:off x="8686800" y="3273552"/>
+            <a:ext cx="2926080" cy="320040"/>
+          </a:xfrm>
+          <a:prstGeom prst="rect">
+            <a:avLst/>
+          </a:prstGeom>
+          <a:noFill/>
+          <a:ln/>
+        </p:spPr>
+        <p:txBody>
+          <a:bodyPr wrap="square" lIns="0" tIns="0" rIns="0" bIns="0" rtlCol="0" anchor="t"/>
+          <a:lstStyle/>
+          <a:p>
+            <a:pPr indent="0" marL="0">
+              <a:buNone/>
+            </a:pPr>
+            <a:r>
+              <a:rPr lang="en-US" sz="1700" b="1" dirty="0">
+                <a:solidFill>
+                  <a:schemeClr val="tx2"/>
+                </a:solidFill>
+              </a:rPr>
+              <a:t>Press Run</a:t>
+            </a:r>
+            <a:endParaRPr lang="en-US" sz="1700" dirty="0"/>
+          </a:p>
+        </p:txBody>
+      </p:sp>
+      <p:sp>
+        <p:nvSpPr>
+          <p:cNvPr id="16" name="Text 10"/>
+          <p:cNvSpPr txBox="1"/>
+          <p:nvPr/>
+        </p:nvSpPr>
+        <p:spPr>
+          <a:xfrm>
+            <a:off x="8686800" y="3593592"/>
+            <a:ext cx="2926080" cy="365760"/>
+          </a:xfrm>
+          <a:prstGeom prst="rect">
+            <a:avLst/>
+          </a:prstGeom>
+          <a:noFill/>
+          <a:ln/>
+        </p:spPr>
+        <p:txBody>
+          <a:bodyPr wrap="square" lIns="0" tIns="0" rIns="0" bIns="0" rtlCol="0" anchor="t"/>
+          <a:lstStyle/>
+          <a:p>
+            <a:pPr indent="0" marL="0">
+              <a:buNone/>
+            </a:pPr>
+            <a:r>
+              <a:rPr lang="en-US" sz="1400" dirty="0">
+                <a:solidFill>
+                  <a:schemeClr val="tx1"/>
+                </a:solidFill>
+              </a:rPr>
+              <a:t>Live progress, report in the same UI</a:t>
+            </a:r>
+            <a:endParaRPr lang="en-US" sz="1400" dirty="0"/>
+          </a:p>
+        </p:txBody>
+      </p:sp>
+      <p:sp>
+        <p:nvSpPr>
+          <p:cNvPr id="17" name="Text 11"/>
+          <p:cNvSpPr txBox="1"/>
+          <p:nvPr/>
+        </p:nvSpPr>
+        <p:spPr>
+          <a:xfrm>
+            <a:off x="7955280" y="4343400"/>
+            <a:ext cx="3657600" cy="320040"/>
+          </a:xfrm>
+          <a:prstGeom prst="rect">
+            <a:avLst/>
+          </a:prstGeom>
+          <a:noFill/>
+          <a:ln/>
+        </p:spPr>
+        <p:txBody>
+          <a:bodyPr wrap="square" lIns="0" tIns="0" rIns="0" bIns="0" rtlCol="0" anchor="t"/>
+          <a:lstStyle/>
+          <a:p>
+            <a:pPr indent="0" marL="0">
+              <a:buNone/>
+            </a:pPr>
+            <a:r>
+              <a:rPr lang="en-US" sz="1700" b="1" dirty="0">
+                <a:solidFill>
+                  <a:schemeClr val="tx2"/>
+                </a:solidFill>
+              </a:rPr>
+              <a:t>No VS Code needed</a:t>
+            </a:r>
+            <a:endParaRPr lang="en-US" sz="1700" dirty="0"/>
+          </a:p>
+        </p:txBody>
+      </p:sp>
+      <p:sp>
+        <p:nvSpPr>
+          <p:cNvPr id="18" name="status Open"/>
+          <p:cNvSpPr/>
+          <p:nvPr/>
+        </p:nvSpPr>
+        <p:spPr>
+          <a:xfrm>
+            <a:off x="7955280" y="4800600"/>
+            <a:ext cx="1078992" cy="457200"/>
+          </a:xfrm>
+          <a:prstGeom prst="roundRect">
+            <a:avLst>
+              <a:gd name="adj" fmla="val 40000"/>
+            </a:avLst>
+          </a:prstGeom>
+          <a:solidFill>
+            <a:srgbClr val="2A78D6"/>
+          </a:solidFill>
+          <a:ln/>
+        </p:spPr>
+        <p:txBody>
+          <a:bodyPr wrap="square" lIns="0" tIns="0" rIns="0" bIns="0" rtlCol="0" anchor="ctr"/>
+          <a:lstStyle/>
+          <a:p>
+            <a:pPr algn="ctr" indent="0" marL="0">
+              <a:buNone/>
+            </a:pPr>
+            <a:r>
+              <a:rPr lang="en-US" sz="1300" b="1" dirty="0">
+                <a:solidFill>
+                  <a:schemeClr val="bg1"/>
+                </a:solidFill>
+              </a:rPr>
+              <a:t>Run</a:t>
+            </a:r>
+            <a:endParaRPr lang="en-US" sz="1300" dirty="0"/>
+          </a:p>
+        </p:txBody>
+      </p:sp>
+      <p:sp>
+        <p:nvSpPr>
+          <p:cNvPr id="19" name="arrow"/>
+          <p:cNvSpPr/>
+          <p:nvPr/>
+        </p:nvSpPr>
+        <p:spPr>
+          <a:xfrm>
+            <a:off x="9043416" y="5029200"/>
+            <a:ext cx="164592" cy="0"/>
+          </a:xfrm>
+          <a:prstGeom prst="line">
+            <a:avLst/>
+          </a:prstGeom>
+          <a:noFill/>
+          <a:ln w="25400">
+            <a:solidFill>
+              <a:srgbClr val="10243F"/>
+            </a:solidFill>
+            <a:prstDash val="solid"/>
+            <a:tailEnd type="triangle"/>
+          </a:ln>
+        </p:spPr>
+      </p:sp>
+      <p:sp>
+        <p:nvSpPr>
+          <p:cNvPr id="20" name="status In Progress"/>
+          <p:cNvSpPr/>
+          <p:nvPr/>
+        </p:nvSpPr>
+        <p:spPr>
+          <a:xfrm>
+            <a:off x="9217152" y="4800600"/>
+            <a:ext cx="1078992" cy="457200"/>
+          </a:xfrm>
+          <a:prstGeom prst="roundRect">
+            <a:avLst>
+              <a:gd name="adj" fmla="val 40000"/>
+            </a:avLst>
+          </a:prstGeom>
+          <a:solidFill>
+            <a:srgbClr val="6250D6"/>
+          </a:solidFill>
+          <a:ln/>
+        </p:spPr>
+        <p:txBody>
+          <a:bodyPr wrap="square" lIns="0" tIns="0" rIns="0" bIns="0" rtlCol="0" anchor="ctr"/>
+          <a:lstStyle/>
+          <a:p>
+            <a:pPr algn="ctr" indent="0" marL="0">
+              <a:buNone/>
+            </a:pPr>
+            <a:r>
+              <a:rPr lang="en-US" sz="1300" b="1" dirty="0">
+                <a:solidFill>
+                  <a:schemeClr val="bg1"/>
+                </a:solidFill>
+              </a:rPr>
+              <a:t>Report</a:t>
+            </a:r>
+            <a:endParaRPr lang="en-US" sz="1300" dirty="0"/>
+          </a:p>
+        </p:txBody>
+      </p:sp>
+      <p:sp>
+        <p:nvSpPr>
+          <p:cNvPr id="21" name="arrow"/>
+          <p:cNvSpPr/>
+          <p:nvPr/>
+        </p:nvSpPr>
+        <p:spPr>
+          <a:xfrm>
+            <a:off x="10305288" y="5029200"/>
+            <a:ext cx="164592" cy="0"/>
+          </a:xfrm>
+          <a:prstGeom prst="line">
+            <a:avLst/>
+          </a:prstGeom>
+          <a:noFill/>
+          <a:ln w="25400">
+            <a:solidFill>
+              <a:srgbClr val="10243F"/>
+            </a:solidFill>
+            <a:prstDash val="solid"/>
+            <a:tailEnd type="triangle"/>
+          </a:ln>
+        </p:spPr>
+      </p:sp>
+      <p:sp>
+        <p:nvSpPr>
+          <p:cNvPr id="22" name="status Resolved"/>
+          <p:cNvSpPr/>
+          <p:nvPr/>
+        </p:nvSpPr>
+        <p:spPr>
+          <a:xfrm>
+            <a:off x="10479024" y="4800600"/>
+            <a:ext cx="1078992" cy="457200"/>
+          </a:xfrm>
+          <a:prstGeom prst="roundRect">
+            <a:avLst>
+              <a:gd name="adj" fmla="val 40000"/>
+            </a:avLst>
+          </a:prstGeom>
+          <a:solidFill>
+            <a:srgbClr val="1B8E4E"/>
+          </a:solidFill>
+          <a:ln/>
+        </p:spPr>
+        <p:txBody>
+          <a:bodyPr wrap="square" lIns="0" tIns="0" rIns="0" bIns="0" rtlCol="0" anchor="ctr"/>
+          <a:lstStyle/>
+          <a:p>
+            <a:pPr algn="ctr" indent="0" marL="0">
+              <a:buNone/>
+            </a:pPr>
+            <a:r>
+              <a:rPr lang="en-US" sz="1300" b="1" dirty="0">
+                <a:solidFill>
+                  <a:schemeClr val="bg1"/>
+                </a:solidFill>
+              </a:rPr>
+              <a:t>Email</a:t>
+            </a:r>
+            <a:endParaRPr lang="en-US" sz="1300" dirty="0"/>
+          </a:p>
+        </p:txBody>
+      </p:sp>
+      <p:sp>
+        <p:nvSpPr>
+          <p:cNvPr id="23" name="Text 17"/>
+          <p:cNvSpPr txBox="1"/>
+          <p:nvPr/>
+        </p:nvSpPr>
+        <p:spPr>
+          <a:xfrm>
+            <a:off x="7955280" y="5440680"/>
+            <a:ext cx="3657600" cy="320040"/>
+          </a:xfrm>
+          <a:prstGeom prst="rect">
+            <a:avLst/>
+          </a:prstGeom>
+          <a:noFill/>
+          <a:ln/>
+        </p:spPr>
+        <p:txBody>
+          <a:bodyPr wrap="square" lIns="0" tIns="0" rIns="0" bIns="0" rtlCol="0" anchor="t"/>
+          <a:lstStyle/>
+          <a:p>
+            <a:pPr indent="0" marL="0">
+              <a:buNone/>
+            </a:pPr>
+            <a:r>
+              <a:rPr lang="en-US" sz="1400" dirty="0">
+                <a:solidFill>
+                  <a:srgbClr val="5B6472"/>
+                </a:solidFill>
+              </a:rPr>
+              <a:t>Double-click "Start Test Runner" to begin</a:t>
+            </a:r>
+            <a:endParaRPr lang="en-US" sz="1400" dirty="0"/>
+          </a:p>
+        </p:txBody>
+      </p:sp>
+      <p:sp>
+        <p:nvSpPr>
+          <p:cNvPr id="25" name="Slide Number Placeholder 0"/>
+          <p:cNvSpPr>
+            <a:spLocks noGrp="1"/>
+          </p:cNvSpPr>
+          <p:nvPr>
+            <p:ph type="sldNum" sz="quarter" idx="4294967295"/>
+          </p:nvPr>
+        </p:nvSpPr>
+        <p:spPr>
+          <a:xfrm>
+            <a:off x="11155680" y="6419088"/>
+            <a:ext cx="457200" cy="274320"/>
+          </a:xfrm>
+          <a:prstGeom prst="rect">
+            <a:avLst/>
+          </a:prstGeom>
+          <a:extLst>
+            <a:ext uri="{C572A759-6A51-4108-AA02-DFA0A04FC94B}">
+              <ma14:wrappingTextBoxFlag xmlns:ma14="http://schemas.microsoft.com/office/mac/drawingml/2011/main" val="0"/>
+            </a:ext>
+          </a:extLst>
+        </p:spPr>
+        <p:txBody>
+          <a:bodyPr/>
+          <a:lstStyle>
+            <a:lvl1pPr>
+              <a:defRPr sz="1000">
+                <a:solidFill>
+                  <a:srgbClr val="5B6472"/>
+                </a:solidFill>
+              </a:defRPr>
+            </a:lvl1pPr>
+          </a:lstStyle>
+          <a:p>
+            <a:pPr algn="r"/>
+            <a:fld id="{F7021451-1387-4CA6-816F-3879F97B5CBC}" type="slidenum">
+              <a:rPr b="0" lang="en-US"/>
+              <a:t>12</a:t>
+            </a:fld>
+            <a:endParaRPr lang="en-US"/>
+          </a:p>
+        </p:txBody>
+      </p:sp>
+    </p:spTree>
+  </p:cSld>
+  <p:clrMapOvr>
+    <a:masterClrMapping/>
+  </p:clrMapOvr>
+</p:sld>
+</file>
+
+<file path=ppt/slides/slide21.xml><?xml version="1.0" encoding="utf-8"?>
+<p:sld xmlns:a="http://schemas.openxmlformats.org/drawingml/2006/main" xmlns:r="http://schemas.openxmlformats.org/officeDocument/2006/relationships" xmlns:p="http://schemas.openxmlformats.org/presentationml/2006/main">
+  <p:cSld name="Slide 12">
+    <p:spTree>
+      <p:nvGrpSpPr>
+        <p:cNvPr id="1" name=""/>
+        <p:cNvGrpSpPr/>
+        <p:nvPr/>
+      </p:nvGrpSpPr>
+      <p:grpSpPr>
+        <a:xfrm>
+          <a:off x="0" y="0"/>
+          <a:ext cx="0" cy="0"/>
+          <a:chOff x="0" y="0"/>
+          <a:chExt cx="0" cy="0"/>
+        </a:xfrm>
+      </p:grpSpPr>
+      <p:sp>
+        <p:nvSpPr>
+          <p:cNvPr id="2" name="Text 0"/>
+          <p:cNvSpPr/>
+          <p:nvPr>
+            <p:ph idx="100" type="title" hasCustomPrompt="1"/>
+          </p:nvPr>
+        </p:nvSpPr>
+        <p:spPr>
+          <a:xfrm>
+            <a:off x="548640" y="320040"/>
+            <a:ext cx="11064240" cy="777240"/>
+          </a:xfrm>
+          <a:prstGeom prst="rect">
+            <a:avLst/>
+          </a:prstGeom>
+          <a:noFill/>
+          <a:ln/>
+        </p:spPr>
+        <p:txBody>
+          <a:bodyPr wrap="square" lIns="0" tIns="0" rIns="0" bIns="0" rtlCol="0" anchor="ctr"/>
+          <a:lstStyle/>
+          <a:p>
+            <a:pPr algn="l" indent="0" marL="0">
+              <a:buNone/>
+            </a:pPr>
+            <a:r>
+              <a:rPr lang="en-US" sz="3000" b="1" dirty="0">
+                <a:solidFill>
+                  <a:schemeClr val="tx2"/>
+                </a:solidFill>
+              </a:rPr>
+              <a:t>Test Runner: the run report</a:t>
+            </a:r>
+            <a:endParaRPr lang="en-US" sz="3000" dirty="0"/>
+          </a:p>
+        </p:txBody>
+      </p:sp>
+      <p:sp>
+        <p:nvSpPr>
+          <p:cNvPr id="3" name="bug list screenshot frame"/>
+          <p:cNvSpPr/>
+          <p:nvPr/>
+        </p:nvSpPr>
+        <p:spPr>
+          <a:xfrm>
+            <a:off x="548640" y="1371600"/>
+            <a:ext cx="7040880" cy="4400550"/>
+          </a:xfrm>
+          <a:prstGeom prst="rect">
+            <a:avLst/>
+          </a:prstGeom>
+          <a:solidFill>
+            <a:srgbClr val="FFFFFF"/>
+          </a:solidFill>
+          <a:ln w="9525">
+            <a:solidFill>
+              <a:srgbClr val="D5DAE1"/>
+            </a:solidFill>
+            <a:prstDash val="solid"/>
+          </a:ln>
+          <a:effectLst>
+            <a:outerShdw sx="100000" sy="100000" kx="0" ky="0" algn="bl" rotWithShape="0" blurRad="101600" dist="25400" dir="5400000">
+              <a:srgbClr val="000000">
+                <a:alpha val="18000"/>
+              </a:srgbClr>
+            </a:outerShdw>
+          </a:effectLst>
+        </p:spPr>
+      </p:sp>
+      <p:pic>
+        <p:nvPicPr>
+          <p:cNvPr id="4" name="bug list screenshot" descr="preencoded.png">    </p:cNvPr>
+          <p:cNvPicPr>
+            <a:picLocks noChangeAspect="1"/>
+          </p:cNvPicPr>
+          <p:nvPr/>
+        </p:nvPicPr>
+        <p:blipFill>
+          <a:blip r:embed="rId1"/>
+          <a:stretch>
+            <a:fillRect/>
+          </a:stretch>
+        </p:blipFill>
+        <p:spPr>
+          <a:xfrm>
+            <a:off x="548640" y="1371600"/>
+            <a:ext cx="7040880" cy="4400550"/>
+          </a:xfrm>
+          <a:prstGeom prst="rect">
+            <a:avLst/>
+          </a:prstGeom>
+        </p:spPr>
+      </p:pic>
+      <p:sp>
+        <p:nvSpPr>
+          <p:cNvPr id="5" name="icon circle"/>
+          <p:cNvSpPr/>
+          <p:nvPr/>
+        </p:nvSpPr>
+        <p:spPr>
+          <a:xfrm>
+            <a:off x="7955280" y="1371600"/>
+            <a:ext cx="548640" cy="548640"/>
+          </a:xfrm>
+          <a:prstGeom prst="ellipse">
+            <a:avLst/>
+          </a:prstGeom>
+          <a:solidFill>
+            <a:srgbClr val="2A78D6"/>
+          </a:solidFill>
+          <a:ln/>
+        </p:spPr>
+      </p:sp>
+      <p:pic>
+        <p:nvPicPr>
+          <p:cNvPr id="6" name="FaFilter icon" descr="preencoded.png">    </p:cNvPr>
+          <p:cNvPicPr>
+            <a:picLocks noChangeAspect="1"/>
+          </p:cNvPicPr>
+          <p:nvPr/>
+        </p:nvPicPr>
+        <p:blipFill>
+          <a:blip r:embed="rId2"/>
+          <a:stretch>
+            <a:fillRect/>
+          </a:stretch>
+        </p:blipFill>
+        <p:spPr>
+          <a:xfrm>
+            <a:off x="8092440" y="1508760"/>
+            <a:ext cx="274320" cy="274320"/>
+          </a:xfrm>
+          <a:prstGeom prst="rect">
+            <a:avLst/>
+          </a:prstGeom>
+        </p:spPr>
+      </p:pic>
+      <p:sp>
+        <p:nvSpPr>
+          <p:cNvPr id="7" name="Text 3"/>
+          <p:cNvSpPr txBox="1"/>
+          <p:nvPr/>
+        </p:nvSpPr>
+        <p:spPr>
+          <a:xfrm>
+            <a:off x="8686800" y="1353312"/>
+            <a:ext cx="2926080" cy="320040"/>
+          </a:xfrm>
+          <a:prstGeom prst="rect">
+            <a:avLst/>
+          </a:prstGeom>
+          <a:noFill/>
+          <a:ln/>
+        </p:spPr>
+        <p:txBody>
+          <a:bodyPr wrap="square" lIns="0" tIns="0" rIns="0" bIns="0" rtlCol="0" anchor="t"/>
+          <a:lstStyle/>
+          <a:p>
+            <a:pPr indent="0" marL="0">
+              <a:buNone/>
+            </a:pPr>
+            <a:r>
+              <a:rPr lang="en-US" sz="1700" b="1" dirty="0">
+                <a:solidFill>
+                  <a:schemeClr val="tx2"/>
+                </a:solidFill>
+              </a:rPr>
+              <a:t>Pass rate and totals</a:t>
+            </a:r>
+            <a:endParaRPr lang="en-US" sz="1700" dirty="0"/>
+          </a:p>
+        </p:txBody>
+      </p:sp>
+      <p:sp>
+        <p:nvSpPr>
+          <p:cNvPr id="8" name="Text 4"/>
+          <p:cNvSpPr txBox="1"/>
+          <p:nvPr/>
+        </p:nvSpPr>
+        <p:spPr>
+          <a:xfrm>
+            <a:off x="8686800" y="1673352"/>
+            <a:ext cx="2926080" cy="365760"/>
+          </a:xfrm>
+          <a:prstGeom prst="rect">
+            <a:avLst/>
+          </a:prstGeom>
+          <a:noFill/>
+          <a:ln/>
+        </p:spPr>
+        <p:txBody>
+          <a:bodyPr wrap="square" lIns="0" tIns="0" rIns="0" bIns="0" rtlCol="0" anchor="t"/>
+          <a:lstStyle/>
+          <a:p>
+            <a:pPr indent="0" marL="0">
+              <a:buNone/>
+            </a:pPr>
+            <a:r>
+              <a:rPr lang="en-US" sz="1400" dirty="0">
+                <a:solidFill>
+                  <a:schemeClr val="tx1"/>
+                </a:solidFill>
+              </a:rPr>
+              <a:t>Ring chart, passed, failed, bugs found</a:t>
+            </a:r>
+            <a:endParaRPr lang="en-US" sz="1400" dirty="0"/>
+          </a:p>
+        </p:txBody>
+      </p:sp>
+      <p:sp>
+        <p:nvSpPr>
+          <p:cNvPr id="9" name="icon circle"/>
+          <p:cNvSpPr/>
+          <p:nvPr/>
+        </p:nvSpPr>
+        <p:spPr>
+          <a:xfrm>
+            <a:off x="7955280" y="2331720"/>
+            <a:ext cx="548640" cy="548640"/>
+          </a:xfrm>
+          <a:prstGeom prst="ellipse">
+            <a:avLst/>
+          </a:prstGeom>
+          <a:solidFill>
+            <a:srgbClr val="2A78D6"/>
+          </a:solidFill>
+          <a:ln/>
+        </p:spPr>
+      </p:sp>
+      <p:pic>
+        <p:nvPicPr>
+          <p:cNvPr id="10" name="FaSearch icon" descr="preencoded.png">    </p:cNvPr>
+          <p:cNvPicPr>
+            <a:picLocks noChangeAspect="1"/>
+          </p:cNvPicPr>
+          <p:nvPr/>
+        </p:nvPicPr>
+        <p:blipFill>
+          <a:blip r:embed="rId3"/>
+          <a:stretch>
+            <a:fillRect/>
+          </a:stretch>
+        </p:blipFill>
+        <p:spPr>
+          <a:xfrm>
+            <a:off x="8092440" y="2468880"/>
+            <a:ext cx="274320" cy="274320"/>
+          </a:xfrm>
+          <a:prstGeom prst="rect">
+            <a:avLst/>
+          </a:prstGeom>
+        </p:spPr>
+      </p:pic>
+      <p:sp>
+        <p:nvSpPr>
+          <p:cNvPr id="11" name="Text 6"/>
+          <p:cNvSpPr txBox="1"/>
+          <p:nvPr/>
+        </p:nvSpPr>
+        <p:spPr>
+          <a:xfrm>
+            <a:off x="8686800" y="2313432"/>
+            <a:ext cx="2926080" cy="320040"/>
+          </a:xfrm>
+          <a:prstGeom prst="rect">
+            <a:avLst/>
+          </a:prstGeom>
+          <a:noFill/>
+          <a:ln/>
+        </p:spPr>
+        <p:txBody>
+          <a:bodyPr wrap="square" lIns="0" tIns="0" rIns="0" bIns="0" rtlCol="0" anchor="t"/>
+          <a:lstStyle/>
+          <a:p>
+            <a:pPr indent="0" marL="0">
+              <a:buNone/>
+            </a:pPr>
+            <a:r>
+              <a:rPr lang="en-US" sz="1700" b="1" dirty="0">
+                <a:solidFill>
+                  <a:schemeClr val="tx2"/>
+                </a:solidFill>
+              </a:rPr>
+              <a:t>Results by module</a:t>
+            </a:r>
+            <a:endParaRPr lang="en-US" sz="1700" dirty="0"/>
+          </a:p>
+        </p:txBody>
+      </p:sp>
+      <p:sp>
+        <p:nvSpPr>
+          <p:cNvPr id="12" name="Text 7"/>
+          <p:cNvSpPr txBox="1"/>
+          <p:nvPr/>
+        </p:nvSpPr>
+        <p:spPr>
+          <a:xfrm>
+            <a:off x="8686800" y="2633472"/>
+            <a:ext cx="2926080" cy="365760"/>
+          </a:xfrm>
+          <a:prstGeom prst="rect">
+            <a:avLst/>
+          </a:prstGeom>
+          <a:noFill/>
+          <a:ln/>
+        </p:spPr>
+        <p:txBody>
+          <a:bodyPr wrap="square" lIns="0" tIns="0" rIns="0" bIns="0" rtlCol="0" anchor="t"/>
+          <a:lstStyle/>
+          <a:p>
+            <a:pPr indent="0" marL="0">
+              <a:buNone/>
+            </a:pPr>
+            <a:r>
+              <a:rPr lang="en-US" sz="1400" dirty="0">
+                <a:solidFill>
+                  <a:schemeClr val="tx1"/>
+                </a:solidFill>
+              </a:rPr>
+              <a:t>Pass/fail bars, bugs by severity</a:t>
+            </a:r>
+            <a:endParaRPr lang="en-US" sz="1400" dirty="0"/>
+          </a:p>
+        </p:txBody>
+      </p:sp>
+      <p:sp>
+        <p:nvSpPr>
+          <p:cNvPr id="13" name="icon circle"/>
+          <p:cNvSpPr/>
+          <p:nvPr/>
+        </p:nvSpPr>
+        <p:spPr>
+          <a:xfrm>
+            <a:off x="7955280" y="3291840"/>
+            <a:ext cx="548640" cy="548640"/>
+          </a:xfrm>
+          <a:prstGeom prst="ellipse">
+            <a:avLst/>
+          </a:prstGeom>
+          <a:solidFill>
+            <a:srgbClr val="2A78D6"/>
+          </a:solidFill>
+          <a:ln/>
+        </p:spPr>
+      </p:sp>
+      <p:pic>
+        <p:nvPicPr>
+          <p:cNvPr id="14" name="FaImage icon" descr="preencoded.png">    </p:cNvPr>
+          <p:cNvPicPr>
+            <a:picLocks noChangeAspect="1"/>
+          </p:cNvPicPr>
+          <p:nvPr/>
+        </p:nvPicPr>
+        <p:blipFill>
+          <a:blip r:embed="rId4"/>
+          <a:stretch>
+            <a:fillRect/>
+          </a:stretch>
+        </p:blipFill>
+        <p:spPr>
+          <a:xfrm>
+            <a:off x="8092440" y="3429000"/>
+            <a:ext cx="274320" cy="274320"/>
+          </a:xfrm>
+          <a:prstGeom prst="rect">
+            <a:avLst/>
+          </a:prstGeom>
+        </p:spPr>
+      </p:pic>
+      <p:sp>
+        <p:nvSpPr>
+          <p:cNvPr id="15" name="Text 9"/>
+          <p:cNvSpPr txBox="1"/>
+          <p:nvPr/>
+        </p:nvSpPr>
+        <p:spPr>
+          <a:xfrm>
+            <a:off x="8686800" y="3273552"/>
+            <a:ext cx="2926080" cy="320040"/>
+          </a:xfrm>
+          <a:prstGeom prst="rect">
+            <a:avLst/>
+          </a:prstGeom>
+          <a:noFill/>
+          <a:ln/>
+        </p:spPr>
+        <p:txBody>
+          <a:bodyPr wrap="square" lIns="0" tIns="0" rIns="0" bIns="0" rtlCol="0" anchor="t"/>
+          <a:lstStyle/>
+          <a:p>
+            <a:pPr indent="0" marL="0">
+              <a:buNone/>
+            </a:pPr>
+            <a:r>
+              <a:rPr lang="en-US" sz="1700" b="1" dirty="0">
+                <a:solidFill>
+                  <a:schemeClr val="tx2"/>
+                </a:solidFill>
+              </a:rPr>
+              <a:t>Every failure</a:t>
+            </a:r>
+            <a:endParaRPr lang="en-US" sz="1700" dirty="0"/>
+          </a:p>
+        </p:txBody>
+      </p:sp>
+      <p:sp>
+        <p:nvSpPr>
+          <p:cNvPr id="16" name="Text 10"/>
+          <p:cNvSpPr txBox="1"/>
+          <p:nvPr/>
+        </p:nvSpPr>
+        <p:spPr>
+          <a:xfrm>
+            <a:off x="8686800" y="3593592"/>
+            <a:ext cx="2926080" cy="365760"/>
+          </a:xfrm>
+          <a:prstGeom prst="rect">
+            <a:avLst/>
+          </a:prstGeom>
+          <a:noFill/>
+          <a:ln/>
+        </p:spPr>
+        <p:txBody>
+          <a:bodyPr wrap="square" lIns="0" tIns="0" rIns="0" bIns="0" rtlCol="0" anchor="t"/>
+          <a:lstStyle/>
+          <a:p>
+            <a:pPr indent="0" marL="0">
+              <a:buNone/>
+            </a:pPr>
+            <a:r>
+              <a:rPr lang="en-US" sz="1400" dirty="0">
+                <a:solidFill>
+                  <a:schemeClr val="tx1"/>
+                </a:solidFill>
+              </a:rPr>
+              <a:t>Error, ML severity and screenshot</a:t>
+            </a:r>
+            <a:endParaRPr lang="en-US" sz="1400" dirty="0"/>
+          </a:p>
+        </p:txBody>
+      </p:sp>
+      <p:sp>
+        <p:nvSpPr>
+          <p:cNvPr id="17" name="Text 11"/>
+          <p:cNvSpPr txBox="1"/>
+          <p:nvPr/>
+        </p:nvSpPr>
+        <p:spPr>
+          <a:xfrm>
+            <a:off x="7955280" y="4343400"/>
+            <a:ext cx="3657600" cy="320040"/>
+          </a:xfrm>
+          <a:prstGeom prst="rect">
+            <a:avLst/>
+          </a:prstGeom>
+          <a:noFill/>
+          <a:ln/>
+        </p:spPr>
+        <p:txBody>
+          <a:bodyPr wrap="square" lIns="0" tIns="0" rIns="0" bIns="0" rtlCol="0" anchor="t"/>
+          <a:lstStyle/>
+          <a:p>
+            <a:pPr indent="0" marL="0">
+              <a:buNone/>
+            </a:pPr>
+            <a:r>
+              <a:rPr lang="en-US" sz="1700" b="1" dirty="0">
+                <a:solidFill>
+                  <a:schemeClr val="tx2"/>
+                </a:solidFill>
+              </a:rPr>
+              <a:t>Share and keep</a:t>
+            </a:r>
+            <a:endParaRPr lang="en-US" sz="1700" dirty="0"/>
+          </a:p>
+        </p:txBody>
+      </p:sp>
+      <p:sp>
+        <p:nvSpPr>
+          <p:cNvPr id="18" name="status Open"/>
+          <p:cNvSpPr/>
+          <p:nvPr/>
+        </p:nvSpPr>
+        <p:spPr>
+          <a:xfrm>
+            <a:off x="7955280" y="4800600"/>
+            <a:ext cx="1078992" cy="457200"/>
+          </a:xfrm>
+          <a:prstGeom prst="roundRect">
+            <a:avLst>
+              <a:gd name="adj" fmla="val 40000"/>
+            </a:avLst>
+          </a:prstGeom>
+          <a:solidFill>
+            <a:srgbClr val="2A78D6"/>
+          </a:solidFill>
+          <a:ln/>
+        </p:spPr>
+        <p:txBody>
+          <a:bodyPr wrap="square" lIns="0" tIns="0" rIns="0" bIns="0" rtlCol="0" anchor="ctr"/>
+          <a:lstStyle/>
+          <a:p>
+            <a:pPr algn="ctr" indent="0" marL="0">
+              <a:buNone/>
+            </a:pPr>
+            <a:r>
+              <a:rPr lang="en-US" sz="1300" b="1" dirty="0">
+                <a:solidFill>
+                  <a:schemeClr val="bg1"/>
+                </a:solidFill>
+              </a:rPr>
+              <a:t>Download</a:t>
+            </a:r>
+            <a:endParaRPr lang="en-US" sz="1300" dirty="0"/>
+          </a:p>
+        </p:txBody>
+      </p:sp>
+      <p:sp>
+        <p:nvSpPr>
+          <p:cNvPr id="19" name="arrow"/>
+          <p:cNvSpPr/>
+          <p:nvPr/>
+        </p:nvSpPr>
+        <p:spPr>
+          <a:xfrm>
+            <a:off x="9043416" y="5029200"/>
+            <a:ext cx="164592" cy="0"/>
+          </a:xfrm>
+          <a:prstGeom prst="line">
+            <a:avLst/>
+          </a:prstGeom>
+          <a:noFill/>
+          <a:ln w="25400">
+            <a:solidFill>
+              <a:srgbClr val="10243F"/>
+            </a:solidFill>
+            <a:prstDash val="solid"/>
+            <a:tailEnd type="triangle"/>
+          </a:ln>
+        </p:spPr>
+      </p:sp>
+      <p:sp>
+        <p:nvSpPr>
+          <p:cNvPr id="20" name="status In Progress"/>
+          <p:cNvSpPr/>
+          <p:nvPr/>
+        </p:nvSpPr>
+        <p:spPr>
+          <a:xfrm>
+            <a:off x="9217152" y="4800600"/>
+            <a:ext cx="1078992" cy="457200"/>
+          </a:xfrm>
+          <a:prstGeom prst="roundRect">
+            <a:avLst>
+              <a:gd name="adj" fmla="val 40000"/>
+            </a:avLst>
+          </a:prstGeom>
+          <a:solidFill>
+            <a:srgbClr val="6250D6"/>
+          </a:solidFill>
+          <a:ln/>
+        </p:spPr>
+        <p:txBody>
+          <a:bodyPr wrap="square" lIns="0" tIns="0" rIns="0" bIns="0" rtlCol="0" anchor="ctr"/>
+          <a:lstStyle/>
+          <a:p>
+            <a:pPr algn="ctr" indent="0" marL="0">
+              <a:buNone/>
+            </a:pPr>
+            <a:r>
+              <a:rPr lang="en-US" sz="1300" b="1" dirty="0">
+                <a:solidFill>
+                  <a:schemeClr val="bg1"/>
+                </a:solidFill>
+              </a:rPr>
+              <a:t>Email</a:t>
+            </a:r>
+            <a:endParaRPr lang="en-US" sz="1300" dirty="0"/>
+          </a:p>
+        </p:txBody>
+      </p:sp>
+      <p:sp>
+        <p:nvSpPr>
+          <p:cNvPr id="21" name="arrow"/>
+          <p:cNvSpPr/>
+          <p:nvPr/>
+        </p:nvSpPr>
+        <p:spPr>
+          <a:xfrm>
+            <a:off x="10305288" y="5029200"/>
+            <a:ext cx="164592" cy="0"/>
+          </a:xfrm>
+          <a:prstGeom prst="line">
+            <a:avLst/>
+          </a:prstGeom>
+          <a:noFill/>
+          <a:ln w="25400">
+            <a:solidFill>
+              <a:srgbClr val="10243F"/>
+            </a:solidFill>
+            <a:prstDash val="solid"/>
+            <a:tailEnd type="triangle"/>
+          </a:ln>
+        </p:spPr>
+      </p:sp>
+      <p:sp>
+        <p:nvSpPr>
+          <p:cNvPr id="22" name="status Resolved"/>
+          <p:cNvSpPr/>
+          <p:nvPr/>
+        </p:nvSpPr>
+        <p:spPr>
+          <a:xfrm>
+            <a:off x="10479024" y="4800600"/>
+            <a:ext cx="1078992" cy="457200"/>
+          </a:xfrm>
+          <a:prstGeom prst="roundRect">
+            <a:avLst>
+              <a:gd name="adj" fmla="val 40000"/>
+            </a:avLst>
+          </a:prstGeom>
+          <a:solidFill>
+            <a:srgbClr val="1B8E4E"/>
+          </a:solidFill>
+          <a:ln/>
+        </p:spPr>
+        <p:txBody>
+          <a:bodyPr wrap="square" lIns="0" tIns="0" rIns="0" bIns="0" rtlCol="0" anchor="ctr"/>
+          <a:lstStyle/>
+          <a:p>
+            <a:pPr algn="ctr" indent="0" marL="0">
+              <a:buNone/>
+            </a:pPr>
+            <a:r>
+              <a:rPr lang="en-US" sz="1300" b="1" dirty="0">
+                <a:solidFill>
+                  <a:schemeClr val="bg1"/>
+                </a:solidFill>
+              </a:rPr>
+              <a:t>History</a:t>
+            </a:r>
+            <a:endParaRPr lang="en-US" sz="1300" dirty="0"/>
+          </a:p>
+        </p:txBody>
+      </p:sp>
+      <p:sp>
+        <p:nvSpPr>
+          <p:cNvPr id="23" name="Text 17"/>
+          <p:cNvSpPr txBox="1"/>
+          <p:nvPr/>
+        </p:nvSpPr>
+        <p:spPr>
+          <a:xfrm>
+            <a:off x="7955280" y="5440680"/>
+            <a:ext cx="3657600" cy="320040"/>
+          </a:xfrm>
+          <a:prstGeom prst="rect">
+            <a:avLst/>
+          </a:prstGeom>
+          <a:noFill/>
+          <a:ln/>
+        </p:spPr>
+        <p:txBody>
+          <a:bodyPr wrap="square" lIns="0" tIns="0" rIns="0" bIns="0" rtlCol="0" anchor="t"/>
+          <a:lstStyle/>
+          <a:p>
+            <a:pPr indent="0" marL="0">
+              <a:buNone/>
+            </a:pPr>
+            <a:r>
+              <a:rPr lang="en-US" sz="1400" dirty="0">
+                <a:solidFill>
+                  <a:srgbClr val="5B6472"/>
+                </a:solidFill>
+              </a:rPr>
+              <a:t>Each run is named with its date first</a:t>
+            </a:r>
+            <a:endParaRPr lang="en-US" sz="1400" dirty="0"/>
+          </a:p>
+        </p:txBody>
+      </p:sp>
+      <p:sp>
+        <p:nvSpPr>
+          <p:cNvPr id="25" name="Slide Number Placeholder 0"/>
+          <p:cNvSpPr>
+            <a:spLocks noGrp="1"/>
+          </p:cNvSpPr>
+          <p:nvPr>
+            <p:ph type="sldNum" sz="quarter" idx="4294967295"/>
+          </p:nvPr>
+        </p:nvSpPr>
+        <p:spPr>
+          <a:xfrm>
+            <a:off x="11155680" y="6419088"/>
+            <a:ext cx="457200" cy="274320"/>
+          </a:xfrm>
+          <a:prstGeom prst="rect">
+            <a:avLst/>
+          </a:prstGeom>
+          <a:extLst>
+            <a:ext uri="{C572A759-6A51-4108-AA02-DFA0A04FC94B}">
+              <ma14:wrappingTextBoxFlag xmlns:ma14="http://schemas.microsoft.com/office/mac/drawingml/2011/main" val="0"/>
+            </a:ext>
+          </a:extLst>
+        </p:spPr>
+        <p:txBody>
+          <a:bodyPr/>
+          <a:lstStyle>
+            <a:lvl1pPr>
+              <a:defRPr sz="1000">
+                <a:solidFill>
+                  <a:srgbClr val="5B6472"/>
+                </a:solidFill>
+              </a:defRPr>
+            </a:lvl1pPr>
+          </a:lstStyle>
+          <a:p>
+            <a:pPr algn="r"/>
+            <a:fld id="{F7021451-1387-4CA6-816F-3879F97B5CBC}" type="slidenum">
+              <a:rPr b="0" lang="en-US"/>
+              <a:t>12</a:t>
             </a:fld>
             <a:endParaRPr lang="en-US"/>
           </a:p>

--- a/presentation/Automated_Bug_Reporting_Presentation.pptx
+++ b/presentation/Automated_Bug_Reporting_Presentation.pptx
@@ -4092,7 +4092,7 @@
           <a:p>
             <a:r>
               <a:rPr lang="en-US" dirty="0"/>
-              <a:t>The manager asked that manual testers can run the automation without VS Code. This is the Test Runner: a web page with a suite dropdown, an email box and a Run button. The tester double-clicks Start Test Runner, chooses Smoke, Sanity, Regression or Broken links, types the email addresses and presses Run. The server starts Playwright with the suite tag, the page shows live progress, and when the run ends the report opens in the same page and is emailed to the people entered. Every run is kept in the run history with the date as prefix.</a:t>
+              <a:t>The manager asked that manual testers can run the automation without VS Code. This is the Test Runner. The tester double-clicks Start Test Runner, the page opens, and nothing runs until they choose Smoke, Sanity, Regression or Broken links and press Run. In headed mode a browser window opens and every test can be watched, one at a time, while the page shows live progress. When the run ends the report opens in the same page, and if a Critical bug was found it is emailed to the addresses entered. Every run is kept in the run history with the date as prefix.</a:t>
             </a:r>
             <a:endParaRPr lang="en-US" dirty="0"/>
           </a:p>
@@ -4180,7 +4180,7 @@
           <a:p>
             <a:r>
               <a:rPr lang="en-US" dirty="0"/>
-              <a:t>This is the report of a Regression run, shown in the same UI. At the top: the run name with the date first, the status, suite, duration and who received the email. Then the pass rate, the totals, results by module and bugs by severity, with the Critical bugs called out. Below, every test is listed by module; clicking a failed test shows its error, its ML severity and the screenshot. The report can be downloaded as one self-contained HTML file, it is emailed automatically, and it stays in the run history.</a:t>
+              <a:t>This is the report of a run, shown in the same UI. At the top: the run name with the date first, the status, suite, duration and the email status. Then the pass rate, the totals, results by module and bugs by severity, with the Critical bugs called out. Below, every test is listed by module; clicking a failed test shows its error, its ML severity and the screenshot, and its Re-run button runs just that test again. Re-run failed tests runs all failed tests of that run. The report can be downloaded as one HTML file and stays in the run history.</a:t>
             </a:r>
             <a:endParaRPr lang="en-US" dirty="0"/>
           </a:p>
@@ -16232,7 +16232,7 @@
                   <a:schemeClr val="tx1"/>
                 </a:solidFill>
               </a:rPr>
-              <a:t>Report emailed when the run ends</a:t>
+              <a:t>Emailed when a Critical bug is found</a:t>
             </a:r>
             <a:endParaRPr lang="en-US" sz="1400" dirty="0"/>
           </a:p>
@@ -16348,7 +16348,7 @@
                   <a:schemeClr val="tx1"/>
                 </a:solidFill>
               </a:rPr>
-              <a:t>Live progress, report in the same UI</a:t>
+              <a:t>Headed browser, live progress, report</a:t>
             </a:r>
             <a:endParaRPr lang="en-US" sz="1400" dirty="0"/>
           </a:p>
@@ -17100,7 +17100,7 @@
                   <a:schemeClr val="tx1"/>
                 </a:solidFill>
               </a:rPr>
-              <a:t>Error, ML severity and screenshot</a:t>
+              <a:t>Error, screenshot, one-click Re-run</a:t>
             </a:r>
             <a:endParaRPr lang="en-US" sz="1400" dirty="0"/>
           </a:p>
@@ -21349,7 +21349,7 @@
                   <a:schemeClr val="tx2"/>
                 </a:solidFill>
               </a:rPr>
-              <a:t>Chart.js 4.5</a:t>
+              <a:t>HTML/CSS charts</a:t>
             </a:r>
             <a:endParaRPr lang="en-US" sz="1900" dirty="0"/>
           </a:p>
@@ -21385,7 +21385,7 @@
                   <a:schemeClr val="tx1"/>
                 </a:solidFill>
               </a:rPr>
-              <a:t>Module, severity and trend charts</a:t>
+              <a:t>Light, no chart library needed</a:t>
             </a:r>
             <a:endParaRPr lang="en-US" sz="1500" dirty="0"/>
           </a:p>
